--- a/docs/apresentacao/apresentacao_rota_em_dia.pptx
+++ b/docs/apresentacao/apresentacao_rota_em_dia.pptx
@@ -5085,7 +5085,7 @@
               </a:defRPr>
             </a:pPr>
             <a:r>
-              <a:t>Atrasos no transporte</a:t>
+              <a:t>R03 e R05 desde 06/04</a:t>
             </a:r>
           </a:p>
         </p:txBody>
@@ -5247,7 +5247,7 @@
               </a:defRPr>
             </a:pPr>
             <a:r>
-              <a:t>As Perguntas</a:t>
+              <a:t>A Investigação</a:t>
             </a:r>
           </a:p>
         </p:txBody>
@@ -5283,7 +5283,7 @@
               </a:defRPr>
             </a:pPr>
             <a:r>
-              <a:t>Três hipóteses</a:t>
+              <a:t>Três hipóteses testadas</a:t>
             </a:r>
           </a:p>
         </p:txBody>
@@ -5445,7 +5445,7 @@
               </a:defRPr>
             </a:pPr>
             <a:r>
-              <a:t>O Dataset</a:t>
+              <a:t>Os Dados</a:t>
             </a:r>
           </a:p>
         </p:txBody>
@@ -5481,7 +5481,7 @@
               </a:defRPr>
             </a:pPr>
             <a:r>
-              <a:t>2.463 viagens</a:t>
+              <a:t>O que a limpeza mudou</a:t>
             </a:r>
           </a:p>
         </p:txBody>
@@ -5643,7 +5643,7 @@
               </a:defRPr>
             </a:pPr>
             <a:r>
-              <a:t>O Achado</a:t>
+              <a:t>A Resolução</a:t>
             </a:r>
           </a:p>
         </p:txBody>
@@ -5679,7 +5679,7 @@
               </a:defRPr>
             </a:pPr>
             <a:r>
-              <a:t>R03 e R05 desde 06/04</a:t>
+              <a:t>Explicação mais plausível</a:t>
             </a:r>
           </a:p>
         </p:txBody>
@@ -5841,7 +5841,7 @@
               </a:defRPr>
             </a:pPr>
             <a:r>
-              <a:t>Os Entregáveis</a:t>
+              <a:t>As Ações</a:t>
             </a:r>
           </a:p>
         </p:txBody>
@@ -5877,7 +5877,7 @@
               </a:defRPr>
             </a:pPr>
             <a:r>
-              <a:t>Colab e relatório</a:t>
+              <a:t>Limites e próximos passos</a:t>
             </a:r>
           </a:p>
         </p:txBody>
@@ -6935,7 +6935,7 @@
               </a:defRPr>
             </a:pPr>
             <a:r>
-              <a:t>O Problema</a:t>
+              <a:t>Ato 1 · O Problema</a:t>
             </a:r>
           </a:p>
         </p:txBody>
@@ -6949,7 +6949,7 @@
         <p:spPr>
           <a:xfrm>
             <a:off x="658368" y="1115568"/>
-            <a:ext cx="6720840" cy="3246120"/>
+            <a:ext cx="10881360" cy="1600200"/>
           </a:xfrm>
           <a:prstGeom prst="roundRect">
             <a:avLst/>
@@ -6991,8 +6991,8 @@
         </p:nvSpPr>
         <p:spPr>
           <a:xfrm>
-            <a:off x="987552" y="1444752"/>
-            <a:ext cx="6080760" cy="1024128"/>
+            <a:off x="987552" y="1371600"/>
+            <a:ext cx="10241280" cy="1097280"/>
           </a:xfrm>
           <a:prstGeom prst="rect">
             <a:avLst/>
@@ -7014,21 +7014,64 @@
               </a:defRPr>
             </a:pPr>
             <a:r>
-              <a:t>Colaboradores chegam atrasados à linha porque os ônibus fretados não cumprem o horário planejado.</a:t>
-            </a:r>
-          </a:p>
-        </p:txBody>
-      </p:sp>
-      <p:sp>
-        <p:nvSpPr>
-          <p:cNvPr id="19" name="TextBox 18"/>
+              <a:t>A pontualidade geral de 81,9% esconde uma ruptura: R03 e R05 passaram a chegar atrasadas nos turnos diurnos desde 6 de abril.</a:t>
+            </a:r>
+          </a:p>
+        </p:txBody>
+      </p:sp>
+      <p:sp>
+        <p:nvSpPr>
+          <p:cNvPr id="19" name="Rounded Rectangle 18"/>
+          <p:cNvSpPr/>
+          <p:nvPr/>
+        </p:nvSpPr>
+        <p:spPr>
+          <a:xfrm>
+            <a:off x="658368" y="3017520"/>
+            <a:ext cx="3520440" cy="1417320"/>
+          </a:xfrm>
+          <a:prstGeom prst="roundRect">
+            <a:avLst/>
+          </a:prstGeom>
+          <a:solidFill>
+            <a:srgbClr val="FFF8E8"/>
+          </a:solidFill>
+          <a:ln>
+            <a:noFill/>
+          </a:ln>
+        </p:spPr>
+        <p:style>
+          <a:lnRef idx="1">
+            <a:schemeClr val="accent1"/>
+          </a:lnRef>
+          <a:fillRef idx="3">
+            <a:schemeClr val="accent1"/>
+          </a:fillRef>
+          <a:effectRef idx="2">
+            <a:schemeClr val="accent1"/>
+          </a:effectRef>
+          <a:fontRef idx="minor">
+            <a:schemeClr val="lt1"/>
+          </a:fontRef>
+        </p:style>
+        <p:txBody>
+          <a:bodyPr rtlCol="0" anchor="ctr"/>
+          <a:lstStyle/>
+          <a:p>
+            <a:pPr algn="ctr"/>
+          </a:p>
+        </p:txBody>
+      </p:sp>
+      <p:sp>
+        <p:nvSpPr>
+          <p:cNvPr id="20" name="TextBox 19"/>
           <p:cNvSpPr txBox="1"/>
           <p:nvPr/>
         </p:nvSpPr>
         <p:spPr>
           <a:xfrm>
-            <a:off x="987552" y="2770632"/>
-            <a:ext cx="5943600" cy="804672"/>
+            <a:off x="822959" y="3145536"/>
+            <a:ext cx="3191256" cy="530352"/>
           </a:xfrm>
           <a:prstGeom prst="rect">
             <a:avLst/>
@@ -7042,7 +7085,43 @@
           <a:lstStyle/>
           <a:p>
             <a:pPr algn="l">
-              <a:defRPr sz="1600" b="0">
+              <a:defRPr sz="2800" b="1">
+                <a:solidFill>
+                  <a:srgbClr val="005A67"/>
+                </a:solidFill>
+                <a:latin typeface="Noto Sans"/>
+              </a:defRPr>
+            </a:pPr>
+            <a:r>
+              <a:t>84% → 19%</a:t>
+            </a:r>
+          </a:p>
+        </p:txBody>
+      </p:sp>
+      <p:sp>
+        <p:nvSpPr>
+          <p:cNvPr id="21" name="TextBox 20"/>
+          <p:cNvSpPr txBox="1"/>
+          <p:nvPr/>
+        </p:nvSpPr>
+        <p:spPr>
+          <a:xfrm>
+            <a:off x="822959" y="3749039"/>
+            <a:ext cx="3191256" cy="585216"/>
+          </a:xfrm>
+          <a:prstGeom prst="rect">
+            <a:avLst/>
+          </a:prstGeom>
+          <a:noFill/>
+        </p:spPr>
+        <p:txBody>
+          <a:bodyPr wrap="square" lIns="36576" rIns="36576" tIns="36576" bIns="36576" anchor="t">
+            <a:spAutoFit/>
+          </a:bodyPr>
+          <a:lstStyle/>
+          <a:p>
+            <a:pPr algn="l">
+              <a:defRPr sz="1250" b="0">
                 <a:solidFill>
                   <a:srgbClr val="17343A"/>
                 </a:solidFill>
@@ -7050,21 +7129,21 @@
               </a:defRPr>
             </a:pPr>
             <a:r>
-              <a:t>O RH precisa saber se a piora é geral, onde ela se concentra e qual explicação os dados realmente sustentam.</a:t>
-            </a:r>
-          </a:p>
-        </p:txBody>
-      </p:sp>
-      <p:sp>
-        <p:nvSpPr>
-          <p:cNvPr id="20" name="Rounded Rectangle 19"/>
-          <p:cNvSpPr/>
-          <p:nvPr/>
-        </p:nvSpPr>
-        <p:spPr>
-          <a:xfrm>
-            <a:off x="7754112" y="1188720"/>
-            <a:ext cx="1600200" cy="1143000"/>
+              <a:t>Pontualidade de R03/R05 de dia, antes e depois de 06/04</a:t>
+            </a:r>
+          </a:p>
+        </p:txBody>
+      </p:sp>
+      <p:sp>
+        <p:nvSpPr>
+          <p:cNvPr id="22" name="Rounded Rectangle 21"/>
+          <p:cNvSpPr/>
+          <p:nvPr/>
+        </p:nvSpPr>
+        <p:spPr>
+          <a:xfrm>
+            <a:off x="4334256" y="3017520"/>
+            <a:ext cx="3520440" cy="1417320"/>
           </a:xfrm>
           <a:prstGeom prst="roundRect">
             <a:avLst/>
@@ -7100,14 +7179,14 @@
       </p:sp>
       <p:sp>
         <p:nvSpPr>
-          <p:cNvPr id="21" name="TextBox 20"/>
+          <p:cNvPr id="23" name="TextBox 22"/>
           <p:cNvSpPr txBox="1"/>
           <p:nvPr/>
         </p:nvSpPr>
         <p:spPr>
           <a:xfrm>
-            <a:off x="7882128" y="1307592"/>
-            <a:ext cx="1344168" cy="475488"/>
+            <a:off x="4498848" y="3145536"/>
+            <a:ext cx="3191256" cy="530352"/>
           </a:xfrm>
           <a:prstGeom prst="rect">
             <a:avLst/>
@@ -7121,7 +7200,122 @@
           <a:lstStyle/>
           <a:p>
             <a:pPr algn="l">
-              <a:defRPr sz="2500" b="1">
+              <a:defRPr sz="2800" b="1">
+                <a:solidFill>
+                  <a:srgbClr val="F06449"/>
+                </a:solidFill>
+                <a:latin typeface="Noto Sans"/>
+              </a:defRPr>
+            </a:pPr>
+            <a:r>
+              <a:t>12 min</a:t>
+            </a:r>
+          </a:p>
+        </p:txBody>
+      </p:sp>
+      <p:sp>
+        <p:nvSpPr>
+          <p:cNvPr id="24" name="TextBox 23"/>
+          <p:cNvSpPr txBox="1"/>
+          <p:nvPr/>
+        </p:nvSpPr>
+        <p:spPr>
+          <a:xfrm>
+            <a:off x="4498848" y="3749039"/>
+            <a:ext cx="3191256" cy="585216"/>
+          </a:xfrm>
+          <a:prstGeom prst="rect">
+            <a:avLst/>
+          </a:prstGeom>
+          <a:noFill/>
+        </p:spPr>
+        <p:txBody>
+          <a:bodyPr wrap="square" lIns="36576" rIns="36576" tIns="36576" bIns="36576" anchor="t">
+            <a:spAutoFit/>
+          </a:bodyPr>
+          <a:lstStyle/>
+          <a:p>
+            <a:pPr algn="l">
+              <a:defRPr sz="1250" b="0">
+                <a:solidFill>
+                  <a:srgbClr val="17343A"/>
+                </a:solidFill>
+                <a:latin typeface="Noto Sans"/>
+              </a:defRPr>
+            </a:pPr>
+            <a:r>
+              <a:t>Mediana do atraso das duas rotas de dia, para um limite de 5 min</a:t>
+            </a:r>
+          </a:p>
+        </p:txBody>
+      </p:sp>
+      <p:sp>
+        <p:nvSpPr>
+          <p:cNvPr id="25" name="Rounded Rectangle 24"/>
+          <p:cNvSpPr/>
+          <p:nvPr/>
+        </p:nvSpPr>
+        <p:spPr>
+          <a:xfrm>
+            <a:off x="8010144" y="3017520"/>
+            <a:ext cx="3529584" cy="1417320"/>
+          </a:xfrm>
+          <a:prstGeom prst="roundRect">
+            <a:avLst/>
+          </a:prstGeom>
+          <a:solidFill>
+            <a:srgbClr val="FFF8E8"/>
+          </a:solidFill>
+          <a:ln>
+            <a:noFill/>
+          </a:ln>
+        </p:spPr>
+        <p:style>
+          <a:lnRef idx="1">
+            <a:schemeClr val="accent1"/>
+          </a:lnRef>
+          <a:fillRef idx="3">
+            <a:schemeClr val="accent1"/>
+          </a:fillRef>
+          <a:effectRef idx="2">
+            <a:schemeClr val="accent1"/>
+          </a:effectRef>
+          <a:fontRef idx="minor">
+            <a:schemeClr val="lt1"/>
+          </a:fontRef>
+        </p:style>
+        <p:txBody>
+          <a:bodyPr rtlCol="0" anchor="ctr"/>
+          <a:lstStyle/>
+          <a:p>
+            <a:pPr algn="ctr"/>
+          </a:p>
+        </p:txBody>
+      </p:sp>
+      <p:sp>
+        <p:nvSpPr>
+          <p:cNvPr id="26" name="TextBox 25"/>
+          <p:cNvSpPr txBox="1"/>
+          <p:nvPr/>
+        </p:nvSpPr>
+        <p:spPr>
+          <a:xfrm>
+            <a:off x="8174736" y="3145536"/>
+            <a:ext cx="3200400" cy="530352"/>
+          </a:xfrm>
+          <a:prstGeom prst="rect">
+            <a:avLst/>
+          </a:prstGeom>
+          <a:noFill/>
+        </p:spPr>
+        <p:txBody>
+          <a:bodyPr wrap="square" lIns="36576" rIns="36576" tIns="36576" bIns="36576" anchor="t">
+            <a:spAutoFit/>
+          </a:bodyPr>
+          <a:lstStyle/>
+          <a:p>
+            <a:pPr algn="l">
+              <a:defRPr sz="2800" b="1">
                 <a:solidFill>
                   <a:srgbClr val="005A67"/>
                 </a:solidFill>
@@ -7129,21 +7323,21 @@
               </a:defRPr>
             </a:pPr>
             <a:r>
-              <a:t>8</a:t>
-            </a:r>
-          </a:p>
-        </p:txBody>
-      </p:sp>
-      <p:sp>
-        <p:nvSpPr>
-          <p:cNvPr id="22" name="TextBox 21"/>
+              <a:t>53 de 191</a:t>
+            </a:r>
+          </a:p>
+        </p:txBody>
+      </p:sp>
+      <p:sp>
+        <p:nvSpPr>
+          <p:cNvPr id="27" name="TextBox 26"/>
           <p:cNvSpPr txBox="1"/>
           <p:nvPr/>
         </p:nvSpPr>
         <p:spPr>
           <a:xfrm>
-            <a:off x="7882128" y="1819656"/>
-            <a:ext cx="1344168" cy="347472"/>
+            <a:off x="8174736" y="3749039"/>
+            <a:ext cx="3200400" cy="585216"/>
           </a:xfrm>
           <a:prstGeom prst="rect">
             <a:avLst/>
@@ -7157,7 +7351,7 @@
           <a:lstStyle/>
           <a:p>
             <a:pPr algn="l">
-              <a:defRPr sz="1150" b="0">
+              <a:defRPr sz="1250" b="0">
                 <a:solidFill>
                   <a:srgbClr val="17343A"/>
                 </a:solidFill>
@@ -7165,27 +7359,27 @@
               </a:defRPr>
             </a:pPr>
             <a:r>
-              <a:t>Rotas</a:t>
-            </a:r>
-          </a:p>
-        </p:txBody>
-      </p:sp>
-      <p:sp>
-        <p:nvSpPr>
-          <p:cNvPr id="23" name="Rounded Rectangle 22"/>
-          <p:cNvSpPr/>
-          <p:nvPr/>
-        </p:nvSpPr>
-        <p:spPr>
-          <a:xfrm>
-            <a:off x="9500616" y="1188720"/>
-            <a:ext cx="1600200" cy="1143000"/>
+              <a:t>viagens chegam depois do início do turno (demais rotas: 14)</a:t>
+            </a:r>
+          </a:p>
+        </p:txBody>
+      </p:sp>
+      <p:sp>
+        <p:nvSpPr>
+          <p:cNvPr id="28" name="Rounded Rectangle 27"/>
+          <p:cNvSpPr/>
+          <p:nvPr/>
+        </p:nvSpPr>
+        <p:spPr>
+          <a:xfrm>
+            <a:off x="658368" y="4736592"/>
+            <a:ext cx="10881360" cy="1078992"/>
           </a:xfrm>
           <a:prstGeom prst="roundRect">
             <a:avLst/>
           </a:prstGeom>
           <a:solidFill>
-            <a:srgbClr val="FFF8E8"/>
+            <a:srgbClr val="005A67"/>
           </a:solidFill>
           <a:ln>
             <a:noFill/>
@@ -7215,14 +7409,14 @@
       </p:sp>
       <p:sp>
         <p:nvSpPr>
-          <p:cNvPr id="24" name="TextBox 23"/>
+          <p:cNvPr id="29" name="TextBox 28"/>
           <p:cNvSpPr txBox="1"/>
           <p:nvPr/>
         </p:nvSpPr>
         <p:spPr>
           <a:xfrm>
-            <a:off x="9628632" y="1307592"/>
-            <a:ext cx="1344168" cy="475488"/>
+            <a:off x="960120" y="4919472"/>
+            <a:ext cx="10241280" cy="749808"/>
           </a:xfrm>
           <a:prstGeom prst="rect">
             <a:avLst/>
@@ -7236,618 +7430,22 @@
           <a:lstStyle/>
           <a:p>
             <a:pPr algn="l">
-              <a:defRPr sz="2500" b="1">
+              <a:defRPr sz="1550" b="1">
                 <a:solidFill>
-                  <a:srgbClr val="F06449"/>
+                  <a:srgbClr val="FFF8E8"/>
                 </a:solidFill>
                 <a:latin typeface="Noto Sans"/>
               </a:defRPr>
             </a:pPr>
             <a:r>
-              <a:t>3</a:t>
-            </a:r>
-          </a:p>
-        </p:txBody>
-      </p:sp>
-      <p:sp>
-        <p:nvSpPr>
-          <p:cNvPr id="25" name="TextBox 24"/>
-          <p:cNvSpPr txBox="1"/>
-          <p:nvPr/>
-        </p:nvSpPr>
-        <p:spPr>
-          <a:xfrm>
-            <a:off x="9628632" y="1819656"/>
-            <a:ext cx="1344168" cy="347472"/>
-          </a:xfrm>
-          <a:prstGeom prst="rect">
-            <a:avLst/>
-          </a:prstGeom>
-          <a:noFill/>
-        </p:spPr>
-        <p:txBody>
-          <a:bodyPr wrap="square" lIns="36576" rIns="36576" tIns="36576" bIns="36576" anchor="t">
-            <a:spAutoFit/>
-          </a:bodyPr>
-          <a:lstStyle/>
-          <a:p>
-            <a:pPr algn="l">
-              <a:defRPr sz="1150" b="0">
-                <a:solidFill>
-                  <a:srgbClr val="17343A"/>
-                </a:solidFill>
-                <a:latin typeface="Noto Sans"/>
-              </a:defRPr>
-            </a:pPr>
-            <a:r>
-              <a:t>Turnos</a:t>
-            </a:r>
-          </a:p>
-        </p:txBody>
-      </p:sp>
-      <p:sp>
-        <p:nvSpPr>
-          <p:cNvPr id="26" name="Rounded Rectangle 25"/>
-          <p:cNvSpPr/>
-          <p:nvPr/>
-        </p:nvSpPr>
-        <p:spPr>
-          <a:xfrm>
-            <a:off x="7754112" y="2578608"/>
-            <a:ext cx="3346704" cy="1143000"/>
-          </a:xfrm>
-          <a:prstGeom prst="roundRect">
-            <a:avLst/>
-          </a:prstGeom>
-          <a:solidFill>
-            <a:srgbClr val="FFF8E8"/>
-          </a:solidFill>
-          <a:ln>
-            <a:noFill/>
-          </a:ln>
-        </p:spPr>
-        <p:style>
-          <a:lnRef idx="1">
-            <a:schemeClr val="accent1"/>
-          </a:lnRef>
-          <a:fillRef idx="3">
-            <a:schemeClr val="accent1"/>
-          </a:fillRef>
-          <a:effectRef idx="2">
-            <a:schemeClr val="accent1"/>
-          </a:effectRef>
-          <a:fontRef idx="minor">
-            <a:schemeClr val="lt1"/>
-          </a:fontRef>
-        </p:style>
-        <p:txBody>
-          <a:bodyPr rtlCol="0" anchor="ctr"/>
-          <a:lstStyle/>
-          <a:p>
-            <a:pPr algn="ctr"/>
-          </a:p>
-        </p:txBody>
-      </p:sp>
-      <p:sp>
-        <p:nvSpPr>
-          <p:cNvPr id="27" name="TextBox 26"/>
-          <p:cNvSpPr txBox="1"/>
-          <p:nvPr/>
-        </p:nvSpPr>
-        <p:spPr>
-          <a:xfrm>
-            <a:off x="7882128" y="2697479"/>
-            <a:ext cx="3090672" cy="475488"/>
-          </a:xfrm>
-          <a:prstGeom prst="rect">
-            <a:avLst/>
-          </a:prstGeom>
-          <a:noFill/>
-        </p:spPr>
-        <p:txBody>
-          <a:bodyPr wrap="square" lIns="36576" rIns="36576" tIns="36576" bIns="36576" anchor="t">
-            <a:spAutoFit/>
-          </a:bodyPr>
-          <a:lstStyle/>
-          <a:p>
-            <a:pPr algn="l">
-              <a:defRPr sz="2500" b="1">
-                <a:solidFill>
-                  <a:srgbClr val="005A67"/>
-                </a:solidFill>
-                <a:latin typeface="Noto Sans"/>
-              </a:defRPr>
-            </a:pPr>
-            <a:r>
-              <a:t>≤ 5 min</a:t>
-            </a:r>
-          </a:p>
-        </p:txBody>
-      </p:sp>
-      <p:sp>
-        <p:nvSpPr>
-          <p:cNvPr id="28" name="TextBox 27"/>
-          <p:cNvSpPr txBox="1"/>
-          <p:nvPr/>
-        </p:nvSpPr>
-        <p:spPr>
-          <a:xfrm>
-            <a:off x="7882128" y="3209544"/>
-            <a:ext cx="3090672" cy="347472"/>
-          </a:xfrm>
-          <a:prstGeom prst="rect">
-            <a:avLst/>
-          </a:prstGeom>
-          <a:noFill/>
-        </p:spPr>
-        <p:txBody>
-          <a:bodyPr wrap="square" lIns="36576" rIns="36576" tIns="36576" bIns="36576" anchor="t">
-            <a:spAutoFit/>
-          </a:bodyPr>
-          <a:lstStyle/>
-          <a:p>
-            <a:pPr algn="l">
-              <a:defRPr sz="1150" b="0">
-                <a:solidFill>
-                  <a:srgbClr val="17343A"/>
-                </a:solidFill>
-                <a:latin typeface="Noto Sans"/>
-              </a:defRPr>
-            </a:pPr>
-            <a:r>
-              <a:t>Limite de pontualidade</a:t>
-            </a:r>
-          </a:p>
-        </p:txBody>
-      </p:sp>
-      <p:sp>
-        <p:nvSpPr>
-          <p:cNvPr id="29" name="Rounded Rectangle 28"/>
-          <p:cNvSpPr/>
-          <p:nvPr/>
-        </p:nvSpPr>
-        <p:spPr>
-          <a:xfrm>
-            <a:off x="7754112" y="3968496"/>
-            <a:ext cx="3346704" cy="1143000"/>
-          </a:xfrm>
-          <a:prstGeom prst="roundRect">
-            <a:avLst/>
-          </a:prstGeom>
-          <a:solidFill>
-            <a:srgbClr val="FFF8E8"/>
-          </a:solidFill>
-          <a:ln>
-            <a:noFill/>
-          </a:ln>
-        </p:spPr>
-        <p:style>
-          <a:lnRef idx="1">
-            <a:schemeClr val="accent1"/>
-          </a:lnRef>
-          <a:fillRef idx="3">
-            <a:schemeClr val="accent1"/>
-          </a:fillRef>
-          <a:effectRef idx="2">
-            <a:schemeClr val="accent1"/>
-          </a:effectRef>
-          <a:fontRef idx="minor">
-            <a:schemeClr val="lt1"/>
-          </a:fontRef>
-        </p:style>
-        <p:txBody>
-          <a:bodyPr rtlCol="0" anchor="ctr"/>
-          <a:lstStyle/>
-          <a:p>
-            <a:pPr algn="ctr"/>
-          </a:p>
-        </p:txBody>
-      </p:sp>
-      <p:sp>
-        <p:nvSpPr>
-          <p:cNvPr id="30" name="TextBox 29"/>
-          <p:cNvSpPr txBox="1"/>
-          <p:nvPr/>
-        </p:nvSpPr>
-        <p:spPr>
-          <a:xfrm>
-            <a:off x="7882128" y="4087368"/>
-            <a:ext cx="3090672" cy="475488"/>
-          </a:xfrm>
-          <a:prstGeom prst="rect">
-            <a:avLst/>
-          </a:prstGeom>
-          <a:noFill/>
-        </p:spPr>
-        <p:txBody>
-          <a:bodyPr wrap="square" lIns="36576" rIns="36576" tIns="36576" bIns="36576" anchor="t">
-            <a:spAutoFit/>
-          </a:bodyPr>
-          <a:lstStyle/>
-          <a:p>
-            <a:pPr algn="l">
-              <a:defRPr sz="2500" b="1">
-                <a:solidFill>
-                  <a:srgbClr val="F06449"/>
-                </a:solidFill>
-                <a:latin typeface="Noto Sans"/>
-              </a:defRPr>
-            </a:pPr>
-            <a:r>
-              <a:t>15 min</a:t>
-            </a:r>
-          </a:p>
-        </p:txBody>
-      </p:sp>
-      <p:sp>
-        <p:nvSpPr>
-          <p:cNvPr id="31" name="TextBox 30"/>
-          <p:cNvSpPr txBox="1"/>
-          <p:nvPr/>
-        </p:nvSpPr>
-        <p:spPr>
-          <a:xfrm>
-            <a:off x="7882128" y="4599431"/>
-            <a:ext cx="3090672" cy="347472"/>
-          </a:xfrm>
-          <a:prstGeom prst="rect">
-            <a:avLst/>
-          </a:prstGeom>
-          <a:noFill/>
-        </p:spPr>
-        <p:txBody>
-          <a:bodyPr wrap="square" lIns="36576" rIns="36576" tIns="36576" bIns="36576" anchor="t">
-            <a:spAutoFit/>
-          </a:bodyPr>
-          <a:lstStyle/>
-          <a:p>
-            <a:pPr algn="l">
-              <a:defRPr sz="1150" b="0">
-                <a:solidFill>
-                  <a:srgbClr val="17343A"/>
-                </a:solidFill>
-                <a:latin typeface="Noto Sans"/>
-              </a:defRPr>
-            </a:pPr>
-            <a:r>
-              <a:t>Margem até o início do turno</a:t>
-            </a:r>
-          </a:p>
-        </p:txBody>
-      </p:sp>
-      <p:sp>
-        <p:nvSpPr>
-          <p:cNvPr id="32" name="Rounded Rectangle 31"/>
-          <p:cNvSpPr/>
-          <p:nvPr/>
-        </p:nvSpPr>
-        <p:spPr>
-          <a:xfrm>
-            <a:off x="960120" y="4882896"/>
-            <a:ext cx="1645920" cy="987552"/>
-          </a:xfrm>
-          <a:prstGeom prst="roundRect">
-            <a:avLst/>
-          </a:prstGeom>
-          <a:solidFill>
-            <a:srgbClr val="005A67"/>
-          </a:solidFill>
-          <a:ln>
-            <a:noFill/>
-          </a:ln>
-        </p:spPr>
-        <p:style>
-          <a:lnRef idx="1">
-            <a:schemeClr val="accent1"/>
-          </a:lnRef>
-          <a:fillRef idx="3">
-            <a:schemeClr val="accent1"/>
-          </a:fillRef>
-          <a:effectRef idx="2">
-            <a:schemeClr val="accent1"/>
-          </a:effectRef>
-          <a:fontRef idx="minor">
-            <a:schemeClr val="lt1"/>
-          </a:fontRef>
-        </p:style>
-        <p:txBody>
-          <a:bodyPr rtlCol="0" anchor="ctr"/>
-          <a:lstStyle/>
-          <a:p>
-            <a:pPr algn="ctr"/>
-          </a:p>
-        </p:txBody>
-      </p:sp>
-      <p:sp>
-        <p:nvSpPr>
-          <p:cNvPr id="33" name="Rounded Rectangle 32"/>
-          <p:cNvSpPr/>
-          <p:nvPr/>
-        </p:nvSpPr>
-        <p:spPr>
-          <a:xfrm>
-            <a:off x="1157630" y="5039258"/>
-            <a:ext cx="1250899" cy="395020"/>
-          </a:xfrm>
-          <a:prstGeom prst="roundRect">
-            <a:avLst/>
-          </a:prstGeom>
-          <a:solidFill>
-            <a:srgbClr val="37A9E8"/>
-          </a:solidFill>
-          <a:ln>
-            <a:noFill/>
-          </a:ln>
-        </p:spPr>
-        <p:style>
-          <a:lnRef idx="1">
-            <a:schemeClr val="accent1"/>
-          </a:lnRef>
-          <a:fillRef idx="3">
-            <a:schemeClr val="accent1"/>
-          </a:fillRef>
-          <a:effectRef idx="2">
-            <a:schemeClr val="accent1"/>
-          </a:effectRef>
-          <a:fontRef idx="minor">
-            <a:schemeClr val="lt1"/>
-          </a:fontRef>
-        </p:style>
-        <p:txBody>
-          <a:bodyPr rtlCol="0" anchor="ctr"/>
-          <a:lstStyle/>
-          <a:p>
-            <a:pPr algn="ctr"/>
-          </a:p>
-        </p:txBody>
-      </p:sp>
-      <p:sp>
-        <p:nvSpPr>
-          <p:cNvPr id="34" name="Oval 33"/>
-          <p:cNvSpPr/>
-          <p:nvPr/>
-        </p:nvSpPr>
-        <p:spPr>
-          <a:xfrm>
-            <a:off x="1223467" y="5689396"/>
-            <a:ext cx="279806" cy="279806"/>
-          </a:xfrm>
-          <a:prstGeom prst="ellipse">
-            <a:avLst/>
-          </a:prstGeom>
-          <a:solidFill>
-            <a:srgbClr val="17343A"/>
-          </a:solidFill>
-          <a:ln>
-            <a:noFill/>
-          </a:ln>
-        </p:spPr>
-        <p:style>
-          <a:lnRef idx="1">
-            <a:schemeClr val="accent1"/>
-          </a:lnRef>
-          <a:fillRef idx="3">
-            <a:schemeClr val="accent1"/>
-          </a:fillRef>
-          <a:effectRef idx="2">
-            <a:schemeClr val="accent1"/>
-          </a:effectRef>
-          <a:fontRef idx="minor">
-            <a:schemeClr val="lt1"/>
-          </a:fontRef>
-        </p:style>
-        <p:txBody>
-          <a:bodyPr rtlCol="0" anchor="ctr"/>
-          <a:lstStyle/>
-          <a:p>
-            <a:pPr algn="ctr"/>
-          </a:p>
-        </p:txBody>
-      </p:sp>
-      <p:sp>
-        <p:nvSpPr>
-          <p:cNvPr id="35" name="Oval 34"/>
-          <p:cNvSpPr/>
-          <p:nvPr/>
-        </p:nvSpPr>
-        <p:spPr>
-          <a:xfrm>
-            <a:off x="2178100" y="5689396"/>
-            <a:ext cx="279806" cy="279806"/>
-          </a:xfrm>
-          <a:prstGeom prst="ellipse">
-            <a:avLst/>
-          </a:prstGeom>
-          <a:solidFill>
-            <a:srgbClr val="17343A"/>
-          </a:solidFill>
-          <a:ln>
-            <a:noFill/>
-          </a:ln>
-        </p:spPr>
-        <p:style>
-          <a:lnRef idx="1">
-            <a:schemeClr val="accent1"/>
-          </a:lnRef>
-          <a:fillRef idx="3">
-            <a:schemeClr val="accent1"/>
-          </a:fillRef>
-          <a:effectRef idx="2">
-            <a:schemeClr val="accent1"/>
-          </a:effectRef>
-          <a:fontRef idx="minor">
-            <a:schemeClr val="lt1"/>
-          </a:fontRef>
-        </p:style>
-        <p:txBody>
-          <a:bodyPr rtlCol="0" anchor="ctr"/>
-          <a:lstStyle/>
-          <a:p>
-            <a:pPr algn="ctr"/>
-          </a:p>
-        </p:txBody>
-      </p:sp>
-      <p:sp>
-        <p:nvSpPr>
-          <p:cNvPr id="36" name="Oval 35"/>
-          <p:cNvSpPr/>
-          <p:nvPr/>
-        </p:nvSpPr>
-        <p:spPr>
-          <a:xfrm>
-            <a:off x="1157630" y="5516575"/>
-            <a:ext cx="131673" cy="131673"/>
-          </a:xfrm>
-          <a:prstGeom prst="ellipse">
-            <a:avLst/>
-          </a:prstGeom>
-          <a:solidFill>
-            <a:srgbClr val="F6BD38"/>
-          </a:solidFill>
-          <a:ln>
-            <a:noFill/>
-          </a:ln>
-        </p:spPr>
-        <p:style>
-          <a:lnRef idx="1">
-            <a:schemeClr val="accent1"/>
-          </a:lnRef>
-          <a:fillRef idx="3">
-            <a:schemeClr val="accent1"/>
-          </a:fillRef>
-          <a:effectRef idx="2">
-            <a:schemeClr val="accent1"/>
-          </a:effectRef>
-          <a:fontRef idx="minor">
-            <a:schemeClr val="lt1"/>
-          </a:fontRef>
-        </p:style>
-        <p:txBody>
-          <a:bodyPr rtlCol="0" anchor="ctr"/>
-          <a:lstStyle/>
-          <a:p>
-            <a:pPr algn="ctr"/>
-          </a:p>
-        </p:txBody>
-      </p:sp>
-      <p:sp>
-        <p:nvSpPr>
-          <p:cNvPr id="37" name="Oval 36"/>
-          <p:cNvSpPr/>
-          <p:nvPr/>
-        </p:nvSpPr>
-        <p:spPr>
-          <a:xfrm>
-            <a:off x="2260396" y="5516575"/>
-            <a:ext cx="131673" cy="131673"/>
-          </a:xfrm>
-          <a:prstGeom prst="ellipse">
-            <a:avLst/>
-          </a:prstGeom>
-          <a:solidFill>
-            <a:srgbClr val="F6BD38"/>
-          </a:solidFill>
-          <a:ln>
-            <a:noFill/>
-          </a:ln>
-        </p:spPr>
-        <p:style>
-          <a:lnRef idx="1">
-            <a:schemeClr val="accent1"/>
-          </a:lnRef>
-          <a:fillRef idx="3">
-            <a:schemeClr val="accent1"/>
-          </a:fillRef>
-          <a:effectRef idx="2">
-            <a:schemeClr val="accent1"/>
-          </a:effectRef>
-          <a:fontRef idx="minor">
-            <a:schemeClr val="lt1"/>
-          </a:fontRef>
-        </p:style>
-        <p:txBody>
-          <a:bodyPr rtlCol="0" anchor="ctr"/>
-          <a:lstStyle/>
-          <a:p>
-            <a:pPr algn="ctr"/>
-          </a:p>
-        </p:txBody>
-      </p:sp>
-      <p:sp>
-        <p:nvSpPr>
-          <p:cNvPr id="38" name="TextBox 37"/>
-          <p:cNvSpPr txBox="1"/>
-          <p:nvPr/>
-        </p:nvSpPr>
-        <p:spPr>
-          <a:xfrm>
-            <a:off x="2971800" y="5175504"/>
-            <a:ext cx="4297680" cy="438912"/>
-          </a:xfrm>
-          <a:prstGeom prst="rect">
-            <a:avLst/>
-          </a:prstGeom>
-          <a:noFill/>
-        </p:spPr>
-        <p:txBody>
-          <a:bodyPr wrap="square" lIns="36576" rIns="36576" tIns="36576" bIns="36576" anchor="t">
-            <a:spAutoFit/>
-          </a:bodyPr>
-          <a:lstStyle/>
-          <a:p>
-            <a:pPr algn="l">
-              <a:defRPr sz="1800" b="1">
-                <a:solidFill>
-                  <a:srgbClr val="17343A"/>
-                </a:solidFill>
-                <a:latin typeface="Noto Sans"/>
-              </a:defRPr>
-            </a:pPr>
-            <a:r>
-              <a:t>Pontualidade geral tratada: 81.9%</a:t>
-            </a:r>
-          </a:p>
-        </p:txBody>
-      </p:sp>
-      <p:sp>
-        <p:nvSpPr>
-          <p:cNvPr id="39" name="TextBox 38"/>
-          <p:cNvSpPr txBox="1"/>
-          <p:nvPr/>
-        </p:nvSpPr>
-        <p:spPr>
-          <a:xfrm>
-            <a:off x="8028431" y="5806440"/>
-            <a:ext cx="2926080" cy="310896"/>
-          </a:xfrm>
-          <a:prstGeom prst="rect">
-            <a:avLst/>
-          </a:prstGeom>
-          <a:noFill/>
-        </p:spPr>
-        <p:txBody>
-          <a:bodyPr wrap="square" lIns="36576" rIns="36576" tIns="36576" bIns="36576" anchor="t">
-            <a:spAutoFit/>
-          </a:bodyPr>
-          <a:lstStyle/>
-          <a:p>
-            <a:pPr algn="ctr">
-              <a:defRPr sz="1300" b="1">
-                <a:solidFill>
-                  <a:srgbClr val="17343A"/>
-                </a:solidFill>
-                <a:latin typeface="Noto Sans"/>
-              </a:defRPr>
-            </a:pPr>
-            <a:r>
-              <a:t>Fev · Mar · Abr · Mai</a:t>
-            </a:r>
-          </a:p>
-        </p:txBody>
-      </p:sp>
-      <p:sp>
-        <p:nvSpPr>
-          <p:cNvPr id="40" name="Rounded Rectangle 39"/>
+              <a:t>Por que importa para a fábrica: o ônibus deve chegar 15 minutos antes do turno. Com 12 minutos de atraso mediano a folga some, e 28% dessas viagens chegam depois da hora de entrada.</a:t>
+            </a:r>
+          </a:p>
+        </p:txBody>
+      </p:sp>
+      <p:sp>
+        <p:nvSpPr>
+          <p:cNvPr id="30" name="Rounded Rectangle 29"/>
           <p:cNvSpPr/>
           <p:nvPr/>
         </p:nvSpPr>
@@ -7892,7 +7490,7 @@
       </p:sp>
       <p:sp>
         <p:nvSpPr>
-          <p:cNvPr id="41" name="TextBox 40"/>
+          <p:cNvPr id="31" name="TextBox 30"/>
           <p:cNvSpPr txBox="1"/>
           <p:nvPr/>
         </p:nvSpPr>
@@ -8604,27 +8202,51 @@
               </a:defRPr>
             </a:pPr>
             <a:r>
-              <a:t>Perguntas e Hipóteses</a:t>
-            </a:r>
-          </a:p>
-        </p:txBody>
-      </p:sp>
-      <p:sp>
-        <p:nvSpPr>
-          <p:cNvPr id="17" name="Rounded Rectangle 16"/>
-          <p:cNvSpPr/>
-          <p:nvPr/>
-        </p:nvSpPr>
-        <p:spPr>
-          <a:xfrm>
-            <a:off x="713232" y="1024128"/>
-            <a:ext cx="10744200" cy="1078992"/>
+              <a:t>Ato 1 · Quando e onde começou</a:t>
+            </a:r>
+          </a:p>
+        </p:txBody>
+      </p:sp>
+      <p:pic>
+        <p:nvPicPr>
+          <p:cNvPr id="17" name="Picture 16" descr="01_serie_rotas.png"/>
+          <p:cNvPicPr>
+            <a:picLocks noChangeAspect="1"/>
+          </p:cNvPicPr>
+          <p:nvPr/>
+        </p:nvPicPr>
+        <p:blipFill>
+          <a:blip r:embed="rId2"/>
+          <a:stretch>
+            <a:fillRect/>
+          </a:stretch>
+        </p:blipFill>
+        <p:spPr>
+          <a:xfrm>
+            <a:off x="502920" y="1436720"/>
+            <a:ext cx="8092440" cy="4432615"/>
+          </a:xfrm>
+          <a:prstGeom prst="rect">
+            <a:avLst/>
+          </a:prstGeom>
+        </p:spPr>
+      </p:pic>
+      <p:sp>
+        <p:nvSpPr>
+          <p:cNvPr id="18" name="Rounded Rectangle 17"/>
+          <p:cNvSpPr/>
+          <p:nvPr/>
+        </p:nvSpPr>
+        <p:spPr>
+          <a:xfrm>
+            <a:off x="8796528" y="1216152"/>
+            <a:ext cx="2788920" cy="1261872"/>
           </a:xfrm>
           <a:prstGeom prst="roundRect">
             <a:avLst/>
           </a:prstGeom>
           <a:solidFill>
-            <a:srgbClr val="005A67"/>
+            <a:srgbClr val="F06449"/>
           </a:solidFill>
           <a:ln>
             <a:noFill/>
@@ -8654,14 +8276,14 @@
       </p:sp>
       <p:sp>
         <p:nvSpPr>
-          <p:cNvPr id="18" name="TextBox 17"/>
+          <p:cNvPr id="19" name="TextBox 18"/>
           <p:cNvSpPr txBox="1"/>
           <p:nvPr/>
         </p:nvSpPr>
         <p:spPr>
           <a:xfrm>
-            <a:off x="1051560" y="1307592"/>
-            <a:ext cx="10058400" cy="530352"/>
+            <a:off x="8997696" y="1426464"/>
+            <a:ext cx="2359152" cy="438912"/>
           </a:xfrm>
           <a:prstGeom prst="rect">
             <a:avLst/>
@@ -8675,59 +8297,16 @@
           <a:lstStyle/>
           <a:p>
             <a:pPr algn="ctr">
-              <a:defRPr sz="2100" b="1">
+              <a:defRPr sz="2800" b="1">
                 <a:solidFill>
-                  <a:srgbClr val="FFF8E8"/>
+                  <a:srgbClr val="17343A"/>
                 </a:solidFill>
                 <a:latin typeface="Noto Sans"/>
               </a:defRPr>
             </a:pPr>
             <a:r>
-              <a:t>A queda é geral por causa da chuva ou está concentrada em rotas, turnos e períodos específicos?</a:t>
-            </a:r>
-          </a:p>
-        </p:txBody>
-      </p:sp>
-      <p:sp>
-        <p:nvSpPr>
-          <p:cNvPr id="19" name="Rounded Rectangle 18"/>
-          <p:cNvSpPr/>
-          <p:nvPr/>
-        </p:nvSpPr>
-        <p:spPr>
-          <a:xfrm>
-            <a:off x="749808" y="2514600"/>
-            <a:ext cx="3364992" cy="2606040"/>
-          </a:xfrm>
-          <a:prstGeom prst="roundRect">
-            <a:avLst/>
-          </a:prstGeom>
-          <a:solidFill>
-            <a:srgbClr val="37A9E8"/>
-          </a:solidFill>
-          <a:ln>
-            <a:noFill/>
-          </a:ln>
-        </p:spPr>
-        <p:style>
-          <a:lnRef idx="1">
-            <a:schemeClr val="accent1"/>
-          </a:lnRef>
-          <a:fillRef idx="3">
-            <a:schemeClr val="accent1"/>
-          </a:fillRef>
-          <a:effectRef idx="2">
-            <a:schemeClr val="accent1"/>
-          </a:effectRef>
-          <a:fontRef idx="minor">
-            <a:schemeClr val="lt1"/>
-          </a:fontRef>
-        </p:style>
-        <p:txBody>
-          <a:bodyPr rtlCol="0" anchor="ctr"/>
-          <a:lstStyle/>
-          <a:p>
-            <a:pPr algn="ctr"/>
+              <a:t>06/04</a:t>
+            </a:r>
           </a:p>
         </p:txBody>
       </p:sp>
@@ -8739,8 +8318,8 @@
         </p:nvSpPr>
         <p:spPr>
           <a:xfrm>
-            <a:off x="978407" y="2734056"/>
-            <a:ext cx="658368" cy="493776"/>
+            <a:off x="8997696" y="1911095"/>
+            <a:ext cx="2359152" cy="256032"/>
           </a:xfrm>
           <a:prstGeom prst="rect">
             <a:avLst/>
@@ -8753,8 +8332,87 @@
           </a:bodyPr>
           <a:lstStyle/>
           <a:p>
-            <a:pPr algn="l">
-              <a:defRPr sz="2500" b="1">
+            <a:pPr algn="ctr">
+              <a:defRPr sz="1200" b="0">
+                <a:solidFill>
+                  <a:srgbClr val="17343A"/>
+                </a:solidFill>
+                <a:latin typeface="Noto Sans"/>
+              </a:defRPr>
+            </a:pPr>
+            <a:r>
+              <a:t>Início da ruptura</a:t>
+            </a:r>
+          </a:p>
+        </p:txBody>
+      </p:sp>
+      <p:sp>
+        <p:nvSpPr>
+          <p:cNvPr id="21" name="Rounded Rectangle 20"/>
+          <p:cNvSpPr/>
+          <p:nvPr/>
+        </p:nvSpPr>
+        <p:spPr>
+          <a:xfrm>
+            <a:off x="8796528" y="2761488"/>
+            <a:ext cx="2788920" cy="1261872"/>
+          </a:xfrm>
+          <a:prstGeom prst="roundRect">
+            <a:avLst/>
+          </a:prstGeom>
+          <a:solidFill>
+            <a:srgbClr val="65C3A5"/>
+          </a:solidFill>
+          <a:ln>
+            <a:noFill/>
+          </a:ln>
+        </p:spPr>
+        <p:style>
+          <a:lnRef idx="1">
+            <a:schemeClr val="accent1"/>
+          </a:lnRef>
+          <a:fillRef idx="3">
+            <a:schemeClr val="accent1"/>
+          </a:fillRef>
+          <a:effectRef idx="2">
+            <a:schemeClr val="accent1"/>
+          </a:effectRef>
+          <a:fontRef idx="minor">
+            <a:schemeClr val="lt1"/>
+          </a:fontRef>
+        </p:style>
+        <p:txBody>
+          <a:bodyPr rtlCol="0" anchor="ctr"/>
+          <a:lstStyle/>
+          <a:p>
+            <a:pPr algn="ctr"/>
+          </a:p>
+        </p:txBody>
+      </p:sp>
+      <p:sp>
+        <p:nvSpPr>
+          <p:cNvPr id="22" name="TextBox 21"/>
+          <p:cNvSpPr txBox="1"/>
+          <p:nvPr/>
+        </p:nvSpPr>
+        <p:spPr>
+          <a:xfrm>
+            <a:off x="8924544" y="2962656"/>
+            <a:ext cx="2542032" cy="438912"/>
+          </a:xfrm>
+          <a:prstGeom prst="rect">
+            <a:avLst/>
+          </a:prstGeom>
+          <a:noFill/>
+        </p:spPr>
+        <p:txBody>
+          <a:bodyPr wrap="square" lIns="36576" rIns="36576" tIns="36576" bIns="36576" anchor="t">
+            <a:spAutoFit/>
+          </a:bodyPr>
+          <a:lstStyle/>
+          <a:p>
+            <a:pPr algn="ctr">
+              <a:defRPr sz="2400" b="1">
                 <a:solidFill>
                   <a:srgbClr val="005A67"/>
                 </a:solidFill>
@@ -8762,21 +8420,21 @@
               </a:defRPr>
             </a:pPr>
             <a:r>
-              <a:t>H1</a:t>
-            </a:r>
-          </a:p>
-        </p:txBody>
-      </p:sp>
-      <p:sp>
-        <p:nvSpPr>
-          <p:cNvPr id="21" name="TextBox 20"/>
+              <a:t>2 de 8 rotas</a:t>
+            </a:r>
+          </a:p>
+        </p:txBody>
+      </p:sp>
+      <p:sp>
+        <p:nvSpPr>
+          <p:cNvPr id="23" name="TextBox 22"/>
           <p:cNvSpPr txBox="1"/>
           <p:nvPr/>
         </p:nvSpPr>
         <p:spPr>
           <a:xfrm>
-            <a:off x="1682495" y="2788920"/>
-            <a:ext cx="2057400" cy="411480"/>
+            <a:off x="8924544" y="3465576"/>
+            <a:ext cx="2542032" cy="256032"/>
           </a:xfrm>
           <a:prstGeom prst="rect">
             <a:avLst/>
@@ -8789,8 +8447,8 @@
           </a:bodyPr>
           <a:lstStyle/>
           <a:p>
-            <a:pPr algn="l">
-              <a:defRPr sz="1800" b="1">
+            <a:pPr algn="ctr">
+              <a:defRPr sz="1150" b="0">
                 <a:solidFill>
                   <a:srgbClr val="005A67"/>
                 </a:solidFill>
@@ -8798,21 +8456,64 @@
               </a:defRPr>
             </a:pPr>
             <a:r>
-              <a:t>Chuva</a:t>
-            </a:r>
-          </a:p>
-        </p:txBody>
-      </p:sp>
-      <p:sp>
-        <p:nvSpPr>
-          <p:cNvPr id="22" name="TextBox 21"/>
+              <a:t>R03 e R05, ambas da zona Leste</a:t>
+            </a:r>
+          </a:p>
+        </p:txBody>
+      </p:sp>
+      <p:sp>
+        <p:nvSpPr>
+          <p:cNvPr id="24" name="Rounded Rectangle 23"/>
+          <p:cNvSpPr/>
+          <p:nvPr/>
+        </p:nvSpPr>
+        <p:spPr>
+          <a:xfrm>
+            <a:off x="8796528" y="4315968"/>
+            <a:ext cx="2788920" cy="1261872"/>
+          </a:xfrm>
+          <a:prstGeom prst="roundRect">
+            <a:avLst/>
+          </a:prstGeom>
+          <a:solidFill>
+            <a:srgbClr val="F6BD38"/>
+          </a:solidFill>
+          <a:ln>
+            <a:noFill/>
+          </a:ln>
+        </p:spPr>
+        <p:style>
+          <a:lnRef idx="1">
+            <a:schemeClr val="accent1"/>
+          </a:lnRef>
+          <a:fillRef idx="3">
+            <a:schemeClr val="accent1"/>
+          </a:fillRef>
+          <a:effectRef idx="2">
+            <a:schemeClr val="accent1"/>
+          </a:effectRef>
+          <a:fontRef idx="minor">
+            <a:schemeClr val="lt1"/>
+          </a:fontRef>
+        </p:style>
+        <p:txBody>
+          <a:bodyPr rtlCol="0" anchor="ctr"/>
+          <a:lstStyle/>
+          <a:p>
+            <a:pPr algn="ctr"/>
+          </a:p>
+        </p:txBody>
+      </p:sp>
+      <p:sp>
+        <p:nvSpPr>
+          <p:cNvPr id="25" name="TextBox 24"/>
           <p:cNvSpPr txBox="1"/>
           <p:nvPr/>
         </p:nvSpPr>
         <p:spPr>
           <a:xfrm>
-            <a:off x="1024127" y="3483864"/>
-            <a:ext cx="2788920" cy="822960"/>
+            <a:off x="8924544" y="4526280"/>
+            <a:ext cx="2542032" cy="438912"/>
           </a:xfrm>
           <a:prstGeom prst="rect">
             <a:avLst/>
@@ -8826,43 +8527,7 @@
           <a:lstStyle/>
           <a:p>
             <a:pPr algn="ctr">
-              <a:defRPr sz="1500" b="0">
-                <a:solidFill>
-                  <a:srgbClr val="17343A"/>
-                </a:solidFill>
-                <a:latin typeface="Noto Sans"/>
-              </a:defRPr>
-            </a:pPr>
-            <a:r>
-              <a:t>A chuva forte explica a piora de pontualidade.</a:t>
-            </a:r>
-          </a:p>
-        </p:txBody>
-      </p:sp>
-      <p:sp>
-        <p:nvSpPr>
-          <p:cNvPr id="23" name="TextBox 22"/>
-          <p:cNvSpPr txBox="1"/>
-          <p:nvPr/>
-        </p:nvSpPr>
-        <p:spPr>
-          <a:xfrm>
-            <a:off x="1133856" y="4599432"/>
-            <a:ext cx="2560320" cy="228600"/>
-          </a:xfrm>
-          <a:prstGeom prst="rect">
-            <a:avLst/>
-          </a:prstGeom>
-          <a:noFill/>
-        </p:spPr>
-        <p:txBody>
-          <a:bodyPr wrap="square" lIns="36576" rIns="36576" tIns="36576" bIns="36576" anchor="t">
-            <a:spAutoFit/>
-          </a:bodyPr>
-          <a:lstStyle/>
-          <a:p>
-            <a:pPr algn="ctr">
-              <a:defRPr sz="1000" b="1">
+              <a:defRPr sz="2400" b="1">
                 <a:solidFill>
                   <a:srgbClr val="005A67"/>
                 </a:solidFill>
@@ -8870,64 +8535,21 @@
               </a:defRPr>
             </a:pPr>
             <a:r>
-              <a:t>Testar · Comparar · Limitar</a:t>
-            </a:r>
-          </a:p>
-        </p:txBody>
-      </p:sp>
-      <p:sp>
-        <p:nvSpPr>
-          <p:cNvPr id="24" name="Rounded Rectangle 23"/>
-          <p:cNvSpPr/>
-          <p:nvPr/>
-        </p:nvSpPr>
-        <p:spPr>
-          <a:xfrm>
-            <a:off x="4553712" y="2514600"/>
-            <a:ext cx="3364992" cy="2606040"/>
-          </a:xfrm>
-          <a:prstGeom prst="roundRect">
-            <a:avLst/>
-          </a:prstGeom>
-          <a:solidFill>
-            <a:srgbClr val="F06449"/>
-          </a:solidFill>
-          <a:ln>
-            <a:noFill/>
-          </a:ln>
-        </p:spPr>
-        <p:style>
-          <a:lnRef idx="1">
-            <a:schemeClr val="accent1"/>
-          </a:lnRef>
-          <a:fillRef idx="3">
-            <a:schemeClr val="accent1"/>
-          </a:fillRef>
-          <a:effectRef idx="2">
-            <a:schemeClr val="accent1"/>
-          </a:effectRef>
-          <a:fontRef idx="minor">
-            <a:schemeClr val="lt1"/>
-          </a:fontRef>
-        </p:style>
-        <p:txBody>
-          <a:bodyPr rtlCol="0" anchor="ctr"/>
-          <a:lstStyle/>
-          <a:p>
-            <a:pPr algn="ctr"/>
-          </a:p>
-        </p:txBody>
-      </p:sp>
-      <p:sp>
-        <p:nvSpPr>
-          <p:cNvPr id="25" name="TextBox 24"/>
+              <a:t>Só de dia</a:t>
+            </a:r>
+          </a:p>
+        </p:txBody>
+      </p:sp>
+      <p:sp>
+        <p:nvSpPr>
+          <p:cNvPr id="26" name="TextBox 25"/>
           <p:cNvSpPr txBox="1"/>
           <p:nvPr/>
         </p:nvSpPr>
         <p:spPr>
           <a:xfrm>
-            <a:off x="4782312" y="2734056"/>
-            <a:ext cx="658368" cy="493776"/>
+            <a:off x="8924544" y="5020056"/>
+            <a:ext cx="2542032" cy="256032"/>
           </a:xfrm>
           <a:prstGeom prst="rect">
             <a:avLst/>
@@ -8940,8 +8562,8 @@
           </a:bodyPr>
           <a:lstStyle/>
           <a:p>
-            <a:pPr algn="l">
-              <a:defRPr sz="2500" b="1">
+            <a:pPr algn="ctr">
+              <a:defRPr sz="1150" b="0">
                 <a:solidFill>
                   <a:srgbClr val="005A67"/>
                 </a:solidFill>
@@ -8949,345 +8571,14 @@
               </a:defRPr>
             </a:pPr>
             <a:r>
-              <a:t>H2</a:t>
-            </a:r>
-          </a:p>
-        </p:txBody>
-      </p:sp>
-      <p:sp>
-        <p:nvSpPr>
-          <p:cNvPr id="26" name="TextBox 25"/>
-          <p:cNvSpPr txBox="1"/>
-          <p:nvPr/>
-        </p:nvSpPr>
-        <p:spPr>
-          <a:xfrm>
-            <a:off x="5486400" y="2788920"/>
-            <a:ext cx="2057400" cy="411480"/>
-          </a:xfrm>
-          <a:prstGeom prst="rect">
-            <a:avLst/>
-          </a:prstGeom>
-          <a:noFill/>
-        </p:spPr>
-        <p:txBody>
-          <a:bodyPr wrap="square" lIns="36576" rIns="36576" tIns="36576" bIns="36576" anchor="t">
-            <a:spAutoFit/>
-          </a:bodyPr>
-          <a:lstStyle/>
-          <a:p>
-            <a:pPr algn="l">
-              <a:defRPr sz="1800" b="1">
-                <a:solidFill>
-                  <a:srgbClr val="005A67"/>
-                </a:solidFill>
-                <a:latin typeface="Noto Sans"/>
-              </a:defRPr>
-            </a:pPr>
-            <a:r>
-              <a:t>Corredor</a:t>
-            </a:r>
-          </a:p>
-        </p:txBody>
-      </p:sp>
-      <p:sp>
-        <p:nvSpPr>
-          <p:cNvPr id="27" name="TextBox 26"/>
-          <p:cNvSpPr txBox="1"/>
-          <p:nvPr/>
-        </p:nvSpPr>
-        <p:spPr>
-          <a:xfrm>
-            <a:off x="4828032" y="3483864"/>
-            <a:ext cx="2788920" cy="822960"/>
-          </a:xfrm>
-          <a:prstGeom prst="rect">
-            <a:avLst/>
-          </a:prstGeom>
-          <a:noFill/>
-        </p:spPr>
-        <p:txBody>
-          <a:bodyPr wrap="square" lIns="36576" rIns="36576" tIns="36576" bIns="36576" anchor="t">
-            <a:spAutoFit/>
-          </a:bodyPr>
-          <a:lstStyle/>
-          <a:p>
-            <a:pPr algn="ctr">
-              <a:defRPr sz="1500" b="0">
-                <a:solidFill>
-                  <a:srgbClr val="17343A"/>
-                </a:solidFill>
-                <a:latin typeface="Noto Sans"/>
-              </a:defRPr>
-            </a:pPr>
-            <a:r>
-              <a:t>R03 e R05 enfrentam uma restrição compartilhada.</a:t>
-            </a:r>
-          </a:p>
-        </p:txBody>
-      </p:sp>
-      <p:sp>
-        <p:nvSpPr>
-          <p:cNvPr id="28" name="TextBox 27"/>
-          <p:cNvSpPr txBox="1"/>
-          <p:nvPr/>
-        </p:nvSpPr>
-        <p:spPr>
-          <a:xfrm>
-            <a:off x="4937760" y="4599432"/>
-            <a:ext cx="2560320" cy="228600"/>
-          </a:xfrm>
-          <a:prstGeom prst="rect">
-            <a:avLst/>
-          </a:prstGeom>
-          <a:noFill/>
-        </p:spPr>
-        <p:txBody>
-          <a:bodyPr wrap="square" lIns="36576" rIns="36576" tIns="36576" bIns="36576" anchor="t">
-            <a:spAutoFit/>
-          </a:bodyPr>
-          <a:lstStyle/>
-          <a:p>
-            <a:pPr algn="ctr">
-              <a:defRPr sz="1000" b="1">
-                <a:solidFill>
-                  <a:srgbClr val="005A67"/>
-                </a:solidFill>
-                <a:latin typeface="Noto Sans"/>
-              </a:defRPr>
-            </a:pPr>
-            <a:r>
-              <a:t>Testar · Comparar · Limitar</a:t>
-            </a:r>
-          </a:p>
-        </p:txBody>
-      </p:sp>
-      <p:sp>
-        <p:nvSpPr>
-          <p:cNvPr id="29" name="Rounded Rectangle 28"/>
-          <p:cNvSpPr/>
-          <p:nvPr/>
-        </p:nvSpPr>
-        <p:spPr>
-          <a:xfrm>
-            <a:off x="8357616" y="2514600"/>
-            <a:ext cx="3364992" cy="2606040"/>
-          </a:xfrm>
-          <a:prstGeom prst="roundRect">
-            <a:avLst/>
-          </a:prstGeom>
-          <a:solidFill>
-            <a:srgbClr val="F6BD38"/>
-          </a:solidFill>
-          <a:ln>
-            <a:noFill/>
-          </a:ln>
-        </p:spPr>
-        <p:style>
-          <a:lnRef idx="1">
-            <a:schemeClr val="accent1"/>
-          </a:lnRef>
-          <a:fillRef idx="3">
-            <a:schemeClr val="accent1"/>
-          </a:fillRef>
-          <a:effectRef idx="2">
-            <a:schemeClr val="accent1"/>
-          </a:effectRef>
-          <a:fontRef idx="minor">
-            <a:schemeClr val="lt1"/>
-          </a:fontRef>
-        </p:style>
-        <p:txBody>
-          <a:bodyPr rtlCol="0" anchor="ctr"/>
-          <a:lstStyle/>
-          <a:p>
-            <a:pPr algn="ctr"/>
-          </a:p>
-        </p:txBody>
-      </p:sp>
-      <p:sp>
-        <p:nvSpPr>
-          <p:cNvPr id="30" name="TextBox 29"/>
-          <p:cNvSpPr txBox="1"/>
-          <p:nvPr/>
-        </p:nvSpPr>
-        <p:spPr>
-          <a:xfrm>
-            <a:off x="8586216" y="2734056"/>
-            <a:ext cx="658368" cy="493776"/>
-          </a:xfrm>
-          <a:prstGeom prst="rect">
-            <a:avLst/>
-          </a:prstGeom>
-          <a:noFill/>
-        </p:spPr>
-        <p:txBody>
-          <a:bodyPr wrap="square" lIns="36576" rIns="36576" tIns="36576" bIns="36576" anchor="t">
-            <a:spAutoFit/>
-          </a:bodyPr>
-          <a:lstStyle/>
-          <a:p>
-            <a:pPr algn="l">
-              <a:defRPr sz="2500" b="1">
-                <a:solidFill>
-                  <a:srgbClr val="005A67"/>
-                </a:solidFill>
-                <a:latin typeface="Noto Sans"/>
-              </a:defRPr>
-            </a:pPr>
-            <a:r>
-              <a:t>H3</a:t>
-            </a:r>
-          </a:p>
-        </p:txBody>
-      </p:sp>
-      <p:sp>
-        <p:nvSpPr>
-          <p:cNvPr id="31" name="TextBox 30"/>
-          <p:cNvSpPr txBox="1"/>
-          <p:nvPr/>
-        </p:nvSpPr>
-        <p:spPr>
-          <a:xfrm>
-            <a:off x="9290304" y="2788920"/>
-            <a:ext cx="2057400" cy="411480"/>
-          </a:xfrm>
-          <a:prstGeom prst="rect">
-            <a:avLst/>
-          </a:prstGeom>
-          <a:noFill/>
-        </p:spPr>
-        <p:txBody>
-          <a:bodyPr wrap="square" lIns="36576" rIns="36576" tIns="36576" bIns="36576" anchor="t">
-            <a:spAutoFit/>
-          </a:bodyPr>
-          <a:lstStyle/>
-          <a:p>
-            <a:pPr algn="l">
-              <a:defRPr sz="1800" b="1">
-                <a:solidFill>
-                  <a:srgbClr val="005A67"/>
-                </a:solidFill>
-                <a:latin typeface="Noto Sans"/>
-              </a:defRPr>
-            </a:pPr>
-            <a:r>
-              <a:t>Ocorrências</a:t>
-            </a:r>
-          </a:p>
-        </p:txBody>
-      </p:sp>
-      <p:sp>
-        <p:nvSpPr>
-          <p:cNvPr id="32" name="TextBox 31"/>
-          <p:cNvSpPr txBox="1"/>
-          <p:nvPr/>
-        </p:nvSpPr>
-        <p:spPr>
-          <a:xfrm>
-            <a:off x="8631936" y="3483864"/>
-            <a:ext cx="2788920" cy="822960"/>
-          </a:xfrm>
-          <a:prstGeom prst="rect">
-            <a:avLst/>
-          </a:prstGeom>
-          <a:noFill/>
-        </p:spPr>
-        <p:txBody>
-          <a:bodyPr wrap="square" lIns="36576" rIns="36576" tIns="36576" bIns="36576" anchor="t">
-            <a:spAutoFit/>
-          </a:bodyPr>
-          <a:lstStyle/>
-          <a:p>
-            <a:pPr algn="ctr">
-              <a:defRPr sz="1500" b="0">
-                <a:solidFill>
-                  <a:srgbClr val="17343A"/>
-                </a:solidFill>
-                <a:latin typeface="Noto Sans"/>
-              </a:defRPr>
-            </a:pPr>
-            <a:r>
-              <a:t>Pane, trânsito e pneus explicam a mudança.</a:t>
-            </a:r>
-          </a:p>
-        </p:txBody>
-      </p:sp>
-      <p:sp>
-        <p:nvSpPr>
-          <p:cNvPr id="33" name="TextBox 32"/>
-          <p:cNvSpPr txBox="1"/>
-          <p:nvPr/>
-        </p:nvSpPr>
-        <p:spPr>
-          <a:xfrm>
-            <a:off x="8741664" y="4599432"/>
-            <a:ext cx="2560320" cy="228600"/>
-          </a:xfrm>
-          <a:prstGeom prst="rect">
-            <a:avLst/>
-          </a:prstGeom>
-          <a:noFill/>
-        </p:spPr>
-        <p:txBody>
-          <a:bodyPr wrap="square" lIns="36576" rIns="36576" tIns="36576" bIns="36576" anchor="t">
-            <a:spAutoFit/>
-          </a:bodyPr>
-          <a:lstStyle/>
-          <a:p>
-            <a:pPr algn="ctr">
-              <a:defRPr sz="1000" b="1">
-                <a:solidFill>
-                  <a:srgbClr val="005A67"/>
-                </a:solidFill>
-                <a:latin typeface="Noto Sans"/>
-              </a:defRPr>
-            </a:pPr>
-            <a:r>
-              <a:t>Testar · Comparar · Limitar</a:t>
-            </a:r>
-          </a:p>
-        </p:txBody>
-      </p:sp>
-      <p:sp>
-        <p:nvSpPr>
-          <p:cNvPr id="34" name="TextBox 33"/>
-          <p:cNvSpPr txBox="1"/>
-          <p:nvPr/>
-        </p:nvSpPr>
-        <p:spPr>
-          <a:xfrm>
-            <a:off x="1645920" y="5806440"/>
-            <a:ext cx="8961120" cy="347472"/>
-          </a:xfrm>
-          <a:prstGeom prst="rect">
-            <a:avLst/>
-          </a:prstGeom>
-          <a:noFill/>
-        </p:spPr>
-        <p:txBody>
-          <a:bodyPr wrap="square" lIns="36576" rIns="36576" tIns="36576" bIns="36576" anchor="t">
-            <a:spAutoFit/>
-          </a:bodyPr>
-          <a:lstStyle/>
-          <a:p>
-            <a:pPr algn="ctr">
-              <a:defRPr sz="1600" b="1">
-                <a:solidFill>
-                  <a:srgbClr val="005A67"/>
-                </a:solidFill>
-                <a:latin typeface="Noto Sans"/>
-              </a:defRPr>
-            </a:pPr>
-            <a:r>
-              <a:t>Não buscamos uma resposta escondida. Construímos a explicação mais defensável.</a:t>
-            </a:r>
-          </a:p>
-        </p:txBody>
-      </p:sp>
-      <p:sp>
-        <p:nvSpPr>
-          <p:cNvPr id="35" name="Rounded Rectangle 34"/>
+              <a:t>Manhã e tarde; a noite segue em 96%</a:t>
+            </a:r>
+          </a:p>
+        </p:txBody>
+      </p:sp>
+      <p:sp>
+        <p:nvSpPr>
+          <p:cNvPr id="27" name="Rounded Rectangle 26"/>
           <p:cNvSpPr/>
           <p:nvPr/>
         </p:nvSpPr>
@@ -9332,7 +8623,7 @@
       </p:sp>
       <p:sp>
         <p:nvSpPr>
-          <p:cNvPr id="36" name="TextBox 35"/>
+          <p:cNvPr id="28" name="TextBox 27"/>
           <p:cNvSpPr txBox="1"/>
           <p:nvPr/>
         </p:nvSpPr>
@@ -9375,6 +8666,2787 @@
 </file>
 
 <file path=ppt/slides/slide5.xml><?xml version="1.0" encoding="utf-8"?>
+<p:sld xmlns:a="http://schemas.openxmlformats.org/drawingml/2006/main" xmlns:p="http://schemas.openxmlformats.org/presentationml/2006/main" xmlns:r="http://schemas.openxmlformats.org/officeDocument/2006/relationships">
+  <p:cSld>
+    <p:bg>
+      <p:bgPr>
+        <a:solidFill>
+          <a:srgbClr val="FFF8E8"/>
+        </a:solidFill>
+        <a:effectLst/>
+      </p:bgPr>
+    </p:bg>
+    <p:spTree>
+      <p:nvGrpSpPr>
+        <p:cNvPr id="1" name=""/>
+        <p:cNvGrpSpPr/>
+        <p:nvPr/>
+      </p:nvGrpSpPr>
+      <p:grpSpPr/>
+      <p:sp>
+        <p:nvSpPr>
+          <p:cNvPr id="2" name="Oval 1"/>
+          <p:cNvSpPr/>
+          <p:nvPr/>
+        </p:nvSpPr>
+        <p:spPr>
+          <a:xfrm>
+            <a:off x="-201168" y="-182880"/>
+            <a:ext cx="676656" cy="676656"/>
+          </a:xfrm>
+          <a:prstGeom prst="ellipse">
+            <a:avLst/>
+          </a:prstGeom>
+          <a:solidFill>
+            <a:srgbClr val="F6BD38">
+              <a:alpha val="20000"/>
+            </a:srgbClr>
+          </a:solidFill>
+          <a:ln>
+            <a:noFill/>
+          </a:ln>
+        </p:spPr>
+        <p:style>
+          <a:lnRef idx="1">
+            <a:schemeClr val="accent1"/>
+          </a:lnRef>
+          <a:fillRef idx="3">
+            <a:schemeClr val="accent1"/>
+          </a:fillRef>
+          <a:effectRef idx="2">
+            <a:schemeClr val="accent1"/>
+          </a:effectRef>
+          <a:fontRef idx="minor">
+            <a:schemeClr val="lt1"/>
+          </a:fontRef>
+        </p:style>
+        <p:txBody>
+          <a:bodyPr rtlCol="0" anchor="ctr"/>
+          <a:lstStyle/>
+          <a:p>
+            <a:pPr algn="ctr"/>
+          </a:p>
+        </p:txBody>
+      </p:sp>
+      <p:sp>
+        <p:nvSpPr>
+          <p:cNvPr id="3" name="Arc 2"/>
+          <p:cNvSpPr/>
+          <p:nvPr/>
+        </p:nvSpPr>
+        <p:spPr>
+          <a:xfrm>
+            <a:off x="11338560" y="-164592"/>
+            <a:ext cx="868680" cy="868680"/>
+          </a:xfrm>
+          <a:prstGeom prst="arc">
+            <a:avLst/>
+          </a:prstGeom>
+          <a:solidFill>
+            <a:srgbClr val="37A9E8">
+              <a:alpha val="20000"/>
+            </a:srgbClr>
+          </a:solidFill>
+          <a:ln>
+            <a:noFill/>
+          </a:ln>
+        </p:spPr>
+        <p:style>
+          <a:lnRef idx="1">
+            <a:schemeClr val="accent1"/>
+          </a:lnRef>
+          <a:fillRef idx="3">
+            <a:schemeClr val="accent1"/>
+          </a:fillRef>
+          <a:effectRef idx="2">
+            <a:schemeClr val="accent1"/>
+          </a:effectRef>
+          <a:fontRef idx="minor">
+            <a:schemeClr val="lt1"/>
+          </a:fontRef>
+        </p:style>
+        <p:txBody>
+          <a:bodyPr rtlCol="0" anchor="ctr"/>
+          <a:lstStyle/>
+          <a:p>
+            <a:pPr algn="ctr"/>
+          </a:p>
+        </p:txBody>
+      </p:sp>
+      <p:sp>
+        <p:nvSpPr>
+          <p:cNvPr id="4" name="8-Point Star 3"/>
+          <p:cNvSpPr/>
+          <p:nvPr/>
+        </p:nvSpPr>
+        <p:spPr>
+          <a:xfrm>
+            <a:off x="11411712" y="6053328"/>
+            <a:ext cx="640080" cy="640080"/>
+          </a:xfrm>
+          <a:prstGeom prst="star8">
+            <a:avLst/>
+          </a:prstGeom>
+          <a:solidFill>
+            <a:srgbClr val="F06449">
+              <a:alpha val="20000"/>
+            </a:srgbClr>
+          </a:solidFill>
+          <a:ln>
+            <a:noFill/>
+          </a:ln>
+        </p:spPr>
+        <p:style>
+          <a:lnRef idx="1">
+            <a:schemeClr val="accent1"/>
+          </a:lnRef>
+          <a:fillRef idx="3">
+            <a:schemeClr val="accent1"/>
+          </a:fillRef>
+          <a:effectRef idx="2">
+            <a:schemeClr val="accent1"/>
+          </a:effectRef>
+          <a:fontRef idx="minor">
+            <a:schemeClr val="lt1"/>
+          </a:fontRef>
+        </p:style>
+        <p:txBody>
+          <a:bodyPr rtlCol="0" anchor="ctr"/>
+          <a:lstStyle/>
+          <a:p>
+            <a:pPr algn="ctr"/>
+          </a:p>
+        </p:txBody>
+      </p:sp>
+      <p:sp>
+        <p:nvSpPr>
+          <p:cNvPr id="5" name="Moon 4"/>
+          <p:cNvSpPr/>
+          <p:nvPr/>
+        </p:nvSpPr>
+        <p:spPr>
+          <a:xfrm>
+            <a:off x="-219456" y="5989320"/>
+            <a:ext cx="658368" cy="658368"/>
+          </a:xfrm>
+          <a:prstGeom prst="moon">
+            <a:avLst/>
+          </a:prstGeom>
+          <a:solidFill>
+            <a:srgbClr val="FFF8E8">
+              <a:alpha val="20000"/>
+            </a:srgbClr>
+          </a:solidFill>
+          <a:ln>
+            <a:noFill/>
+          </a:ln>
+        </p:spPr>
+        <p:style>
+          <a:lnRef idx="1">
+            <a:schemeClr val="accent1"/>
+          </a:lnRef>
+          <a:fillRef idx="3">
+            <a:schemeClr val="accent1"/>
+          </a:fillRef>
+          <a:effectRef idx="2">
+            <a:schemeClr val="accent1"/>
+          </a:effectRef>
+          <a:fontRef idx="minor">
+            <a:schemeClr val="lt1"/>
+          </a:fontRef>
+        </p:style>
+        <p:txBody>
+          <a:bodyPr rtlCol="0" anchor="ctr"/>
+          <a:lstStyle/>
+          <a:p>
+            <a:pPr algn="ctr"/>
+          </a:p>
+        </p:txBody>
+      </p:sp>
+      <p:sp>
+        <p:nvSpPr>
+          <p:cNvPr id="6" name="Oval 5"/>
+          <p:cNvSpPr/>
+          <p:nvPr/>
+        </p:nvSpPr>
+        <p:spPr>
+          <a:xfrm>
+            <a:off x="9921240" y="841248"/>
+            <a:ext cx="1143000" cy="1143000"/>
+          </a:xfrm>
+          <a:prstGeom prst="ellipse">
+            <a:avLst/>
+          </a:prstGeom>
+          <a:solidFill>
+            <a:srgbClr val="F6BD38">
+              <a:alpha val="20000"/>
+            </a:srgbClr>
+          </a:solidFill>
+          <a:ln>
+            <a:noFill/>
+          </a:ln>
+        </p:spPr>
+        <p:style>
+          <a:lnRef idx="1">
+            <a:schemeClr val="accent1"/>
+          </a:lnRef>
+          <a:fillRef idx="3">
+            <a:schemeClr val="accent1"/>
+          </a:fillRef>
+          <a:effectRef idx="2">
+            <a:schemeClr val="accent1"/>
+          </a:effectRef>
+          <a:fontRef idx="minor">
+            <a:schemeClr val="lt1"/>
+          </a:fontRef>
+        </p:style>
+        <p:txBody>
+          <a:bodyPr rtlCol="0" anchor="ctr"/>
+          <a:lstStyle/>
+          <a:p>
+            <a:pPr algn="ctr"/>
+          </a:p>
+        </p:txBody>
+      </p:sp>
+      <p:sp>
+        <p:nvSpPr>
+          <p:cNvPr id="7" name="Rectangle 6"/>
+          <p:cNvSpPr/>
+          <p:nvPr/>
+        </p:nvSpPr>
+        <p:spPr>
+          <a:xfrm>
+            <a:off x="10451592" y="1033271"/>
+            <a:ext cx="82296" cy="438912"/>
+          </a:xfrm>
+          <a:prstGeom prst="rect">
+            <a:avLst/>
+          </a:prstGeom>
+          <a:solidFill>
+            <a:srgbClr val="17343A">
+              <a:alpha val="20000"/>
+            </a:srgbClr>
+          </a:solidFill>
+          <a:ln>
+            <a:noFill/>
+          </a:ln>
+        </p:spPr>
+        <p:style>
+          <a:lnRef idx="1">
+            <a:schemeClr val="accent1"/>
+          </a:lnRef>
+          <a:fillRef idx="3">
+            <a:schemeClr val="accent1"/>
+          </a:fillRef>
+          <a:effectRef idx="2">
+            <a:schemeClr val="accent1"/>
+          </a:effectRef>
+          <a:fontRef idx="minor">
+            <a:schemeClr val="lt1"/>
+          </a:fontRef>
+        </p:style>
+        <p:txBody>
+          <a:bodyPr rtlCol="0" anchor="ctr"/>
+          <a:lstStyle/>
+          <a:p>
+            <a:pPr algn="ctr"/>
+          </a:p>
+        </p:txBody>
+      </p:sp>
+      <p:sp>
+        <p:nvSpPr>
+          <p:cNvPr id="8" name="Rectangle 7"/>
+          <p:cNvSpPr/>
+          <p:nvPr/>
+        </p:nvSpPr>
+        <p:spPr>
+          <a:xfrm rot="1200000">
+            <a:off x="10469880" y="1371600"/>
+            <a:ext cx="329184" cy="82296"/>
+          </a:xfrm>
+          <a:prstGeom prst="rect">
+            <a:avLst/>
+          </a:prstGeom>
+          <a:solidFill>
+            <a:srgbClr val="17343A">
+              <a:alpha val="20000"/>
+            </a:srgbClr>
+          </a:solidFill>
+          <a:ln>
+            <a:noFill/>
+          </a:ln>
+        </p:spPr>
+        <p:style>
+          <a:lnRef idx="1">
+            <a:schemeClr val="accent1"/>
+          </a:lnRef>
+          <a:fillRef idx="3">
+            <a:schemeClr val="accent1"/>
+          </a:fillRef>
+          <a:effectRef idx="2">
+            <a:schemeClr val="accent1"/>
+          </a:effectRef>
+          <a:fontRef idx="minor">
+            <a:schemeClr val="lt1"/>
+          </a:fontRef>
+        </p:style>
+        <p:txBody>
+          <a:bodyPr rtlCol="0" anchor="ctr"/>
+          <a:lstStyle/>
+          <a:p>
+            <a:pPr algn="ctr"/>
+          </a:p>
+        </p:txBody>
+      </p:sp>
+      <p:sp>
+        <p:nvSpPr>
+          <p:cNvPr id="9" name="Teardrop 8"/>
+          <p:cNvSpPr/>
+          <p:nvPr/>
+        </p:nvSpPr>
+        <p:spPr>
+          <a:xfrm rot="1200000">
+            <a:off x="1874519" y="5349240"/>
+            <a:ext cx="384048" cy="530352"/>
+          </a:xfrm>
+          <a:prstGeom prst="teardrop">
+            <a:avLst/>
+          </a:prstGeom>
+          <a:solidFill>
+            <a:srgbClr val="37A9E8">
+              <a:alpha val="20000"/>
+            </a:srgbClr>
+          </a:solidFill>
+          <a:ln>
+            <a:noFill/>
+          </a:ln>
+        </p:spPr>
+        <p:style>
+          <a:lnRef idx="1">
+            <a:schemeClr val="accent1"/>
+          </a:lnRef>
+          <a:fillRef idx="3">
+            <a:schemeClr val="accent1"/>
+          </a:fillRef>
+          <a:effectRef idx="2">
+            <a:schemeClr val="accent1"/>
+          </a:effectRef>
+          <a:fontRef idx="minor">
+            <a:schemeClr val="lt1"/>
+          </a:fontRef>
+        </p:style>
+        <p:txBody>
+          <a:bodyPr rtlCol="0" anchor="ctr"/>
+          <a:lstStyle/>
+          <a:p>
+            <a:pPr algn="ctr"/>
+          </a:p>
+        </p:txBody>
+      </p:sp>
+      <p:sp>
+        <p:nvSpPr>
+          <p:cNvPr id="10" name="Teardrop 9"/>
+          <p:cNvSpPr/>
+          <p:nvPr/>
+        </p:nvSpPr>
+        <p:spPr>
+          <a:xfrm rot="1200000">
+            <a:off x="2331720" y="5696712"/>
+            <a:ext cx="301752" cy="420624"/>
+          </a:xfrm>
+          <a:prstGeom prst="teardrop">
+            <a:avLst/>
+          </a:prstGeom>
+          <a:solidFill>
+            <a:srgbClr val="37A9E8">
+              <a:alpha val="20000"/>
+            </a:srgbClr>
+          </a:solidFill>
+          <a:ln>
+            <a:noFill/>
+          </a:ln>
+        </p:spPr>
+        <p:style>
+          <a:lnRef idx="1">
+            <a:schemeClr val="accent1"/>
+          </a:lnRef>
+          <a:fillRef idx="3">
+            <a:schemeClr val="accent1"/>
+          </a:fillRef>
+          <a:effectRef idx="2">
+            <a:schemeClr val="accent1"/>
+          </a:effectRef>
+          <a:fontRef idx="minor">
+            <a:schemeClr val="lt1"/>
+          </a:fontRef>
+        </p:style>
+        <p:txBody>
+          <a:bodyPr rtlCol="0" anchor="ctr"/>
+          <a:lstStyle/>
+          <a:p>
+            <a:pPr algn="ctr"/>
+          </a:p>
+        </p:txBody>
+      </p:sp>
+      <p:sp>
+        <p:nvSpPr>
+          <p:cNvPr id="11" name="Rounded Rectangle 10"/>
+          <p:cNvSpPr/>
+          <p:nvPr/>
+        </p:nvSpPr>
+        <p:spPr>
+          <a:xfrm>
+            <a:off x="9646920" y="5230368"/>
+            <a:ext cx="1664208" cy="859536"/>
+          </a:xfrm>
+          <a:prstGeom prst="roundRect">
+            <a:avLst/>
+          </a:prstGeom>
+          <a:solidFill>
+            <a:srgbClr val="005A67">
+              <a:alpha val="20000"/>
+            </a:srgbClr>
+          </a:solidFill>
+          <a:ln>
+            <a:noFill/>
+          </a:ln>
+        </p:spPr>
+        <p:style>
+          <a:lnRef idx="1">
+            <a:schemeClr val="accent1"/>
+          </a:lnRef>
+          <a:fillRef idx="3">
+            <a:schemeClr val="accent1"/>
+          </a:fillRef>
+          <a:effectRef idx="2">
+            <a:schemeClr val="accent1"/>
+          </a:effectRef>
+          <a:fontRef idx="minor">
+            <a:schemeClr val="lt1"/>
+          </a:fontRef>
+        </p:style>
+        <p:txBody>
+          <a:bodyPr rtlCol="0" anchor="ctr"/>
+          <a:lstStyle/>
+          <a:p>
+            <a:pPr algn="ctr"/>
+          </a:p>
+        </p:txBody>
+      </p:sp>
+      <p:sp>
+        <p:nvSpPr>
+          <p:cNvPr id="12" name="Rectangle 11"/>
+          <p:cNvSpPr/>
+          <p:nvPr/>
+        </p:nvSpPr>
+        <p:spPr>
+          <a:xfrm>
+            <a:off x="9912096" y="5394960"/>
+            <a:ext cx="1115568" cy="301752"/>
+          </a:xfrm>
+          <a:prstGeom prst="rect">
+            <a:avLst/>
+          </a:prstGeom>
+          <a:solidFill>
+            <a:srgbClr val="37A9E8">
+              <a:alpha val="20000"/>
+            </a:srgbClr>
+          </a:solidFill>
+          <a:ln>
+            <a:noFill/>
+          </a:ln>
+        </p:spPr>
+        <p:style>
+          <a:lnRef idx="1">
+            <a:schemeClr val="accent1"/>
+          </a:lnRef>
+          <a:fillRef idx="3">
+            <a:schemeClr val="accent1"/>
+          </a:fillRef>
+          <a:effectRef idx="2">
+            <a:schemeClr val="accent1"/>
+          </a:effectRef>
+          <a:fontRef idx="minor">
+            <a:schemeClr val="lt1"/>
+          </a:fontRef>
+        </p:style>
+        <p:txBody>
+          <a:bodyPr rtlCol="0" anchor="ctr"/>
+          <a:lstStyle/>
+          <a:p>
+            <a:pPr algn="ctr"/>
+          </a:p>
+        </p:txBody>
+      </p:sp>
+      <p:sp>
+        <p:nvSpPr>
+          <p:cNvPr id="13" name="Oval 12"/>
+          <p:cNvSpPr/>
+          <p:nvPr/>
+        </p:nvSpPr>
+        <p:spPr>
+          <a:xfrm>
+            <a:off x="9902952" y="5916168"/>
+            <a:ext cx="283464" cy="283464"/>
+          </a:xfrm>
+          <a:prstGeom prst="ellipse">
+            <a:avLst/>
+          </a:prstGeom>
+          <a:solidFill>
+            <a:srgbClr val="17343A">
+              <a:alpha val="20000"/>
+            </a:srgbClr>
+          </a:solidFill>
+          <a:ln>
+            <a:noFill/>
+          </a:ln>
+        </p:spPr>
+        <p:style>
+          <a:lnRef idx="1">
+            <a:schemeClr val="accent1"/>
+          </a:lnRef>
+          <a:fillRef idx="3">
+            <a:schemeClr val="accent1"/>
+          </a:fillRef>
+          <a:effectRef idx="2">
+            <a:schemeClr val="accent1"/>
+          </a:effectRef>
+          <a:fontRef idx="minor">
+            <a:schemeClr val="lt1"/>
+          </a:fontRef>
+        </p:style>
+        <p:txBody>
+          <a:bodyPr rtlCol="0" anchor="ctr"/>
+          <a:lstStyle/>
+          <a:p>
+            <a:pPr algn="ctr"/>
+          </a:p>
+        </p:txBody>
+      </p:sp>
+      <p:sp>
+        <p:nvSpPr>
+          <p:cNvPr id="14" name="Oval 13"/>
+          <p:cNvSpPr/>
+          <p:nvPr/>
+        </p:nvSpPr>
+        <p:spPr>
+          <a:xfrm>
+            <a:off x="10771632" y="5916168"/>
+            <a:ext cx="283464" cy="283464"/>
+          </a:xfrm>
+          <a:prstGeom prst="ellipse">
+            <a:avLst/>
+          </a:prstGeom>
+          <a:solidFill>
+            <a:srgbClr val="17343A">
+              <a:alpha val="20000"/>
+            </a:srgbClr>
+          </a:solidFill>
+          <a:ln>
+            <a:noFill/>
+          </a:ln>
+        </p:spPr>
+        <p:style>
+          <a:lnRef idx="1">
+            <a:schemeClr val="accent1"/>
+          </a:lnRef>
+          <a:fillRef idx="3">
+            <a:schemeClr val="accent1"/>
+          </a:fillRef>
+          <a:effectRef idx="2">
+            <a:schemeClr val="accent1"/>
+          </a:effectRef>
+          <a:fontRef idx="minor">
+            <a:schemeClr val="lt1"/>
+          </a:fontRef>
+        </p:style>
+        <p:txBody>
+          <a:bodyPr rtlCol="0" anchor="ctr"/>
+          <a:lstStyle/>
+          <a:p>
+            <a:pPr algn="ctr"/>
+          </a:p>
+        </p:txBody>
+      </p:sp>
+      <p:sp>
+        <p:nvSpPr>
+          <p:cNvPr id="15" name="TextBox 14"/>
+          <p:cNvSpPr txBox="1"/>
+          <p:nvPr/>
+        </p:nvSpPr>
+        <p:spPr>
+          <a:xfrm>
+            <a:off x="411480" y="320040"/>
+            <a:ext cx="502920" cy="320040"/>
+          </a:xfrm>
+          <a:prstGeom prst="rect">
+            <a:avLst/>
+          </a:prstGeom>
+          <a:noFill/>
+        </p:spPr>
+        <p:txBody>
+          <a:bodyPr wrap="square" lIns="36576" rIns="36576" tIns="36576" bIns="36576" anchor="t">
+            <a:spAutoFit/>
+          </a:bodyPr>
+          <a:lstStyle/>
+          <a:p>
+            <a:pPr algn="l">
+              <a:defRPr sz="1300" b="1">
+                <a:solidFill>
+                  <a:srgbClr val="17343A"/>
+                </a:solidFill>
+                <a:latin typeface="Noto Sans"/>
+              </a:defRPr>
+            </a:pPr>
+            <a:r>
+              <a:t>04</a:t>
+            </a:r>
+          </a:p>
+        </p:txBody>
+      </p:sp>
+      <p:sp>
+        <p:nvSpPr>
+          <p:cNvPr id="16" name="TextBox 15"/>
+          <p:cNvSpPr txBox="1"/>
+          <p:nvPr/>
+        </p:nvSpPr>
+        <p:spPr>
+          <a:xfrm>
+            <a:off x="804672" y="237744"/>
+            <a:ext cx="10607040" cy="640080"/>
+          </a:xfrm>
+          <a:prstGeom prst="rect">
+            <a:avLst/>
+          </a:prstGeom>
+          <a:noFill/>
+        </p:spPr>
+        <p:txBody>
+          <a:bodyPr wrap="square" lIns="36576" rIns="36576" tIns="36576" bIns="36576" anchor="t">
+            <a:spAutoFit/>
+          </a:bodyPr>
+          <a:lstStyle/>
+          <a:p>
+            <a:pPr algn="l">
+              <a:defRPr sz="2700" b="1">
+                <a:solidFill>
+                  <a:srgbClr val="17343A"/>
+                </a:solidFill>
+                <a:latin typeface="Noto Sans"/>
+              </a:defRPr>
+            </a:pPr>
+            <a:r>
+              <a:t>Ato 2 · Três hipóteses testadas</a:t>
+            </a:r>
+          </a:p>
+        </p:txBody>
+      </p:sp>
+      <p:sp>
+        <p:nvSpPr>
+          <p:cNvPr id="17" name="Rounded Rectangle 16"/>
+          <p:cNvSpPr/>
+          <p:nvPr/>
+        </p:nvSpPr>
+        <p:spPr>
+          <a:xfrm>
+            <a:off x="713232" y="1024128"/>
+            <a:ext cx="10744200" cy="914400"/>
+          </a:xfrm>
+          <a:prstGeom prst="roundRect">
+            <a:avLst/>
+          </a:prstGeom>
+          <a:solidFill>
+            <a:srgbClr val="005A67"/>
+          </a:solidFill>
+          <a:ln>
+            <a:noFill/>
+          </a:ln>
+        </p:spPr>
+        <p:style>
+          <a:lnRef idx="1">
+            <a:schemeClr val="accent1"/>
+          </a:lnRef>
+          <a:fillRef idx="3">
+            <a:schemeClr val="accent1"/>
+          </a:fillRef>
+          <a:effectRef idx="2">
+            <a:schemeClr val="accent1"/>
+          </a:effectRef>
+          <a:fontRef idx="minor">
+            <a:schemeClr val="lt1"/>
+          </a:fontRef>
+        </p:style>
+        <p:txBody>
+          <a:bodyPr rtlCol="0" anchor="ctr"/>
+          <a:lstStyle/>
+          <a:p>
+            <a:pPr algn="ctr"/>
+          </a:p>
+        </p:txBody>
+      </p:sp>
+      <p:sp>
+        <p:nvSpPr>
+          <p:cNvPr id="18" name="TextBox 17"/>
+          <p:cNvSpPr txBox="1"/>
+          <p:nvPr/>
+        </p:nvSpPr>
+        <p:spPr>
+          <a:xfrm>
+            <a:off x="1051560" y="1261872"/>
+            <a:ext cx="10058400" cy="502920"/>
+          </a:xfrm>
+          <a:prstGeom prst="rect">
+            <a:avLst/>
+          </a:prstGeom>
+          <a:noFill/>
+        </p:spPr>
+        <p:txBody>
+          <a:bodyPr wrap="square" lIns="36576" rIns="36576" tIns="36576" bIns="36576" anchor="t">
+            <a:spAutoFit/>
+          </a:bodyPr>
+          <a:lstStyle/>
+          <a:p>
+            <a:pPr algn="ctr">
+              <a:defRPr sz="2000" b="1">
+                <a:solidFill>
+                  <a:srgbClr val="FFF8E8"/>
+                </a:solidFill>
+                <a:latin typeface="Noto Sans"/>
+              </a:defRPr>
+            </a:pPr>
+            <a:r>
+              <a:t>A queda é geral por causa da chuva ou está concentrada em rotas, turnos e períodos específicos?</a:t>
+            </a:r>
+          </a:p>
+        </p:txBody>
+      </p:sp>
+      <p:sp>
+        <p:nvSpPr>
+          <p:cNvPr id="19" name="Rounded Rectangle 18"/>
+          <p:cNvSpPr/>
+          <p:nvPr/>
+        </p:nvSpPr>
+        <p:spPr>
+          <a:xfrm>
+            <a:off x="749808" y="2212848"/>
+            <a:ext cx="3364992" cy="3401568"/>
+          </a:xfrm>
+          <a:prstGeom prst="roundRect">
+            <a:avLst/>
+          </a:prstGeom>
+          <a:solidFill>
+            <a:srgbClr val="37A9E8"/>
+          </a:solidFill>
+          <a:ln>
+            <a:noFill/>
+          </a:ln>
+        </p:spPr>
+        <p:style>
+          <a:lnRef idx="1">
+            <a:schemeClr val="accent1"/>
+          </a:lnRef>
+          <a:fillRef idx="3">
+            <a:schemeClr val="accent1"/>
+          </a:fillRef>
+          <a:effectRef idx="2">
+            <a:schemeClr val="accent1"/>
+          </a:effectRef>
+          <a:fontRef idx="minor">
+            <a:schemeClr val="lt1"/>
+          </a:fontRef>
+        </p:style>
+        <p:txBody>
+          <a:bodyPr rtlCol="0" anchor="ctr"/>
+          <a:lstStyle/>
+          <a:p>
+            <a:pPr algn="ctr"/>
+          </a:p>
+        </p:txBody>
+      </p:sp>
+      <p:sp>
+        <p:nvSpPr>
+          <p:cNvPr id="20" name="TextBox 19"/>
+          <p:cNvSpPr txBox="1"/>
+          <p:nvPr/>
+        </p:nvSpPr>
+        <p:spPr>
+          <a:xfrm>
+            <a:off x="978407" y="2395728"/>
+            <a:ext cx="658368" cy="493776"/>
+          </a:xfrm>
+          <a:prstGeom prst="rect">
+            <a:avLst/>
+          </a:prstGeom>
+          <a:noFill/>
+        </p:spPr>
+        <p:txBody>
+          <a:bodyPr wrap="square" lIns="36576" rIns="36576" tIns="36576" bIns="36576" anchor="t">
+            <a:spAutoFit/>
+          </a:bodyPr>
+          <a:lstStyle/>
+          <a:p>
+            <a:pPr algn="l">
+              <a:defRPr sz="2500" b="1">
+                <a:solidFill>
+                  <a:srgbClr val="005A67"/>
+                </a:solidFill>
+                <a:latin typeface="Noto Sans"/>
+              </a:defRPr>
+            </a:pPr>
+            <a:r>
+              <a:t>H1</a:t>
+            </a:r>
+          </a:p>
+        </p:txBody>
+      </p:sp>
+      <p:sp>
+        <p:nvSpPr>
+          <p:cNvPr id="21" name="TextBox 20"/>
+          <p:cNvSpPr txBox="1"/>
+          <p:nvPr/>
+        </p:nvSpPr>
+        <p:spPr>
+          <a:xfrm>
+            <a:off x="1682495" y="2450592"/>
+            <a:ext cx="2057400" cy="411480"/>
+          </a:xfrm>
+          <a:prstGeom prst="rect">
+            <a:avLst/>
+          </a:prstGeom>
+          <a:noFill/>
+        </p:spPr>
+        <p:txBody>
+          <a:bodyPr wrap="square" lIns="36576" rIns="36576" tIns="36576" bIns="36576" anchor="t">
+            <a:spAutoFit/>
+          </a:bodyPr>
+          <a:lstStyle/>
+          <a:p>
+            <a:pPr algn="l">
+              <a:defRPr sz="1800" b="1">
+                <a:solidFill>
+                  <a:srgbClr val="005A67"/>
+                </a:solidFill>
+                <a:latin typeface="Noto Sans"/>
+              </a:defRPr>
+            </a:pPr>
+            <a:r>
+              <a:t>Chuva</a:t>
+            </a:r>
+          </a:p>
+        </p:txBody>
+      </p:sp>
+      <p:sp>
+        <p:nvSpPr>
+          <p:cNvPr id="22" name="TextBox 21"/>
+          <p:cNvSpPr txBox="1"/>
+          <p:nvPr/>
+        </p:nvSpPr>
+        <p:spPr>
+          <a:xfrm>
+            <a:off x="1005840" y="3017520"/>
+            <a:ext cx="2852928" cy="1828800"/>
+          </a:xfrm>
+          <a:prstGeom prst="rect">
+            <a:avLst/>
+          </a:prstGeom>
+          <a:noFill/>
+        </p:spPr>
+        <p:txBody>
+          <a:bodyPr wrap="square" lIns="36576" rIns="36576" tIns="36576" bIns="36576" anchor="t">
+            <a:spAutoFit/>
+          </a:bodyPr>
+          <a:lstStyle/>
+          <a:p>
+            <a:pPr algn="l">
+              <a:defRPr sz="1500" b="0">
+                <a:solidFill>
+                  <a:srgbClr val="17343A"/>
+                </a:solidFill>
+                <a:latin typeface="Noto Sans"/>
+              </a:defRPr>
+            </a:pPr>
+            <a:r>
+              <a:t>Parecia a explicação certa: em março todas as rotas pioram. Mas sem chuva, R03/R05 têm 26% de pontualidade de dia e as demais, 95%.</a:t>
+            </a:r>
+          </a:p>
+        </p:txBody>
+      </p:sp>
+      <p:sp>
+        <p:nvSpPr>
+          <p:cNvPr id="23" name="Rounded Rectangle 22"/>
+          <p:cNvSpPr/>
+          <p:nvPr/>
+        </p:nvSpPr>
+        <p:spPr>
+          <a:xfrm>
+            <a:off x="969264" y="4919472"/>
+            <a:ext cx="2926080" cy="475488"/>
+          </a:xfrm>
+          <a:prstGeom prst="roundRect">
+            <a:avLst/>
+          </a:prstGeom>
+          <a:solidFill>
+            <a:srgbClr val="005A67"/>
+          </a:solidFill>
+          <a:ln>
+            <a:noFill/>
+          </a:ln>
+        </p:spPr>
+        <p:style>
+          <a:lnRef idx="1">
+            <a:schemeClr val="accent1"/>
+          </a:lnRef>
+          <a:fillRef idx="3">
+            <a:schemeClr val="accent1"/>
+          </a:fillRef>
+          <a:effectRef idx="2">
+            <a:schemeClr val="accent1"/>
+          </a:effectRef>
+          <a:fontRef idx="minor">
+            <a:schemeClr val="lt1"/>
+          </a:fontRef>
+        </p:style>
+        <p:txBody>
+          <a:bodyPr rtlCol="0" anchor="ctr"/>
+          <a:lstStyle/>
+          <a:p>
+            <a:pPr algn="ctr"/>
+          </a:p>
+        </p:txBody>
+      </p:sp>
+      <p:sp>
+        <p:nvSpPr>
+          <p:cNvPr id="24" name="TextBox 23"/>
+          <p:cNvSpPr txBox="1"/>
+          <p:nvPr/>
+        </p:nvSpPr>
+        <p:spPr>
+          <a:xfrm>
+            <a:off x="1005840" y="4992624"/>
+            <a:ext cx="2852928" cy="329184"/>
+          </a:xfrm>
+          <a:prstGeom prst="rect">
+            <a:avLst/>
+          </a:prstGeom>
+          <a:noFill/>
+        </p:spPr>
+        <p:txBody>
+          <a:bodyPr wrap="square" lIns="0" rIns="0" tIns="0" bIns="0" anchor="ctr">
+            <a:spAutoFit/>
+          </a:bodyPr>
+          <a:lstStyle/>
+          <a:p>
+            <a:pPr algn="ctr">
+              <a:defRPr sz="1150" b="1">
+                <a:solidFill>
+                  <a:srgbClr val="FFF8E8"/>
+                </a:solidFill>
+                <a:latin typeface="Noto Sans"/>
+              </a:defRPr>
+            </a:pPr>
+            <a:r>
+              <a:t>Perdeu força · agravante</a:t>
+            </a:r>
+          </a:p>
+        </p:txBody>
+      </p:sp>
+      <p:sp>
+        <p:nvSpPr>
+          <p:cNvPr id="25" name="Rounded Rectangle 24"/>
+          <p:cNvSpPr/>
+          <p:nvPr/>
+        </p:nvSpPr>
+        <p:spPr>
+          <a:xfrm>
+            <a:off x="4553712" y="2212848"/>
+            <a:ext cx="3364992" cy="3401568"/>
+          </a:xfrm>
+          <a:prstGeom prst="roundRect">
+            <a:avLst/>
+          </a:prstGeom>
+          <a:solidFill>
+            <a:srgbClr val="F06449"/>
+          </a:solidFill>
+          <a:ln>
+            <a:noFill/>
+          </a:ln>
+        </p:spPr>
+        <p:style>
+          <a:lnRef idx="1">
+            <a:schemeClr val="accent1"/>
+          </a:lnRef>
+          <a:fillRef idx="3">
+            <a:schemeClr val="accent1"/>
+          </a:fillRef>
+          <a:effectRef idx="2">
+            <a:schemeClr val="accent1"/>
+          </a:effectRef>
+          <a:fontRef idx="minor">
+            <a:schemeClr val="lt1"/>
+          </a:fontRef>
+        </p:style>
+        <p:txBody>
+          <a:bodyPr rtlCol="0" anchor="ctr"/>
+          <a:lstStyle/>
+          <a:p>
+            <a:pPr algn="ctr"/>
+          </a:p>
+        </p:txBody>
+      </p:sp>
+      <p:sp>
+        <p:nvSpPr>
+          <p:cNvPr id="26" name="TextBox 25"/>
+          <p:cNvSpPr txBox="1"/>
+          <p:nvPr/>
+        </p:nvSpPr>
+        <p:spPr>
+          <a:xfrm>
+            <a:off x="4782312" y="2395728"/>
+            <a:ext cx="658368" cy="493776"/>
+          </a:xfrm>
+          <a:prstGeom prst="rect">
+            <a:avLst/>
+          </a:prstGeom>
+          <a:noFill/>
+        </p:spPr>
+        <p:txBody>
+          <a:bodyPr wrap="square" lIns="36576" rIns="36576" tIns="36576" bIns="36576" anchor="t">
+            <a:spAutoFit/>
+          </a:bodyPr>
+          <a:lstStyle/>
+          <a:p>
+            <a:pPr algn="l">
+              <a:defRPr sz="2500" b="1">
+                <a:solidFill>
+                  <a:srgbClr val="005A67"/>
+                </a:solidFill>
+                <a:latin typeface="Noto Sans"/>
+              </a:defRPr>
+            </a:pPr>
+            <a:r>
+              <a:t>H2</a:t>
+            </a:r>
+          </a:p>
+        </p:txBody>
+      </p:sp>
+      <p:sp>
+        <p:nvSpPr>
+          <p:cNvPr id="27" name="TextBox 26"/>
+          <p:cNvSpPr txBox="1"/>
+          <p:nvPr/>
+        </p:nvSpPr>
+        <p:spPr>
+          <a:xfrm>
+            <a:off x="5486400" y="2450592"/>
+            <a:ext cx="2057400" cy="411480"/>
+          </a:xfrm>
+          <a:prstGeom prst="rect">
+            <a:avLst/>
+          </a:prstGeom>
+          <a:noFill/>
+        </p:spPr>
+        <p:txBody>
+          <a:bodyPr wrap="square" lIns="36576" rIns="36576" tIns="36576" bIns="36576" anchor="t">
+            <a:spAutoFit/>
+          </a:bodyPr>
+          <a:lstStyle/>
+          <a:p>
+            <a:pPr algn="l">
+              <a:defRPr sz="1800" b="1">
+                <a:solidFill>
+                  <a:srgbClr val="005A67"/>
+                </a:solidFill>
+                <a:latin typeface="Noto Sans"/>
+              </a:defRPr>
+            </a:pPr>
+            <a:r>
+              <a:t>Corredor</a:t>
+            </a:r>
+          </a:p>
+        </p:txBody>
+      </p:sp>
+      <p:sp>
+        <p:nvSpPr>
+          <p:cNvPr id="28" name="TextBox 27"/>
+          <p:cNvSpPr txBox="1"/>
+          <p:nvPr/>
+        </p:nvSpPr>
+        <p:spPr>
+          <a:xfrm>
+            <a:off x="4809744" y="3017520"/>
+            <a:ext cx="2852928" cy="1828800"/>
+          </a:xfrm>
+          <a:prstGeom prst="rect">
+            <a:avLst/>
+          </a:prstGeom>
+          <a:noFill/>
+        </p:spPr>
+        <p:txBody>
+          <a:bodyPr wrap="square" lIns="36576" rIns="36576" tIns="36576" bIns="36576" anchor="t">
+            <a:spAutoFit/>
+          </a:bodyPr>
+          <a:lstStyle/>
+          <a:p>
+            <a:pPr algn="l">
+              <a:defRPr sz="1500" b="0">
+                <a:solidFill>
+                  <a:srgbClr val="17343A"/>
+                </a:solidFill>
+                <a:latin typeface="Noto Sans"/>
+              </a:defRPr>
+            </a:pPr>
+            <a:r>
+              <a:t>A ruptura começa em 06/04, só de dia. “Obra na via” aparece em 07/04 apenas nessas duas rotas.</a:t>
+            </a:r>
+          </a:p>
+        </p:txBody>
+      </p:sp>
+      <p:sp>
+        <p:nvSpPr>
+          <p:cNvPr id="29" name="Rounded Rectangle 28"/>
+          <p:cNvSpPr/>
+          <p:nvPr/>
+        </p:nvSpPr>
+        <p:spPr>
+          <a:xfrm>
+            <a:off x="4773168" y="4919472"/>
+            <a:ext cx="2926080" cy="475488"/>
+          </a:xfrm>
+          <a:prstGeom prst="roundRect">
+            <a:avLst/>
+          </a:prstGeom>
+          <a:solidFill>
+            <a:srgbClr val="005A67"/>
+          </a:solidFill>
+          <a:ln>
+            <a:noFill/>
+          </a:ln>
+        </p:spPr>
+        <p:style>
+          <a:lnRef idx="1">
+            <a:schemeClr val="accent1"/>
+          </a:lnRef>
+          <a:fillRef idx="3">
+            <a:schemeClr val="accent1"/>
+          </a:fillRef>
+          <a:effectRef idx="2">
+            <a:schemeClr val="accent1"/>
+          </a:effectRef>
+          <a:fontRef idx="minor">
+            <a:schemeClr val="lt1"/>
+          </a:fontRef>
+        </p:style>
+        <p:txBody>
+          <a:bodyPr rtlCol="0" anchor="ctr"/>
+          <a:lstStyle/>
+          <a:p>
+            <a:pPr algn="ctr"/>
+          </a:p>
+        </p:txBody>
+      </p:sp>
+      <p:sp>
+        <p:nvSpPr>
+          <p:cNvPr id="30" name="TextBox 29"/>
+          <p:cNvSpPr txBox="1"/>
+          <p:nvPr/>
+        </p:nvSpPr>
+        <p:spPr>
+          <a:xfrm>
+            <a:off x="4809744" y="4992624"/>
+            <a:ext cx="2852928" cy="329184"/>
+          </a:xfrm>
+          <a:prstGeom prst="rect">
+            <a:avLst/>
+          </a:prstGeom>
+          <a:noFill/>
+        </p:spPr>
+        <p:txBody>
+          <a:bodyPr wrap="square" lIns="0" rIns="0" tIns="0" bIns="0" anchor="ctr">
+            <a:spAutoFit/>
+          </a:bodyPr>
+          <a:lstStyle/>
+          <a:p>
+            <a:pPr algn="ctr">
+              <a:defRPr sz="1150" b="1">
+                <a:solidFill>
+                  <a:srgbClr val="FFF8E8"/>
+                </a:solidFill>
+                <a:latin typeface="Noto Sans"/>
+              </a:defRPr>
+            </a:pPr>
+            <a:r>
+              <a:t>Ganhou força · mais plausível</a:t>
+            </a:r>
+          </a:p>
+        </p:txBody>
+      </p:sp>
+      <p:sp>
+        <p:nvSpPr>
+          <p:cNvPr id="31" name="Rounded Rectangle 30"/>
+          <p:cNvSpPr/>
+          <p:nvPr/>
+        </p:nvSpPr>
+        <p:spPr>
+          <a:xfrm>
+            <a:off x="8357616" y="2212848"/>
+            <a:ext cx="3364992" cy="3401568"/>
+          </a:xfrm>
+          <a:prstGeom prst="roundRect">
+            <a:avLst/>
+          </a:prstGeom>
+          <a:solidFill>
+            <a:srgbClr val="F6BD38"/>
+          </a:solidFill>
+          <a:ln>
+            <a:noFill/>
+          </a:ln>
+        </p:spPr>
+        <p:style>
+          <a:lnRef idx="1">
+            <a:schemeClr val="accent1"/>
+          </a:lnRef>
+          <a:fillRef idx="3">
+            <a:schemeClr val="accent1"/>
+          </a:fillRef>
+          <a:effectRef idx="2">
+            <a:schemeClr val="accent1"/>
+          </a:effectRef>
+          <a:fontRef idx="minor">
+            <a:schemeClr val="lt1"/>
+          </a:fontRef>
+        </p:style>
+        <p:txBody>
+          <a:bodyPr rtlCol="0" anchor="ctr"/>
+          <a:lstStyle/>
+          <a:p>
+            <a:pPr algn="ctr"/>
+          </a:p>
+        </p:txBody>
+      </p:sp>
+      <p:sp>
+        <p:nvSpPr>
+          <p:cNvPr id="32" name="TextBox 31"/>
+          <p:cNvSpPr txBox="1"/>
+          <p:nvPr/>
+        </p:nvSpPr>
+        <p:spPr>
+          <a:xfrm>
+            <a:off x="8586216" y="2395728"/>
+            <a:ext cx="658368" cy="493776"/>
+          </a:xfrm>
+          <a:prstGeom prst="rect">
+            <a:avLst/>
+          </a:prstGeom>
+          <a:noFill/>
+        </p:spPr>
+        <p:txBody>
+          <a:bodyPr wrap="square" lIns="36576" rIns="36576" tIns="36576" bIns="36576" anchor="t">
+            <a:spAutoFit/>
+          </a:bodyPr>
+          <a:lstStyle/>
+          <a:p>
+            <a:pPr algn="l">
+              <a:defRPr sz="2500" b="1">
+                <a:solidFill>
+                  <a:srgbClr val="005A67"/>
+                </a:solidFill>
+                <a:latin typeface="Noto Sans"/>
+              </a:defRPr>
+            </a:pPr>
+            <a:r>
+              <a:t>H3</a:t>
+            </a:r>
+          </a:p>
+        </p:txBody>
+      </p:sp>
+      <p:sp>
+        <p:nvSpPr>
+          <p:cNvPr id="33" name="TextBox 32"/>
+          <p:cNvSpPr txBox="1"/>
+          <p:nvPr/>
+        </p:nvSpPr>
+        <p:spPr>
+          <a:xfrm>
+            <a:off x="9290304" y="2450592"/>
+            <a:ext cx="2057400" cy="411480"/>
+          </a:xfrm>
+          <a:prstGeom prst="rect">
+            <a:avLst/>
+          </a:prstGeom>
+          <a:noFill/>
+        </p:spPr>
+        <p:txBody>
+          <a:bodyPr wrap="square" lIns="36576" rIns="36576" tIns="36576" bIns="36576" anchor="t">
+            <a:spAutoFit/>
+          </a:bodyPr>
+          <a:lstStyle/>
+          <a:p>
+            <a:pPr algn="l">
+              <a:defRPr sz="1800" b="1">
+                <a:solidFill>
+                  <a:srgbClr val="005A67"/>
+                </a:solidFill>
+                <a:latin typeface="Noto Sans"/>
+              </a:defRPr>
+            </a:pPr>
+            <a:r>
+              <a:t>Ocorrências</a:t>
+            </a:r>
+          </a:p>
+        </p:txBody>
+      </p:sp>
+      <p:sp>
+        <p:nvSpPr>
+          <p:cNvPr id="34" name="TextBox 33"/>
+          <p:cNvSpPr txBox="1"/>
+          <p:nvPr/>
+        </p:nvSpPr>
+        <p:spPr>
+          <a:xfrm>
+            <a:off x="8613648" y="3017520"/>
+            <a:ext cx="2852928" cy="1828800"/>
+          </a:xfrm>
+          <a:prstGeom prst="rect">
+            <a:avLst/>
+          </a:prstGeom>
+          <a:noFill/>
+        </p:spPr>
+        <p:txBody>
+          <a:bodyPr wrap="square" lIns="36576" rIns="36576" tIns="36576" bIns="36576" anchor="t">
+            <a:spAutoFit/>
+          </a:bodyPr>
+          <a:lstStyle/>
+          <a:p>
+            <a:pPr algn="l">
+              <a:defRPr sz="1500" b="0">
+                <a:solidFill>
+                  <a:srgbClr val="17343A"/>
+                </a:solidFill>
+                <a:latin typeface="Noto Sans"/>
+              </a:defRPr>
+            </a:pPr>
+            <a:r>
+              <a:t>Pane e pneu somam 49 viagens atrasadas. São casos severos e dispersos, que não deslocam a distribuição inteira.</a:t>
+            </a:r>
+          </a:p>
+        </p:txBody>
+      </p:sp>
+      <p:sp>
+        <p:nvSpPr>
+          <p:cNvPr id="35" name="Rounded Rectangle 34"/>
+          <p:cNvSpPr/>
+          <p:nvPr/>
+        </p:nvSpPr>
+        <p:spPr>
+          <a:xfrm>
+            <a:off x="8577072" y="4919472"/>
+            <a:ext cx="2926080" cy="475488"/>
+          </a:xfrm>
+          <a:prstGeom prst="roundRect">
+            <a:avLst/>
+          </a:prstGeom>
+          <a:solidFill>
+            <a:srgbClr val="005A67"/>
+          </a:solidFill>
+          <a:ln>
+            <a:noFill/>
+          </a:ln>
+        </p:spPr>
+        <p:style>
+          <a:lnRef idx="1">
+            <a:schemeClr val="accent1"/>
+          </a:lnRef>
+          <a:fillRef idx="3">
+            <a:schemeClr val="accent1"/>
+          </a:fillRef>
+          <a:effectRef idx="2">
+            <a:schemeClr val="accent1"/>
+          </a:effectRef>
+          <a:fontRef idx="minor">
+            <a:schemeClr val="lt1"/>
+          </a:fontRef>
+        </p:style>
+        <p:txBody>
+          <a:bodyPr rtlCol="0" anchor="ctr"/>
+          <a:lstStyle/>
+          <a:p>
+            <a:pPr algn="ctr"/>
+          </a:p>
+        </p:txBody>
+      </p:sp>
+      <p:sp>
+        <p:nvSpPr>
+          <p:cNvPr id="36" name="TextBox 35"/>
+          <p:cNvSpPr txBox="1"/>
+          <p:nvPr/>
+        </p:nvSpPr>
+        <p:spPr>
+          <a:xfrm>
+            <a:off x="8613648" y="4992624"/>
+            <a:ext cx="2852928" cy="329184"/>
+          </a:xfrm>
+          <a:prstGeom prst="rect">
+            <a:avLst/>
+          </a:prstGeom>
+          <a:noFill/>
+        </p:spPr>
+        <p:txBody>
+          <a:bodyPr wrap="square" lIns="0" rIns="0" tIns="0" bIns="0" anchor="ctr">
+            <a:spAutoFit/>
+          </a:bodyPr>
+          <a:lstStyle/>
+          <a:p>
+            <a:pPr algn="ctr">
+              <a:defRPr sz="1150" b="1">
+                <a:solidFill>
+                  <a:srgbClr val="FFF8E8"/>
+                </a:solidFill>
+                <a:latin typeface="Noto Sans"/>
+              </a:defRPr>
+            </a:pPr>
+            <a:r>
+              <a:t>Rejeitada como causa principal</a:t>
+            </a:r>
+          </a:p>
+        </p:txBody>
+      </p:sp>
+      <p:sp>
+        <p:nvSpPr>
+          <p:cNvPr id="37" name="TextBox 36"/>
+          <p:cNvSpPr txBox="1"/>
+          <p:nvPr/>
+        </p:nvSpPr>
+        <p:spPr>
+          <a:xfrm>
+            <a:off x="1645920" y="5852160"/>
+            <a:ext cx="8961120" cy="347472"/>
+          </a:xfrm>
+          <a:prstGeom prst="rect">
+            <a:avLst/>
+          </a:prstGeom>
+          <a:noFill/>
+        </p:spPr>
+        <p:txBody>
+          <a:bodyPr wrap="square" lIns="36576" rIns="36576" tIns="36576" bIns="36576" anchor="t">
+            <a:spAutoFit/>
+          </a:bodyPr>
+          <a:lstStyle/>
+          <a:p>
+            <a:pPr algn="ctr">
+              <a:defRPr sz="1500" b="1">
+                <a:solidFill>
+                  <a:srgbClr val="005A67"/>
+                </a:solidFill>
+                <a:latin typeface="Noto Sans"/>
+              </a:defRPr>
+            </a:pPr>
+            <a:r>
+              <a:t>Não buscamos uma resposta escondida. Construímos a explicação mais defensável.</a:t>
+            </a:r>
+          </a:p>
+        </p:txBody>
+      </p:sp>
+      <p:sp>
+        <p:nvSpPr>
+          <p:cNvPr id="38" name="Rounded Rectangle 37"/>
+          <p:cNvSpPr/>
+          <p:nvPr/>
+        </p:nvSpPr>
+        <p:spPr>
+          <a:xfrm>
+            <a:off x="11137392" y="6428232"/>
+            <a:ext cx="713232" cy="256032"/>
+          </a:xfrm>
+          <a:prstGeom prst="roundRect">
+            <a:avLst/>
+          </a:prstGeom>
+          <a:solidFill>
+            <a:srgbClr val="FFF8E8"/>
+          </a:solidFill>
+          <a:ln w="15240">
+            <a:solidFill>
+              <a:srgbClr val="005A67"/>
+            </a:solidFill>
+          </a:ln>
+        </p:spPr>
+        <p:style>
+          <a:lnRef idx="1">
+            <a:schemeClr val="accent1"/>
+          </a:lnRef>
+          <a:fillRef idx="3">
+            <a:schemeClr val="accent1"/>
+          </a:fillRef>
+          <a:effectRef idx="2">
+            <a:schemeClr val="accent1"/>
+          </a:effectRef>
+          <a:fontRef idx="minor">
+            <a:schemeClr val="lt1"/>
+          </a:fontRef>
+        </p:style>
+        <p:txBody>
+          <a:bodyPr rtlCol="0" anchor="ctr"/>
+          <a:lstStyle/>
+          <a:p>
+            <a:pPr algn="ctr"/>
+          </a:p>
+        </p:txBody>
+      </p:sp>
+      <p:sp>
+        <p:nvSpPr>
+          <p:cNvPr id="39" name="TextBox 38"/>
+          <p:cNvSpPr txBox="1"/>
+          <p:nvPr/>
+        </p:nvSpPr>
+        <p:spPr>
+          <a:xfrm>
+            <a:off x="11173968" y="6451092"/>
+            <a:ext cx="640080" cy="182880"/>
+          </a:xfrm>
+          <a:prstGeom prst="rect">
+            <a:avLst/>
+          </a:prstGeom>
+          <a:noFill/>
+        </p:spPr>
+        <p:txBody>
+          <a:bodyPr wrap="square" lIns="0" rIns="0" tIns="0" bIns="0" anchor="ctr">
+            <a:spAutoFit/>
+          </a:bodyPr>
+          <a:lstStyle/>
+          <a:p>
+            <a:pPr algn="ctr">
+              <a:defRPr sz="900" b="1">
+                <a:solidFill>
+                  <a:srgbClr val="005A67"/>
+                </a:solidFill>
+                <a:latin typeface="Noto Sans"/>
+              </a:defRPr>
+            </a:pPr>
+            <a:r>
+              <a:t>5/9</a:t>
+            </a:r>
+          </a:p>
+        </p:txBody>
+      </p:sp>
+    </p:spTree>
+  </p:cSld>
+  <p:clrMapOvr>
+    <a:masterClrMapping/>
+  </p:clrMapOvr>
+</p:sld>
+</file>
+
+<file path=ppt/slides/slide6.xml><?xml version="1.0" encoding="utf-8"?>
+<p:sld xmlns:a="http://schemas.openxmlformats.org/drawingml/2006/main" xmlns:p="http://schemas.openxmlformats.org/presentationml/2006/main" xmlns:r="http://schemas.openxmlformats.org/officeDocument/2006/relationships">
+  <p:cSld>
+    <p:bg>
+      <p:bgPr>
+        <a:solidFill>
+          <a:srgbClr val="F6BD38"/>
+        </a:solidFill>
+        <a:effectLst/>
+      </p:bgPr>
+    </p:bg>
+    <p:spTree>
+      <p:nvGrpSpPr>
+        <p:cNvPr id="1" name=""/>
+        <p:cNvGrpSpPr/>
+        <p:nvPr/>
+      </p:nvGrpSpPr>
+      <p:grpSpPr/>
+      <p:sp>
+        <p:nvSpPr>
+          <p:cNvPr id="2" name="Oval 1"/>
+          <p:cNvSpPr/>
+          <p:nvPr/>
+        </p:nvSpPr>
+        <p:spPr>
+          <a:xfrm>
+            <a:off x="-201168" y="-182880"/>
+            <a:ext cx="676656" cy="676656"/>
+          </a:xfrm>
+          <a:prstGeom prst="ellipse">
+            <a:avLst/>
+          </a:prstGeom>
+          <a:solidFill>
+            <a:srgbClr val="F6BD38">
+              <a:alpha val="20000"/>
+            </a:srgbClr>
+          </a:solidFill>
+          <a:ln>
+            <a:noFill/>
+          </a:ln>
+        </p:spPr>
+        <p:style>
+          <a:lnRef idx="1">
+            <a:schemeClr val="accent1"/>
+          </a:lnRef>
+          <a:fillRef idx="3">
+            <a:schemeClr val="accent1"/>
+          </a:fillRef>
+          <a:effectRef idx="2">
+            <a:schemeClr val="accent1"/>
+          </a:effectRef>
+          <a:fontRef idx="minor">
+            <a:schemeClr val="lt1"/>
+          </a:fontRef>
+        </p:style>
+        <p:txBody>
+          <a:bodyPr rtlCol="0" anchor="ctr"/>
+          <a:lstStyle/>
+          <a:p>
+            <a:pPr algn="ctr"/>
+          </a:p>
+        </p:txBody>
+      </p:sp>
+      <p:sp>
+        <p:nvSpPr>
+          <p:cNvPr id="3" name="Arc 2"/>
+          <p:cNvSpPr/>
+          <p:nvPr/>
+        </p:nvSpPr>
+        <p:spPr>
+          <a:xfrm>
+            <a:off x="11338560" y="-164592"/>
+            <a:ext cx="868680" cy="868680"/>
+          </a:xfrm>
+          <a:prstGeom prst="arc">
+            <a:avLst/>
+          </a:prstGeom>
+          <a:solidFill>
+            <a:srgbClr val="37A9E8">
+              <a:alpha val="20000"/>
+            </a:srgbClr>
+          </a:solidFill>
+          <a:ln>
+            <a:noFill/>
+          </a:ln>
+        </p:spPr>
+        <p:style>
+          <a:lnRef idx="1">
+            <a:schemeClr val="accent1"/>
+          </a:lnRef>
+          <a:fillRef idx="3">
+            <a:schemeClr val="accent1"/>
+          </a:fillRef>
+          <a:effectRef idx="2">
+            <a:schemeClr val="accent1"/>
+          </a:effectRef>
+          <a:fontRef idx="minor">
+            <a:schemeClr val="lt1"/>
+          </a:fontRef>
+        </p:style>
+        <p:txBody>
+          <a:bodyPr rtlCol="0" anchor="ctr"/>
+          <a:lstStyle/>
+          <a:p>
+            <a:pPr algn="ctr"/>
+          </a:p>
+        </p:txBody>
+      </p:sp>
+      <p:sp>
+        <p:nvSpPr>
+          <p:cNvPr id="4" name="8-Point Star 3"/>
+          <p:cNvSpPr/>
+          <p:nvPr/>
+        </p:nvSpPr>
+        <p:spPr>
+          <a:xfrm>
+            <a:off x="11411712" y="6053328"/>
+            <a:ext cx="640080" cy="640080"/>
+          </a:xfrm>
+          <a:prstGeom prst="star8">
+            <a:avLst/>
+          </a:prstGeom>
+          <a:solidFill>
+            <a:srgbClr val="F06449">
+              <a:alpha val="20000"/>
+            </a:srgbClr>
+          </a:solidFill>
+          <a:ln>
+            <a:noFill/>
+          </a:ln>
+        </p:spPr>
+        <p:style>
+          <a:lnRef idx="1">
+            <a:schemeClr val="accent1"/>
+          </a:lnRef>
+          <a:fillRef idx="3">
+            <a:schemeClr val="accent1"/>
+          </a:fillRef>
+          <a:effectRef idx="2">
+            <a:schemeClr val="accent1"/>
+          </a:effectRef>
+          <a:fontRef idx="minor">
+            <a:schemeClr val="lt1"/>
+          </a:fontRef>
+        </p:style>
+        <p:txBody>
+          <a:bodyPr rtlCol="0" anchor="ctr"/>
+          <a:lstStyle/>
+          <a:p>
+            <a:pPr algn="ctr"/>
+          </a:p>
+        </p:txBody>
+      </p:sp>
+      <p:sp>
+        <p:nvSpPr>
+          <p:cNvPr id="5" name="Moon 4"/>
+          <p:cNvSpPr/>
+          <p:nvPr/>
+        </p:nvSpPr>
+        <p:spPr>
+          <a:xfrm>
+            <a:off x="-219456" y="5989320"/>
+            <a:ext cx="658368" cy="658368"/>
+          </a:xfrm>
+          <a:prstGeom prst="moon">
+            <a:avLst/>
+          </a:prstGeom>
+          <a:solidFill>
+            <a:srgbClr val="005A67">
+              <a:alpha val="20000"/>
+            </a:srgbClr>
+          </a:solidFill>
+          <a:ln>
+            <a:noFill/>
+          </a:ln>
+        </p:spPr>
+        <p:style>
+          <a:lnRef idx="1">
+            <a:schemeClr val="accent1"/>
+          </a:lnRef>
+          <a:fillRef idx="3">
+            <a:schemeClr val="accent1"/>
+          </a:fillRef>
+          <a:effectRef idx="2">
+            <a:schemeClr val="accent1"/>
+          </a:effectRef>
+          <a:fontRef idx="minor">
+            <a:schemeClr val="lt1"/>
+          </a:fontRef>
+        </p:style>
+        <p:txBody>
+          <a:bodyPr rtlCol="0" anchor="ctr"/>
+          <a:lstStyle/>
+          <a:p>
+            <a:pPr algn="ctr"/>
+          </a:p>
+        </p:txBody>
+      </p:sp>
+      <p:sp>
+        <p:nvSpPr>
+          <p:cNvPr id="6" name="Oval 5"/>
+          <p:cNvSpPr/>
+          <p:nvPr/>
+        </p:nvSpPr>
+        <p:spPr>
+          <a:xfrm>
+            <a:off x="9921240" y="841248"/>
+            <a:ext cx="1143000" cy="1143000"/>
+          </a:xfrm>
+          <a:prstGeom prst="ellipse">
+            <a:avLst/>
+          </a:prstGeom>
+          <a:solidFill>
+            <a:srgbClr val="F6BD38">
+              <a:alpha val="20000"/>
+            </a:srgbClr>
+          </a:solidFill>
+          <a:ln>
+            <a:noFill/>
+          </a:ln>
+        </p:spPr>
+        <p:style>
+          <a:lnRef idx="1">
+            <a:schemeClr val="accent1"/>
+          </a:lnRef>
+          <a:fillRef idx="3">
+            <a:schemeClr val="accent1"/>
+          </a:fillRef>
+          <a:effectRef idx="2">
+            <a:schemeClr val="accent1"/>
+          </a:effectRef>
+          <a:fontRef idx="minor">
+            <a:schemeClr val="lt1"/>
+          </a:fontRef>
+        </p:style>
+        <p:txBody>
+          <a:bodyPr rtlCol="0" anchor="ctr"/>
+          <a:lstStyle/>
+          <a:p>
+            <a:pPr algn="ctr"/>
+          </a:p>
+        </p:txBody>
+      </p:sp>
+      <p:sp>
+        <p:nvSpPr>
+          <p:cNvPr id="7" name="Rectangle 6"/>
+          <p:cNvSpPr/>
+          <p:nvPr/>
+        </p:nvSpPr>
+        <p:spPr>
+          <a:xfrm>
+            <a:off x="10451592" y="1033271"/>
+            <a:ext cx="82296" cy="438912"/>
+          </a:xfrm>
+          <a:prstGeom prst="rect">
+            <a:avLst/>
+          </a:prstGeom>
+          <a:solidFill>
+            <a:srgbClr val="17343A">
+              <a:alpha val="20000"/>
+            </a:srgbClr>
+          </a:solidFill>
+          <a:ln>
+            <a:noFill/>
+          </a:ln>
+        </p:spPr>
+        <p:style>
+          <a:lnRef idx="1">
+            <a:schemeClr val="accent1"/>
+          </a:lnRef>
+          <a:fillRef idx="3">
+            <a:schemeClr val="accent1"/>
+          </a:fillRef>
+          <a:effectRef idx="2">
+            <a:schemeClr val="accent1"/>
+          </a:effectRef>
+          <a:fontRef idx="minor">
+            <a:schemeClr val="lt1"/>
+          </a:fontRef>
+        </p:style>
+        <p:txBody>
+          <a:bodyPr rtlCol="0" anchor="ctr"/>
+          <a:lstStyle/>
+          <a:p>
+            <a:pPr algn="ctr"/>
+          </a:p>
+        </p:txBody>
+      </p:sp>
+      <p:sp>
+        <p:nvSpPr>
+          <p:cNvPr id="8" name="Rectangle 7"/>
+          <p:cNvSpPr/>
+          <p:nvPr/>
+        </p:nvSpPr>
+        <p:spPr>
+          <a:xfrm rot="1200000">
+            <a:off x="10469880" y="1371600"/>
+            <a:ext cx="329184" cy="82296"/>
+          </a:xfrm>
+          <a:prstGeom prst="rect">
+            <a:avLst/>
+          </a:prstGeom>
+          <a:solidFill>
+            <a:srgbClr val="17343A">
+              <a:alpha val="20000"/>
+            </a:srgbClr>
+          </a:solidFill>
+          <a:ln>
+            <a:noFill/>
+          </a:ln>
+        </p:spPr>
+        <p:style>
+          <a:lnRef idx="1">
+            <a:schemeClr val="accent1"/>
+          </a:lnRef>
+          <a:fillRef idx="3">
+            <a:schemeClr val="accent1"/>
+          </a:fillRef>
+          <a:effectRef idx="2">
+            <a:schemeClr val="accent1"/>
+          </a:effectRef>
+          <a:fontRef idx="minor">
+            <a:schemeClr val="lt1"/>
+          </a:fontRef>
+        </p:style>
+        <p:txBody>
+          <a:bodyPr rtlCol="0" anchor="ctr"/>
+          <a:lstStyle/>
+          <a:p>
+            <a:pPr algn="ctr"/>
+          </a:p>
+        </p:txBody>
+      </p:sp>
+      <p:sp>
+        <p:nvSpPr>
+          <p:cNvPr id="9" name="Teardrop 8"/>
+          <p:cNvSpPr/>
+          <p:nvPr/>
+        </p:nvSpPr>
+        <p:spPr>
+          <a:xfrm rot="1200000">
+            <a:off x="1874519" y="5349240"/>
+            <a:ext cx="384048" cy="530352"/>
+          </a:xfrm>
+          <a:prstGeom prst="teardrop">
+            <a:avLst/>
+          </a:prstGeom>
+          <a:solidFill>
+            <a:srgbClr val="37A9E8">
+              <a:alpha val="20000"/>
+            </a:srgbClr>
+          </a:solidFill>
+          <a:ln>
+            <a:noFill/>
+          </a:ln>
+        </p:spPr>
+        <p:style>
+          <a:lnRef idx="1">
+            <a:schemeClr val="accent1"/>
+          </a:lnRef>
+          <a:fillRef idx="3">
+            <a:schemeClr val="accent1"/>
+          </a:fillRef>
+          <a:effectRef idx="2">
+            <a:schemeClr val="accent1"/>
+          </a:effectRef>
+          <a:fontRef idx="minor">
+            <a:schemeClr val="lt1"/>
+          </a:fontRef>
+        </p:style>
+        <p:txBody>
+          <a:bodyPr rtlCol="0" anchor="ctr"/>
+          <a:lstStyle/>
+          <a:p>
+            <a:pPr algn="ctr"/>
+          </a:p>
+        </p:txBody>
+      </p:sp>
+      <p:sp>
+        <p:nvSpPr>
+          <p:cNvPr id="10" name="Teardrop 9"/>
+          <p:cNvSpPr/>
+          <p:nvPr/>
+        </p:nvSpPr>
+        <p:spPr>
+          <a:xfrm rot="1200000">
+            <a:off x="2331720" y="5696712"/>
+            <a:ext cx="301752" cy="420624"/>
+          </a:xfrm>
+          <a:prstGeom prst="teardrop">
+            <a:avLst/>
+          </a:prstGeom>
+          <a:solidFill>
+            <a:srgbClr val="37A9E8">
+              <a:alpha val="20000"/>
+            </a:srgbClr>
+          </a:solidFill>
+          <a:ln>
+            <a:noFill/>
+          </a:ln>
+        </p:spPr>
+        <p:style>
+          <a:lnRef idx="1">
+            <a:schemeClr val="accent1"/>
+          </a:lnRef>
+          <a:fillRef idx="3">
+            <a:schemeClr val="accent1"/>
+          </a:fillRef>
+          <a:effectRef idx="2">
+            <a:schemeClr val="accent1"/>
+          </a:effectRef>
+          <a:fontRef idx="minor">
+            <a:schemeClr val="lt1"/>
+          </a:fontRef>
+        </p:style>
+        <p:txBody>
+          <a:bodyPr rtlCol="0" anchor="ctr"/>
+          <a:lstStyle/>
+          <a:p>
+            <a:pPr algn="ctr"/>
+          </a:p>
+        </p:txBody>
+      </p:sp>
+      <p:sp>
+        <p:nvSpPr>
+          <p:cNvPr id="11" name="Rounded Rectangle 10"/>
+          <p:cNvSpPr/>
+          <p:nvPr/>
+        </p:nvSpPr>
+        <p:spPr>
+          <a:xfrm>
+            <a:off x="9646920" y="5230368"/>
+            <a:ext cx="1664208" cy="859536"/>
+          </a:xfrm>
+          <a:prstGeom prst="roundRect">
+            <a:avLst/>
+          </a:prstGeom>
+          <a:solidFill>
+            <a:srgbClr val="005A67">
+              <a:alpha val="20000"/>
+            </a:srgbClr>
+          </a:solidFill>
+          <a:ln>
+            <a:noFill/>
+          </a:ln>
+        </p:spPr>
+        <p:style>
+          <a:lnRef idx="1">
+            <a:schemeClr val="accent1"/>
+          </a:lnRef>
+          <a:fillRef idx="3">
+            <a:schemeClr val="accent1"/>
+          </a:fillRef>
+          <a:effectRef idx="2">
+            <a:schemeClr val="accent1"/>
+          </a:effectRef>
+          <a:fontRef idx="minor">
+            <a:schemeClr val="lt1"/>
+          </a:fontRef>
+        </p:style>
+        <p:txBody>
+          <a:bodyPr rtlCol="0" anchor="ctr"/>
+          <a:lstStyle/>
+          <a:p>
+            <a:pPr algn="ctr"/>
+          </a:p>
+        </p:txBody>
+      </p:sp>
+      <p:sp>
+        <p:nvSpPr>
+          <p:cNvPr id="12" name="Rectangle 11"/>
+          <p:cNvSpPr/>
+          <p:nvPr/>
+        </p:nvSpPr>
+        <p:spPr>
+          <a:xfrm>
+            <a:off x="9912096" y="5394960"/>
+            <a:ext cx="1115568" cy="301752"/>
+          </a:xfrm>
+          <a:prstGeom prst="rect">
+            <a:avLst/>
+          </a:prstGeom>
+          <a:solidFill>
+            <a:srgbClr val="37A9E8">
+              <a:alpha val="20000"/>
+            </a:srgbClr>
+          </a:solidFill>
+          <a:ln>
+            <a:noFill/>
+          </a:ln>
+        </p:spPr>
+        <p:style>
+          <a:lnRef idx="1">
+            <a:schemeClr val="accent1"/>
+          </a:lnRef>
+          <a:fillRef idx="3">
+            <a:schemeClr val="accent1"/>
+          </a:fillRef>
+          <a:effectRef idx="2">
+            <a:schemeClr val="accent1"/>
+          </a:effectRef>
+          <a:fontRef idx="minor">
+            <a:schemeClr val="lt1"/>
+          </a:fontRef>
+        </p:style>
+        <p:txBody>
+          <a:bodyPr rtlCol="0" anchor="ctr"/>
+          <a:lstStyle/>
+          <a:p>
+            <a:pPr algn="ctr"/>
+          </a:p>
+        </p:txBody>
+      </p:sp>
+      <p:sp>
+        <p:nvSpPr>
+          <p:cNvPr id="13" name="Oval 12"/>
+          <p:cNvSpPr/>
+          <p:nvPr/>
+        </p:nvSpPr>
+        <p:spPr>
+          <a:xfrm>
+            <a:off x="9902952" y="5916168"/>
+            <a:ext cx="283464" cy="283464"/>
+          </a:xfrm>
+          <a:prstGeom prst="ellipse">
+            <a:avLst/>
+          </a:prstGeom>
+          <a:solidFill>
+            <a:srgbClr val="17343A">
+              <a:alpha val="20000"/>
+            </a:srgbClr>
+          </a:solidFill>
+          <a:ln>
+            <a:noFill/>
+          </a:ln>
+        </p:spPr>
+        <p:style>
+          <a:lnRef idx="1">
+            <a:schemeClr val="accent1"/>
+          </a:lnRef>
+          <a:fillRef idx="3">
+            <a:schemeClr val="accent1"/>
+          </a:fillRef>
+          <a:effectRef idx="2">
+            <a:schemeClr val="accent1"/>
+          </a:effectRef>
+          <a:fontRef idx="minor">
+            <a:schemeClr val="lt1"/>
+          </a:fontRef>
+        </p:style>
+        <p:txBody>
+          <a:bodyPr rtlCol="0" anchor="ctr"/>
+          <a:lstStyle/>
+          <a:p>
+            <a:pPr algn="ctr"/>
+          </a:p>
+        </p:txBody>
+      </p:sp>
+      <p:sp>
+        <p:nvSpPr>
+          <p:cNvPr id="14" name="Oval 13"/>
+          <p:cNvSpPr/>
+          <p:nvPr/>
+        </p:nvSpPr>
+        <p:spPr>
+          <a:xfrm>
+            <a:off x="10771632" y="5916168"/>
+            <a:ext cx="283464" cy="283464"/>
+          </a:xfrm>
+          <a:prstGeom prst="ellipse">
+            <a:avLst/>
+          </a:prstGeom>
+          <a:solidFill>
+            <a:srgbClr val="17343A">
+              <a:alpha val="20000"/>
+            </a:srgbClr>
+          </a:solidFill>
+          <a:ln>
+            <a:noFill/>
+          </a:ln>
+        </p:spPr>
+        <p:style>
+          <a:lnRef idx="1">
+            <a:schemeClr val="accent1"/>
+          </a:lnRef>
+          <a:fillRef idx="3">
+            <a:schemeClr val="accent1"/>
+          </a:fillRef>
+          <a:effectRef idx="2">
+            <a:schemeClr val="accent1"/>
+          </a:effectRef>
+          <a:fontRef idx="minor">
+            <a:schemeClr val="lt1"/>
+          </a:fontRef>
+        </p:style>
+        <p:txBody>
+          <a:bodyPr rtlCol="0" anchor="ctr"/>
+          <a:lstStyle/>
+          <a:p>
+            <a:pPr algn="ctr"/>
+          </a:p>
+        </p:txBody>
+      </p:sp>
+      <p:sp>
+        <p:nvSpPr>
+          <p:cNvPr id="15" name="TextBox 14"/>
+          <p:cNvSpPr txBox="1"/>
+          <p:nvPr/>
+        </p:nvSpPr>
+        <p:spPr>
+          <a:xfrm>
+            <a:off x="411480" y="320040"/>
+            <a:ext cx="502920" cy="320040"/>
+          </a:xfrm>
+          <a:prstGeom prst="rect">
+            <a:avLst/>
+          </a:prstGeom>
+          <a:noFill/>
+        </p:spPr>
+        <p:txBody>
+          <a:bodyPr wrap="square" lIns="36576" rIns="36576" tIns="36576" bIns="36576" anchor="t">
+            <a:spAutoFit/>
+          </a:bodyPr>
+          <a:lstStyle/>
+          <a:p>
+            <a:pPr algn="l">
+              <a:defRPr sz="1300" b="1">
+                <a:solidFill>
+                  <a:srgbClr val="005A67"/>
+                </a:solidFill>
+                <a:latin typeface="Noto Sans"/>
+              </a:defRPr>
+            </a:pPr>
+            <a:r>
+              <a:t>05</a:t>
+            </a:r>
+          </a:p>
+        </p:txBody>
+      </p:sp>
+      <p:sp>
+        <p:nvSpPr>
+          <p:cNvPr id="16" name="TextBox 15"/>
+          <p:cNvSpPr txBox="1"/>
+          <p:nvPr/>
+        </p:nvSpPr>
+        <p:spPr>
+          <a:xfrm>
+            <a:off x="804672" y="237744"/>
+            <a:ext cx="10607040" cy="640080"/>
+          </a:xfrm>
+          <a:prstGeom prst="rect">
+            <a:avLst/>
+          </a:prstGeom>
+          <a:noFill/>
+        </p:spPr>
+        <p:txBody>
+          <a:bodyPr wrap="square" lIns="36576" rIns="36576" tIns="36576" bIns="36576" anchor="t">
+            <a:spAutoFit/>
+          </a:bodyPr>
+          <a:lstStyle/>
+          <a:p>
+            <a:pPr algn="l">
+              <a:defRPr sz="2700" b="1">
+                <a:solidFill>
+                  <a:srgbClr val="005A67"/>
+                </a:solidFill>
+                <a:latin typeface="Noto Sans"/>
+              </a:defRPr>
+            </a:pPr>
+            <a:r>
+              <a:t>Ato 2 · Onde o problema se concentra</a:t>
+            </a:r>
+          </a:p>
+        </p:txBody>
+      </p:sp>
+      <p:pic>
+        <p:nvPicPr>
+          <p:cNvPr id="17" name="Picture 16" descr="02_heatmap_rota_turno.png"/>
+          <p:cNvPicPr>
+            <a:picLocks noChangeAspect="1"/>
+          </p:cNvPicPr>
+          <p:nvPr/>
+        </p:nvPicPr>
+        <p:blipFill>
+          <a:blip r:embed="rId2"/>
+          <a:stretch>
+            <a:fillRect/>
+          </a:stretch>
+        </p:blipFill>
+        <p:spPr>
+          <a:xfrm>
+            <a:off x="502920" y="1515184"/>
+            <a:ext cx="6016752" cy="4193390"/>
+          </a:xfrm>
+          <a:prstGeom prst="rect">
+            <a:avLst/>
+          </a:prstGeom>
+        </p:spPr>
+      </p:pic>
+      <p:sp>
+        <p:nvSpPr>
+          <p:cNvPr id="18" name="Rounded Rectangle 17"/>
+          <p:cNvSpPr/>
+          <p:nvPr/>
+        </p:nvSpPr>
+        <p:spPr>
+          <a:xfrm>
+            <a:off x="6647688" y="1124712"/>
+            <a:ext cx="4983480" cy="1078992"/>
+          </a:xfrm>
+          <a:prstGeom prst="roundRect">
+            <a:avLst/>
+          </a:prstGeom>
+          <a:solidFill>
+            <a:srgbClr val="37A9E8"/>
+          </a:solidFill>
+          <a:ln>
+            <a:noFill/>
+          </a:ln>
+        </p:spPr>
+        <p:style>
+          <a:lnRef idx="1">
+            <a:schemeClr val="accent1"/>
+          </a:lnRef>
+          <a:fillRef idx="3">
+            <a:schemeClr val="accent1"/>
+          </a:fillRef>
+          <a:effectRef idx="2">
+            <a:schemeClr val="accent1"/>
+          </a:effectRef>
+          <a:fontRef idx="minor">
+            <a:schemeClr val="lt1"/>
+          </a:fontRef>
+        </p:style>
+        <p:txBody>
+          <a:bodyPr rtlCol="0" anchor="ctr"/>
+          <a:lstStyle/>
+          <a:p>
+            <a:pPr algn="ctr"/>
+          </a:p>
+        </p:txBody>
+      </p:sp>
+      <p:sp>
+        <p:nvSpPr>
+          <p:cNvPr id="19" name="TextBox 18"/>
+          <p:cNvSpPr txBox="1"/>
+          <p:nvPr/>
+        </p:nvSpPr>
+        <p:spPr>
+          <a:xfrm>
+            <a:off x="6903720" y="1271016"/>
+            <a:ext cx="1508760" cy="338328"/>
+          </a:xfrm>
+          <a:prstGeom prst="rect">
+            <a:avLst/>
+          </a:prstGeom>
+          <a:noFill/>
+        </p:spPr>
+        <p:txBody>
+          <a:bodyPr wrap="square" lIns="36576" rIns="36576" tIns="36576" bIns="36576" anchor="t">
+            <a:spAutoFit/>
+          </a:bodyPr>
+          <a:lstStyle/>
+          <a:p>
+            <a:pPr algn="l">
+              <a:defRPr sz="1600" b="1">
+                <a:solidFill>
+                  <a:srgbClr val="005A67"/>
+                </a:solidFill>
+                <a:latin typeface="Noto Sans"/>
+              </a:defRPr>
+            </a:pPr>
+            <a:r>
+              <a:t>Chuva Agrava</a:t>
+            </a:r>
+          </a:p>
+        </p:txBody>
+      </p:sp>
+      <p:sp>
+        <p:nvSpPr>
+          <p:cNvPr id="20" name="TextBox 19"/>
+          <p:cNvSpPr txBox="1"/>
+          <p:nvPr/>
+        </p:nvSpPr>
+        <p:spPr>
+          <a:xfrm>
+            <a:off x="8348472" y="1261872"/>
+            <a:ext cx="3154680" cy="822960"/>
+          </a:xfrm>
+          <a:prstGeom prst="rect">
+            <a:avLst/>
+          </a:prstGeom>
+          <a:noFill/>
+        </p:spPr>
+        <p:txBody>
+          <a:bodyPr wrap="square" lIns="36576" rIns="36576" tIns="36576" bIns="36576" anchor="t">
+            <a:spAutoFit/>
+          </a:bodyPr>
+          <a:lstStyle/>
+          <a:p>
+            <a:pPr algn="l">
+              <a:defRPr sz="1250" b="0">
+                <a:solidFill>
+                  <a:srgbClr val="17343A"/>
+                </a:solidFill>
+                <a:latin typeface="Noto Sans"/>
+              </a:defRPr>
+            </a:pPr>
+            <a:r>
+              <a:t>Correlação moderada (0,46): o efeito aparece em toda a operação, não só em duas rotas.</a:t>
+            </a:r>
+          </a:p>
+        </p:txBody>
+      </p:sp>
+      <p:sp>
+        <p:nvSpPr>
+          <p:cNvPr id="21" name="Rounded Rectangle 20"/>
+          <p:cNvSpPr/>
+          <p:nvPr/>
+        </p:nvSpPr>
+        <p:spPr>
+          <a:xfrm>
+            <a:off x="6647688" y="2478024"/>
+            <a:ext cx="4983480" cy="1078992"/>
+          </a:xfrm>
+          <a:prstGeom prst="roundRect">
+            <a:avLst/>
+          </a:prstGeom>
+          <a:solidFill>
+            <a:srgbClr val="F06449"/>
+          </a:solidFill>
+          <a:ln>
+            <a:noFill/>
+          </a:ln>
+        </p:spPr>
+        <p:style>
+          <a:lnRef idx="1">
+            <a:schemeClr val="accent1"/>
+          </a:lnRef>
+          <a:fillRef idx="3">
+            <a:schemeClr val="accent1"/>
+          </a:fillRef>
+          <a:effectRef idx="2">
+            <a:schemeClr val="accent1"/>
+          </a:effectRef>
+          <a:fontRef idx="minor">
+            <a:schemeClr val="lt1"/>
+          </a:fontRef>
+        </p:style>
+        <p:txBody>
+          <a:bodyPr rtlCol="0" anchor="ctr"/>
+          <a:lstStyle/>
+          <a:p>
+            <a:pPr algn="ctr"/>
+          </a:p>
+        </p:txBody>
+      </p:sp>
+      <p:sp>
+        <p:nvSpPr>
+          <p:cNvPr id="22" name="TextBox 21"/>
+          <p:cNvSpPr txBox="1"/>
+          <p:nvPr/>
+        </p:nvSpPr>
+        <p:spPr>
+          <a:xfrm>
+            <a:off x="6903720" y="2624328"/>
+            <a:ext cx="1508760" cy="338328"/>
+          </a:xfrm>
+          <a:prstGeom prst="rect">
+            <a:avLst/>
+          </a:prstGeom>
+          <a:noFill/>
+        </p:spPr>
+        <p:txBody>
+          <a:bodyPr wrap="square" lIns="36576" rIns="36576" tIns="36576" bIns="36576" anchor="t">
+            <a:spAutoFit/>
+          </a:bodyPr>
+          <a:lstStyle/>
+          <a:p>
+            <a:pPr algn="l">
+              <a:defRPr sz="1600" b="1">
+                <a:solidFill>
+                  <a:srgbClr val="005A67"/>
+                </a:solidFill>
+                <a:latin typeface="Noto Sans"/>
+              </a:defRPr>
+            </a:pPr>
+            <a:r>
+              <a:t>Obra Localiza</a:t>
+            </a:r>
+          </a:p>
+        </p:txBody>
+      </p:sp>
+      <p:sp>
+        <p:nvSpPr>
+          <p:cNvPr id="23" name="TextBox 22"/>
+          <p:cNvSpPr txBox="1"/>
+          <p:nvPr/>
+        </p:nvSpPr>
+        <p:spPr>
+          <a:xfrm>
+            <a:off x="8348472" y="2615184"/>
+            <a:ext cx="3154680" cy="822960"/>
+          </a:xfrm>
+          <a:prstGeom prst="rect">
+            <a:avLst/>
+          </a:prstGeom>
+          <a:noFill/>
+        </p:spPr>
+        <p:txBody>
+          <a:bodyPr wrap="square" lIns="36576" rIns="36576" tIns="36576" bIns="36576" anchor="t">
+            <a:spAutoFit/>
+          </a:bodyPr>
+          <a:lstStyle/>
+          <a:p>
+            <a:pPr algn="l">
+              <a:defRPr sz="1250" b="0">
+                <a:solidFill>
+                  <a:srgbClr val="17343A"/>
+                </a:solidFill>
+                <a:latin typeface="Noto Sans"/>
+              </a:defRPr>
+            </a:pPr>
+            <a:r>
+              <a:t>“Obra na via” surge em 07/04 somente em R03 e R05.</a:t>
+            </a:r>
+          </a:p>
+        </p:txBody>
+      </p:sp>
+      <p:sp>
+        <p:nvSpPr>
+          <p:cNvPr id="24" name="Rounded Rectangle 23"/>
+          <p:cNvSpPr/>
+          <p:nvPr/>
+        </p:nvSpPr>
+        <p:spPr>
+          <a:xfrm>
+            <a:off x="6647688" y="3831335"/>
+            <a:ext cx="4983480" cy="1078992"/>
+          </a:xfrm>
+          <a:prstGeom prst="roundRect">
+            <a:avLst/>
+          </a:prstGeom>
+          <a:solidFill>
+            <a:srgbClr val="65C3A5"/>
+          </a:solidFill>
+          <a:ln>
+            <a:noFill/>
+          </a:ln>
+        </p:spPr>
+        <p:style>
+          <a:lnRef idx="1">
+            <a:schemeClr val="accent1"/>
+          </a:lnRef>
+          <a:fillRef idx="3">
+            <a:schemeClr val="accent1"/>
+          </a:fillRef>
+          <a:effectRef idx="2">
+            <a:schemeClr val="accent1"/>
+          </a:effectRef>
+          <a:fontRef idx="minor">
+            <a:schemeClr val="lt1"/>
+          </a:fontRef>
+        </p:style>
+        <p:txBody>
+          <a:bodyPr rtlCol="0" anchor="ctr"/>
+          <a:lstStyle/>
+          <a:p>
+            <a:pPr algn="ctr"/>
+          </a:p>
+        </p:txBody>
+      </p:sp>
+      <p:sp>
+        <p:nvSpPr>
+          <p:cNvPr id="25" name="TextBox 24"/>
+          <p:cNvSpPr txBox="1"/>
+          <p:nvPr/>
+        </p:nvSpPr>
+        <p:spPr>
+          <a:xfrm>
+            <a:off x="6903720" y="3977639"/>
+            <a:ext cx="1508760" cy="338328"/>
+          </a:xfrm>
+          <a:prstGeom prst="rect">
+            <a:avLst/>
+          </a:prstGeom>
+          <a:noFill/>
+        </p:spPr>
+        <p:txBody>
+          <a:bodyPr wrap="square" lIns="36576" rIns="36576" tIns="36576" bIns="36576" anchor="t">
+            <a:spAutoFit/>
+          </a:bodyPr>
+          <a:lstStyle/>
+          <a:p>
+            <a:pPr algn="l">
+              <a:defRPr sz="1600" b="1">
+                <a:solidFill>
+                  <a:srgbClr val="005A67"/>
+                </a:solidFill>
+                <a:latin typeface="Noto Sans"/>
+              </a:defRPr>
+            </a:pPr>
+            <a:r>
+              <a:t>Noite Preserva</a:t>
+            </a:r>
+          </a:p>
+        </p:txBody>
+      </p:sp>
+      <p:sp>
+        <p:nvSpPr>
+          <p:cNvPr id="26" name="TextBox 25"/>
+          <p:cNvSpPr txBox="1"/>
+          <p:nvPr/>
+        </p:nvSpPr>
+        <p:spPr>
+          <a:xfrm>
+            <a:off x="8348472" y="3968496"/>
+            <a:ext cx="3154680" cy="822960"/>
+          </a:xfrm>
+          <a:prstGeom prst="rect">
+            <a:avLst/>
+          </a:prstGeom>
+          <a:noFill/>
+        </p:spPr>
+        <p:txBody>
+          <a:bodyPr wrap="square" lIns="36576" rIns="36576" tIns="36576" bIns="36576" anchor="t">
+            <a:spAutoFit/>
+          </a:bodyPr>
+          <a:lstStyle/>
+          <a:p>
+            <a:pPr algn="l">
+              <a:defRPr sz="1250" b="0">
+                <a:solidFill>
+                  <a:srgbClr val="17343A"/>
+                </a:solidFill>
+                <a:latin typeface="Noto Sans"/>
+              </a:defRPr>
+            </a:pPr>
+            <a:r>
+              <a:t>As duas rotas mantêm 96% de pontualidade no turno noturno.</a:t>
+            </a:r>
+          </a:p>
+        </p:txBody>
+      </p:sp>
+      <p:sp>
+        <p:nvSpPr>
+          <p:cNvPr id="27" name="Rounded Rectangle 26"/>
+          <p:cNvSpPr/>
+          <p:nvPr/>
+        </p:nvSpPr>
+        <p:spPr>
+          <a:xfrm>
+            <a:off x="6647688" y="5230368"/>
+            <a:ext cx="4983480" cy="804672"/>
+          </a:xfrm>
+          <a:prstGeom prst="roundRect">
+            <a:avLst/>
+          </a:prstGeom>
+          <a:solidFill>
+            <a:srgbClr val="005A67"/>
+          </a:solidFill>
+          <a:ln>
+            <a:noFill/>
+          </a:ln>
+        </p:spPr>
+        <p:style>
+          <a:lnRef idx="1">
+            <a:schemeClr val="accent1"/>
+          </a:lnRef>
+          <a:fillRef idx="3">
+            <a:schemeClr val="accent1"/>
+          </a:fillRef>
+          <a:effectRef idx="2">
+            <a:schemeClr val="accent1"/>
+          </a:effectRef>
+          <a:fontRef idx="minor">
+            <a:schemeClr val="lt1"/>
+          </a:fontRef>
+        </p:style>
+        <p:txBody>
+          <a:bodyPr rtlCol="0" anchor="ctr"/>
+          <a:lstStyle/>
+          <a:p>
+            <a:pPr algn="ctr"/>
+          </a:p>
+        </p:txBody>
+      </p:sp>
+      <p:sp>
+        <p:nvSpPr>
+          <p:cNvPr id="28" name="TextBox 27"/>
+          <p:cNvSpPr txBox="1"/>
+          <p:nvPr/>
+        </p:nvSpPr>
+        <p:spPr>
+          <a:xfrm>
+            <a:off x="6894576" y="5440680"/>
+            <a:ext cx="4498848" cy="384048"/>
+          </a:xfrm>
+          <a:prstGeom prst="rect">
+            <a:avLst/>
+          </a:prstGeom>
+          <a:noFill/>
+        </p:spPr>
+        <p:txBody>
+          <a:bodyPr wrap="square" lIns="36576" rIns="36576" tIns="36576" bIns="36576" anchor="t">
+            <a:spAutoFit/>
+          </a:bodyPr>
+          <a:lstStyle/>
+          <a:p>
+            <a:pPr algn="ctr">
+              <a:defRPr sz="1600" b="1">
+                <a:solidFill>
+                  <a:srgbClr val="FFF8E8"/>
+                </a:solidFill>
+                <a:latin typeface="Noto Sans"/>
+              </a:defRPr>
+            </a:pPr>
+            <a:r>
+              <a:t>Rota × turno: o problema é diurno e restrito a duas rotas.</a:t>
+            </a:r>
+          </a:p>
+        </p:txBody>
+      </p:sp>
+      <p:sp>
+        <p:nvSpPr>
+          <p:cNvPr id="29" name="Rounded Rectangle 28"/>
+          <p:cNvSpPr/>
+          <p:nvPr/>
+        </p:nvSpPr>
+        <p:spPr>
+          <a:xfrm>
+            <a:off x="11137392" y="6428232"/>
+            <a:ext cx="713232" cy="256032"/>
+          </a:xfrm>
+          <a:prstGeom prst="roundRect">
+            <a:avLst/>
+          </a:prstGeom>
+          <a:solidFill>
+            <a:srgbClr val="FFF8E8"/>
+          </a:solidFill>
+          <a:ln w="15240">
+            <a:solidFill>
+              <a:srgbClr val="005A67"/>
+            </a:solidFill>
+          </a:ln>
+        </p:spPr>
+        <p:style>
+          <a:lnRef idx="1">
+            <a:schemeClr val="accent1"/>
+          </a:lnRef>
+          <a:fillRef idx="3">
+            <a:schemeClr val="accent1"/>
+          </a:fillRef>
+          <a:effectRef idx="2">
+            <a:schemeClr val="accent1"/>
+          </a:effectRef>
+          <a:fontRef idx="minor">
+            <a:schemeClr val="lt1"/>
+          </a:fontRef>
+        </p:style>
+        <p:txBody>
+          <a:bodyPr rtlCol="0" anchor="ctr"/>
+          <a:lstStyle/>
+          <a:p>
+            <a:pPr algn="ctr"/>
+          </a:p>
+        </p:txBody>
+      </p:sp>
+      <p:sp>
+        <p:nvSpPr>
+          <p:cNvPr id="30" name="TextBox 29"/>
+          <p:cNvSpPr txBox="1"/>
+          <p:nvPr/>
+        </p:nvSpPr>
+        <p:spPr>
+          <a:xfrm>
+            <a:off x="11173968" y="6451092"/>
+            <a:ext cx="640080" cy="182880"/>
+          </a:xfrm>
+          <a:prstGeom prst="rect">
+            <a:avLst/>
+          </a:prstGeom>
+          <a:noFill/>
+        </p:spPr>
+        <p:txBody>
+          <a:bodyPr wrap="square" lIns="0" rIns="0" tIns="0" bIns="0" anchor="ctr">
+            <a:spAutoFit/>
+          </a:bodyPr>
+          <a:lstStyle/>
+          <a:p>
+            <a:pPr algn="ctr">
+              <a:defRPr sz="900" b="1">
+                <a:solidFill>
+                  <a:srgbClr val="005A67"/>
+                </a:solidFill>
+                <a:latin typeface="Noto Sans"/>
+              </a:defRPr>
+            </a:pPr>
+            <a:r>
+              <a:t>6/9</a:t>
+            </a:r>
+          </a:p>
+        </p:txBody>
+      </p:sp>
+    </p:spTree>
+  </p:cSld>
+  <p:clrMapOvr>
+    <a:masterClrMapping/>
+  </p:clrMapOvr>
+</p:sld>
+</file>
+
+<file path=ppt/slides/slide7.xml><?xml version="1.0" encoding="utf-8"?>
 <p:sld xmlns:a="http://schemas.openxmlformats.org/drawingml/2006/main" xmlns:p="http://schemas.openxmlformats.org/presentationml/2006/main" xmlns:r="http://schemas.openxmlformats.org/officeDocument/2006/relationships">
   <p:cSld>
     <p:bg>
@@ -10008,7 +12080,7 @@
               </a:defRPr>
             </a:pPr>
             <a:r>
-              <a:t>04</a:t>
+              <a:t>06</a:t>
             </a:r>
           </a:p>
         </p:txBody>
@@ -10044,7 +12116,7 @@
               </a:defRPr>
             </a:pPr>
             <a:r>
-              <a:t>Dataset e Qualidade</a:t>
+              <a:t>Ato 2 · O que a limpeza mudou</a:t>
             </a:r>
           </a:p>
         </p:txBody>
@@ -10583,7 +12655,7 @@
               </a:defRPr>
             </a:pPr>
             <a:r>
-              <a:t>O Que a Base Descreve</a:t>
+              <a:t>Antes → Depois da Limpeza</a:t>
             </a:r>
           </a:p>
         </p:txBody>
@@ -10596,8 +12668,8 @@
         </p:nvSpPr>
         <p:spPr>
           <a:xfrm>
-            <a:off x="950976" y="3410712"/>
-            <a:ext cx="4498848" cy="2011680"/>
+            <a:off x="950976" y="3456432"/>
+            <a:ext cx="2148840" cy="310896"/>
           </a:xfrm>
           <a:prstGeom prst="rect">
             <a:avLst/>
@@ -10605,16 +12677,49 @@
           <a:noFill/>
         </p:spPr>
         <p:txBody>
-          <a:bodyPr wrap="square" lIns="73152" rIns="73152">
+          <a:bodyPr wrap="square" lIns="36576" rIns="36576" tIns="36576" bIns="36576" anchor="t">
             <a:spAutoFit/>
           </a:bodyPr>
           <a:lstStyle/>
           <a:p>
-            <a:pPr>
-              <a:spcAft>
-                <a:spcPts val="1100"/>
-              </a:spcAft>
-              <a:defRPr sz="1500">
+            <a:pPr algn="r">
+              <a:defRPr sz="1600" b="1">
+                <a:solidFill>
+                  <a:srgbClr val="F06449"/>
+                </a:solidFill>
+                <a:latin typeface="Noto Sans"/>
+              </a:defRPr>
+            </a:pPr>
+            <a:r>
+              <a:t>2,51 → 0,70</a:t>
+            </a:r>
+          </a:p>
+        </p:txBody>
+      </p:sp>
+      <p:sp>
+        <p:nvSpPr>
+          <p:cNvPr id="32" name="TextBox 31"/>
+          <p:cNvSpPr txBox="1"/>
+          <p:nvPr/>
+        </p:nvSpPr>
+        <p:spPr>
+          <a:xfrm>
+            <a:off x="3246120" y="3474720"/>
+            <a:ext cx="2468880" cy="292608"/>
+          </a:xfrm>
+          <a:prstGeom prst="rect">
+            <a:avLst/>
+          </a:prstGeom>
+          <a:noFill/>
+        </p:spPr>
+        <p:txBody>
+          <a:bodyPr wrap="square" lIns="36576" rIns="36576" tIns="36576" bIns="36576" anchor="t">
+            <a:spAutoFit/>
+          </a:bodyPr>
+          <a:lstStyle/>
+          <a:p>
+            <a:pPr algn="l">
+              <a:defRPr sz="1300" b="0">
                 <a:solidFill>
                   <a:srgbClr val="17343A"/>
                 </a:solidFill>
@@ -10622,15 +12727,71 @@
               </a:defRPr>
             </a:pPr>
             <a:r>
-              <a:t>•  Data, turno, rota, zona e empresa</a:t>
-            </a:r>
-          </a:p>
-          <a:p>
-            <a:pPr>
-              <a:spcAft>
-                <a:spcPts val="1100"/>
-              </a:spcAft>
-              <a:defRPr sz="1500">
+              <a:t>min · atraso médio</a:t>
+            </a:r>
+          </a:p>
+        </p:txBody>
+      </p:sp>
+      <p:sp>
+        <p:nvSpPr>
+          <p:cNvPr id="33" name="TextBox 32"/>
+          <p:cNvSpPr txBox="1"/>
+          <p:nvPr/>
+        </p:nvSpPr>
+        <p:spPr>
+          <a:xfrm>
+            <a:off x="950976" y="4023359"/>
+            <a:ext cx="2148840" cy="310896"/>
+          </a:xfrm>
+          <a:prstGeom prst="rect">
+            <a:avLst/>
+          </a:prstGeom>
+          <a:noFill/>
+        </p:spPr>
+        <p:txBody>
+          <a:bodyPr wrap="square" lIns="36576" rIns="36576" tIns="36576" bIns="36576" anchor="t">
+            <a:spAutoFit/>
+          </a:bodyPr>
+          <a:lstStyle/>
+          <a:p>
+            <a:pPr algn="r">
+              <a:defRPr sz="1600" b="1">
+                <a:solidFill>
+                  <a:srgbClr val="F06449"/>
+                </a:solidFill>
+                <a:latin typeface="Noto Sans"/>
+              </a:defRPr>
+            </a:pPr>
+            <a:r>
+              <a:t>81,4 → 81,9</a:t>
+            </a:r>
+          </a:p>
+        </p:txBody>
+      </p:sp>
+      <p:sp>
+        <p:nvSpPr>
+          <p:cNvPr id="34" name="TextBox 33"/>
+          <p:cNvSpPr txBox="1"/>
+          <p:nvPr/>
+        </p:nvSpPr>
+        <p:spPr>
+          <a:xfrm>
+            <a:off x="3246120" y="4041647"/>
+            <a:ext cx="2468880" cy="292608"/>
+          </a:xfrm>
+          <a:prstGeom prst="rect">
+            <a:avLst/>
+          </a:prstGeom>
+          <a:noFill/>
+        </p:spPr>
+        <p:txBody>
+          <a:bodyPr wrap="square" lIns="36576" rIns="36576" tIns="36576" bIns="36576" anchor="t">
+            <a:spAutoFit/>
+          </a:bodyPr>
+          <a:lstStyle/>
+          <a:p>
+            <a:pPr algn="l">
+              <a:defRPr sz="1300" b="0">
                 <a:solidFill>
                   <a:srgbClr val="17343A"/>
                 </a:solidFill>
@@ -10638,15 +12799,71 @@
               </a:defRPr>
             </a:pPr>
             <a:r>
-              <a:t>•  Horários previsto e realizado</a:t>
-            </a:r>
-          </a:p>
-          <a:p>
-            <a:pPr>
-              <a:spcAft>
-                <a:spcPts val="1100"/>
-              </a:spcAft>
-              <a:defRPr sz="1500">
+              <a:t>% · pontualidade geral</a:t>
+            </a:r>
+          </a:p>
+        </p:txBody>
+      </p:sp>
+      <p:sp>
+        <p:nvSpPr>
+          <p:cNvPr id="35" name="TextBox 34"/>
+          <p:cNvSpPr txBox="1"/>
+          <p:nvPr/>
+        </p:nvSpPr>
+        <p:spPr>
+          <a:xfrm>
+            <a:off x="950976" y="4590288"/>
+            <a:ext cx="2148840" cy="310896"/>
+          </a:xfrm>
+          <a:prstGeom prst="rect">
+            <a:avLst/>
+          </a:prstGeom>
+          <a:noFill/>
+        </p:spPr>
+        <p:txBody>
+          <a:bodyPr wrap="square" lIns="36576" rIns="36576" tIns="36576" bIns="36576" anchor="t">
+            <a:spAutoFit/>
+          </a:bodyPr>
+          <a:lstStyle/>
+          <a:p>
+            <a:pPr algn="r">
+              <a:defRPr sz="1600" b="1">
+                <a:solidFill>
+                  <a:srgbClr val="F06449"/>
+                </a:solidFill>
+                <a:latin typeface="Noto Sans"/>
+              </a:defRPr>
+            </a:pPr>
+            <a:r>
+              <a:t>Intacta</a:t>
+            </a:r>
+          </a:p>
+        </p:txBody>
+      </p:sp>
+      <p:sp>
+        <p:nvSpPr>
+          <p:cNvPr id="36" name="TextBox 35"/>
+          <p:cNvSpPr txBox="1"/>
+          <p:nvPr/>
+        </p:nvSpPr>
+        <p:spPr>
+          <a:xfrm>
+            <a:off x="3246120" y="4608575"/>
+            <a:ext cx="2468880" cy="292608"/>
+          </a:xfrm>
+          <a:prstGeom prst="rect">
+            <a:avLst/>
+          </a:prstGeom>
+          <a:noFill/>
+        </p:spPr>
+        <p:txBody>
+          <a:bodyPr wrap="square" lIns="36576" rIns="36576" tIns="36576" bIns="36576" anchor="t">
+            <a:spAutoFit/>
+          </a:bodyPr>
+          <a:lstStyle/>
+          <a:p>
+            <a:pPr algn="l">
+              <a:defRPr sz="1300" b="0">
                 <a:solidFill>
                   <a:srgbClr val="17343A"/>
                 </a:solidFill>
@@ -10654,30 +12871,50 @@
               </a:defRPr>
             </a:pPr>
             <a:r>
-              <a:t>•  Atraso, passageiros e chuva</a:t>
-            </a:r>
-          </a:p>
-          <a:p>
-            <a:pPr>
-              <a:spcAft>
-                <a:spcPts val="1100"/>
-              </a:spcAft>
-              <a:defRPr sz="1500">
+              <a:t>ruptura de R03/R05 em 06/04</a:t>
+            </a:r>
+          </a:p>
+        </p:txBody>
+      </p:sp>
+      <p:sp>
+        <p:nvSpPr>
+          <p:cNvPr id="37" name="TextBox 36"/>
+          <p:cNvSpPr txBox="1"/>
+          <p:nvPr/>
+        </p:nvSpPr>
+        <p:spPr>
+          <a:xfrm>
+            <a:off x="950976" y="5138928"/>
+            <a:ext cx="4617720" cy="640080"/>
+          </a:xfrm>
+          <a:prstGeom prst="rect">
+            <a:avLst/>
+          </a:prstGeom>
+          <a:noFill/>
+        </p:spPr>
+        <p:txBody>
+          <a:bodyPr wrap="square" lIns="36576" rIns="36576" tIns="36576" bIns="36576" anchor="t">
+            <a:spAutoFit/>
+          </a:bodyPr>
+          <a:lstStyle/>
+          <a:p>
+            <a:pPr algn="l">
+              <a:defRPr sz="1150" b="1">
                 <a:solidFill>
-                  <a:srgbClr val="17343A"/>
+                  <a:srgbClr val="005A67"/>
                 </a:solidFill>
                 <a:latin typeface="Noto Sans"/>
               </a:defRPr>
             </a:pPr>
             <a:r>
-              <a:t>•  Ocorrência registrada pelo motorista</a:t>
-            </a:r>
-          </a:p>
-        </p:txBody>
-      </p:sp>
-      <p:sp>
-        <p:nvSpPr>
-          <p:cNvPr id="32" name="Rounded Rectangle 31"/>
+              <a:t>A média caiu porque seis atrasos de mais de 700 minutos saíram do cálculo. A conclusão principal sobrevive à limpeza.</a:t>
+            </a:r>
+          </a:p>
+        </p:txBody>
+      </p:sp>
+      <p:sp>
+        <p:nvSpPr>
+          <p:cNvPr id="38" name="Rounded Rectangle 37"/>
           <p:cNvSpPr/>
           <p:nvPr/>
         </p:nvSpPr>
@@ -10720,7 +12957,7 @@
       </p:sp>
       <p:sp>
         <p:nvSpPr>
-          <p:cNvPr id="33" name="TextBox 32"/>
+          <p:cNvPr id="39" name="TextBox 38"/>
           <p:cNvSpPr txBox="1"/>
           <p:nvPr/>
         </p:nvSpPr>
@@ -10756,7 +12993,7 @@
       </p:sp>
       <p:sp>
         <p:nvSpPr>
-          <p:cNvPr id="34" name="TextBox 33"/>
+          <p:cNvPr id="40" name="TextBox 39"/>
           <p:cNvSpPr txBox="1"/>
           <p:nvPr/>
         </p:nvSpPr>
@@ -10792,7 +13029,7 @@
       </p:sp>
       <p:sp>
         <p:nvSpPr>
-          <p:cNvPr id="35" name="TextBox 34"/>
+          <p:cNvPr id="41" name="TextBox 40"/>
           <p:cNvSpPr txBox="1"/>
           <p:nvPr/>
         </p:nvSpPr>
@@ -10828,7 +13065,7 @@
       </p:sp>
       <p:sp>
         <p:nvSpPr>
-          <p:cNvPr id="36" name="TextBox 35"/>
+          <p:cNvPr id="42" name="TextBox 41"/>
           <p:cNvSpPr txBox="1"/>
           <p:nvPr/>
         </p:nvSpPr>
@@ -10864,7 +13101,7 @@
       </p:sp>
       <p:sp>
         <p:nvSpPr>
-          <p:cNvPr id="37" name="TextBox 36"/>
+          <p:cNvPr id="43" name="TextBox 42"/>
           <p:cNvSpPr txBox="1"/>
           <p:nvPr/>
         </p:nvSpPr>
@@ -10900,7 +13137,7 @@
       </p:sp>
       <p:sp>
         <p:nvSpPr>
-          <p:cNvPr id="38" name="TextBox 37"/>
+          <p:cNvPr id="44" name="TextBox 43"/>
           <p:cNvSpPr txBox="1"/>
           <p:nvPr/>
         </p:nvSpPr>
@@ -10936,7 +13173,7 @@
       </p:sp>
       <p:sp>
         <p:nvSpPr>
-          <p:cNvPr id="39" name="TextBox 38"/>
+          <p:cNvPr id="45" name="TextBox 44"/>
           <p:cNvSpPr txBox="1"/>
           <p:nvPr/>
         </p:nvSpPr>
@@ -10972,7 +13209,7 @@
       </p:sp>
       <p:sp>
         <p:nvSpPr>
-          <p:cNvPr id="40" name="TextBox 39"/>
+          <p:cNvPr id="46" name="TextBox 45"/>
           <p:cNvSpPr txBox="1"/>
           <p:nvPr/>
         </p:nvSpPr>
@@ -11008,7 +13245,7 @@
       </p:sp>
       <p:sp>
         <p:nvSpPr>
-          <p:cNvPr id="41" name="TextBox 40"/>
+          <p:cNvPr id="47" name="TextBox 46"/>
           <p:cNvSpPr txBox="1"/>
           <p:nvPr/>
         </p:nvSpPr>
@@ -11044,7 +13281,7 @@
       </p:sp>
       <p:sp>
         <p:nvSpPr>
-          <p:cNvPr id="42" name="TextBox 41"/>
+          <p:cNvPr id="48" name="TextBox 47"/>
           <p:cNvSpPr txBox="1"/>
           <p:nvPr/>
         </p:nvSpPr>
@@ -11080,7 +13317,7 @@
       </p:sp>
       <p:sp>
         <p:nvSpPr>
-          <p:cNvPr id="43" name="Rounded Rectangle 42"/>
+          <p:cNvPr id="49" name="Rounded Rectangle 48"/>
           <p:cNvSpPr/>
           <p:nvPr/>
         </p:nvSpPr>
@@ -11125,7 +13362,7 @@
       </p:sp>
       <p:sp>
         <p:nvSpPr>
-          <p:cNvPr id="44" name="TextBox 43"/>
+          <p:cNvPr id="50" name="TextBox 49"/>
           <p:cNvSpPr txBox="1"/>
           <p:nvPr/>
         </p:nvSpPr>
@@ -11154,7 +13391,7 @@
               </a:defRPr>
             </a:pPr>
             <a:r>
-              <a:t>5/9</a:t>
+              <a:t>7/9</a:t>
             </a:r>
           </a:p>
         </p:txBody>
@@ -11167,7 +13404,7 @@
 </p:sld>
 </file>
 
-<file path=ppt/slides/slide6.xml><?xml version="1.0" encoding="utf-8"?>
+<file path=ppt/slides/slide8.xml><?xml version="1.0" encoding="utf-8"?>
 <p:sld xmlns:a="http://schemas.openxmlformats.org/drawingml/2006/main" xmlns:p="http://schemas.openxmlformats.org/presentationml/2006/main" xmlns:r="http://schemas.openxmlformats.org/officeDocument/2006/relationships">
   <p:cSld>
     <p:bg>
@@ -11801,7 +14038,7 @@
               </a:defRPr>
             </a:pPr>
             <a:r>
-              <a:t>05</a:t>
+              <a:t>07</a:t>
             </a:r>
           </a:p>
         </p:txBody>
@@ -11837,14 +14074,14 @@
               </a:defRPr>
             </a:pPr>
             <a:r>
-              <a:t>Resultado Principal</a:t>
+              <a:t>Ato 3 · A explicação mais plausível</a:t>
             </a:r>
           </a:p>
         </p:txBody>
       </p:sp>
       <p:pic>
         <p:nvPicPr>
-          <p:cNvPr id="17" name="Picture 16" descr="01_serie_rotas.png"/>
+          <p:cNvPr id="17" name="Picture 16" descr="06_exploratorio_explicativo.png"/>
           <p:cNvPicPr>
             <a:picLocks noChangeAspect="1"/>
           </p:cNvPicPr>
@@ -11858,8 +14095,8 @@
         </p:blipFill>
         <p:spPr>
           <a:xfrm>
-            <a:off x="502920" y="1435546"/>
-            <a:ext cx="8092440" cy="4434963"/>
+            <a:off x="903585" y="960120"/>
+            <a:ext cx="10354349" cy="4160520"/>
           </a:xfrm>
           <a:prstGeom prst="rect">
             <a:avLst/>
@@ -11874,14 +14111,14 @@
         </p:nvSpPr>
         <p:spPr>
           <a:xfrm>
-            <a:off x="8796528" y="1216152"/>
-            <a:ext cx="2788920" cy="1261872"/>
+            <a:off x="713232" y="5285232"/>
+            <a:ext cx="10744200" cy="1024128"/>
           </a:xfrm>
           <a:prstGeom prst="roundRect">
             <a:avLst/>
           </a:prstGeom>
           <a:solidFill>
-            <a:srgbClr val="F06449"/>
+            <a:srgbClr val="005A67"/>
           </a:solidFill>
           <a:ln>
             <a:noFill/>
@@ -11917,8 +14154,8 @@
         </p:nvSpPr>
         <p:spPr>
           <a:xfrm>
-            <a:off x="8997696" y="1426464"/>
-            <a:ext cx="2359152" cy="438912"/>
+            <a:off x="1005840" y="5468112"/>
+            <a:ext cx="10149840" cy="694944"/>
           </a:xfrm>
           <a:prstGeom prst="rect">
             <a:avLst/>
@@ -11932,288 +14169,22 @@
           <a:lstStyle/>
           <a:p>
             <a:pPr algn="ctr">
-              <a:defRPr sz="2800" b="1">
+              <a:defRPr sz="1650" b="1">
                 <a:solidFill>
-                  <a:srgbClr val="17343A"/>
+                  <a:srgbClr val="FFF8E8"/>
                 </a:solidFill>
                 <a:latin typeface="Noto Sans"/>
               </a:defRPr>
             </a:pPr>
             <a:r>
-              <a:t>06/04</a:t>
-            </a:r>
-          </a:p>
-        </p:txBody>
-      </p:sp>
-      <p:sp>
-        <p:nvSpPr>
-          <p:cNvPr id="20" name="TextBox 19"/>
-          <p:cNvSpPr txBox="1"/>
-          <p:nvPr/>
-        </p:nvSpPr>
-        <p:spPr>
-          <a:xfrm>
-            <a:off x="8997696" y="1911095"/>
-            <a:ext cx="2359152" cy="256032"/>
-          </a:xfrm>
-          <a:prstGeom prst="rect">
-            <a:avLst/>
-          </a:prstGeom>
-          <a:noFill/>
-        </p:spPr>
-        <p:txBody>
-          <a:bodyPr wrap="square" lIns="36576" rIns="36576" tIns="36576" bIns="36576" anchor="t">
-            <a:spAutoFit/>
-          </a:bodyPr>
-          <a:lstStyle/>
-          <a:p>
-            <a:pPr algn="ctr">
-              <a:defRPr sz="1200" b="0">
-                <a:solidFill>
-                  <a:srgbClr val="17343A"/>
-                </a:solidFill>
-                <a:latin typeface="Noto Sans"/>
-              </a:defRPr>
-            </a:pPr>
-            <a:r>
-              <a:t>Início da ruptura</a:t>
-            </a:r>
-          </a:p>
-        </p:txBody>
-      </p:sp>
-      <p:sp>
-        <p:nvSpPr>
-          <p:cNvPr id="21" name="Rounded Rectangle 20"/>
-          <p:cNvSpPr/>
-          <p:nvPr/>
-        </p:nvSpPr>
-        <p:spPr>
-          <a:xfrm>
-            <a:off x="8796528" y="2761488"/>
-            <a:ext cx="2788920" cy="1261872"/>
-          </a:xfrm>
-          <a:prstGeom prst="roundRect">
-            <a:avLst/>
-          </a:prstGeom>
-          <a:solidFill>
-            <a:srgbClr val="65C3A5"/>
-          </a:solidFill>
-          <a:ln>
-            <a:noFill/>
-          </a:ln>
-        </p:spPr>
-        <p:style>
-          <a:lnRef idx="1">
-            <a:schemeClr val="accent1"/>
-          </a:lnRef>
-          <a:fillRef idx="3">
-            <a:schemeClr val="accent1"/>
-          </a:fillRef>
-          <a:effectRef idx="2">
-            <a:schemeClr val="accent1"/>
-          </a:effectRef>
-          <a:fontRef idx="minor">
-            <a:schemeClr val="lt1"/>
-          </a:fontRef>
-        </p:style>
-        <p:txBody>
-          <a:bodyPr rtlCol="0" anchor="ctr"/>
-          <a:lstStyle/>
-          <a:p>
-            <a:pPr algn="ctr"/>
-          </a:p>
-        </p:txBody>
-      </p:sp>
-      <p:sp>
-        <p:nvSpPr>
-          <p:cNvPr id="22" name="TextBox 21"/>
-          <p:cNvSpPr txBox="1"/>
-          <p:nvPr/>
-        </p:nvSpPr>
-        <p:spPr>
-          <a:xfrm>
-            <a:off x="8997696" y="2962656"/>
-            <a:ext cx="2359152" cy="438912"/>
-          </a:xfrm>
-          <a:prstGeom prst="rect">
-            <a:avLst/>
-          </a:prstGeom>
-          <a:noFill/>
-        </p:spPr>
-        <p:txBody>
-          <a:bodyPr wrap="square" lIns="36576" rIns="36576" tIns="36576" bIns="36576" anchor="t">
-            <a:spAutoFit/>
-          </a:bodyPr>
-          <a:lstStyle/>
-          <a:p>
-            <a:pPr algn="ctr">
-              <a:defRPr sz="2800" b="1">
-                <a:solidFill>
-                  <a:srgbClr val="005A67"/>
-                </a:solidFill>
-                <a:latin typeface="Noto Sans"/>
-              </a:defRPr>
-            </a:pPr>
-            <a:r>
-              <a:t>19%</a:t>
-            </a:r>
-          </a:p>
-        </p:txBody>
-      </p:sp>
-      <p:sp>
-        <p:nvSpPr>
-          <p:cNvPr id="23" name="TextBox 22"/>
-          <p:cNvSpPr txBox="1"/>
-          <p:nvPr/>
-        </p:nvSpPr>
-        <p:spPr>
-          <a:xfrm>
-            <a:off x="8924544" y="3465576"/>
-            <a:ext cx="2487168" cy="256032"/>
-          </a:xfrm>
-          <a:prstGeom prst="rect">
-            <a:avLst/>
-          </a:prstGeom>
-          <a:noFill/>
-        </p:spPr>
-        <p:txBody>
-          <a:bodyPr wrap="square" lIns="36576" rIns="36576" tIns="36576" bIns="36576" anchor="t">
-            <a:spAutoFit/>
-          </a:bodyPr>
-          <a:lstStyle/>
-          <a:p>
-            <a:pPr algn="ctr">
-              <a:defRPr sz="1150" b="0">
-                <a:solidFill>
-                  <a:srgbClr val="005A67"/>
-                </a:solidFill>
-                <a:latin typeface="Noto Sans"/>
-              </a:defRPr>
-            </a:pPr>
-            <a:r>
-              <a:t>Pontualidade R03/R05 · Dia</a:t>
-            </a:r>
-          </a:p>
-        </p:txBody>
-      </p:sp>
-      <p:sp>
-        <p:nvSpPr>
-          <p:cNvPr id="24" name="Rounded Rectangle 23"/>
-          <p:cNvSpPr/>
-          <p:nvPr/>
-        </p:nvSpPr>
-        <p:spPr>
-          <a:xfrm>
-            <a:off x="8796528" y="4315968"/>
-            <a:ext cx="2788920" cy="1261872"/>
-          </a:xfrm>
-          <a:prstGeom prst="roundRect">
-            <a:avLst/>
-          </a:prstGeom>
-          <a:solidFill>
-            <a:srgbClr val="F6BD38"/>
-          </a:solidFill>
-          <a:ln>
-            <a:noFill/>
-          </a:ln>
-        </p:spPr>
-        <p:style>
-          <a:lnRef idx="1">
-            <a:schemeClr val="accent1"/>
-          </a:lnRef>
-          <a:fillRef idx="3">
-            <a:schemeClr val="accent1"/>
-          </a:fillRef>
-          <a:effectRef idx="2">
-            <a:schemeClr val="accent1"/>
-          </a:effectRef>
-          <a:fontRef idx="minor">
-            <a:schemeClr val="lt1"/>
-          </a:fontRef>
-        </p:style>
-        <p:txBody>
-          <a:bodyPr rtlCol="0" anchor="ctr"/>
-          <a:lstStyle/>
-          <a:p>
-            <a:pPr algn="ctr"/>
-          </a:p>
-        </p:txBody>
-      </p:sp>
-      <p:sp>
-        <p:nvSpPr>
-          <p:cNvPr id="25" name="TextBox 24"/>
-          <p:cNvSpPr txBox="1"/>
-          <p:nvPr/>
-        </p:nvSpPr>
-        <p:spPr>
-          <a:xfrm>
-            <a:off x="8997696" y="4526280"/>
-            <a:ext cx="2359152" cy="438912"/>
-          </a:xfrm>
-          <a:prstGeom prst="rect">
-            <a:avLst/>
-          </a:prstGeom>
-          <a:noFill/>
-        </p:spPr>
-        <p:txBody>
-          <a:bodyPr wrap="square" lIns="36576" rIns="36576" tIns="36576" bIns="36576" anchor="t">
-            <a:spAutoFit/>
-          </a:bodyPr>
-          <a:lstStyle/>
-          <a:p>
-            <a:pPr algn="ctr">
-              <a:defRPr sz="2800" b="1">
-                <a:solidFill>
-                  <a:srgbClr val="005A67"/>
-                </a:solidFill>
-                <a:latin typeface="Noto Sans"/>
-              </a:defRPr>
-            </a:pPr>
-            <a:r>
-              <a:t>12 min</a:t>
-            </a:r>
-          </a:p>
-        </p:txBody>
-      </p:sp>
-      <p:sp>
-        <p:nvSpPr>
-          <p:cNvPr id="26" name="TextBox 25"/>
-          <p:cNvSpPr txBox="1"/>
-          <p:nvPr/>
-        </p:nvSpPr>
-        <p:spPr>
-          <a:xfrm>
-            <a:off x="8997696" y="5020056"/>
-            <a:ext cx="2359152" cy="256032"/>
-          </a:xfrm>
-          <a:prstGeom prst="rect">
-            <a:avLst/>
-          </a:prstGeom>
-          <a:noFill/>
-        </p:spPr>
-        <p:txBody>
-          <a:bodyPr wrap="square" lIns="36576" rIns="36576" tIns="36576" bIns="36576" anchor="t">
-            <a:spAutoFit/>
-          </a:bodyPr>
-          <a:lstStyle/>
-          <a:p>
-            <a:pPr algn="ctr">
-              <a:defRPr sz="1200" b="0">
-                <a:solidFill>
-                  <a:srgbClr val="005A67"/>
-                </a:solidFill>
-                <a:latin typeface="Noto Sans"/>
-              </a:defRPr>
-            </a:pPr>
-            <a:r>
-              <a:t>Mediana de atraso</a:t>
-            </a:r>
-          </a:p>
-        </p:txBody>
-      </p:sp>
-      <p:sp>
-        <p:nvSpPr>
-          <p:cNvPr id="27" name="Rounded Rectangle 26"/>
+              <a:t>A pontualidade de R03 e R05 caiu nos turnos diurnos desde 6 de abril; obras no corredor são a explicação mais plausível, a confirmar com GPS e cronogramas.</a:t>
+            </a:r>
+          </a:p>
+        </p:txBody>
+      </p:sp>
+      <p:sp>
+        <p:nvSpPr>
+          <p:cNvPr id="20" name="Rounded Rectangle 19"/>
           <p:cNvSpPr/>
           <p:nvPr/>
         </p:nvSpPr>
@@ -12258,7 +14229,7 @@
       </p:sp>
       <p:sp>
         <p:nvSpPr>
-          <p:cNvPr id="28" name="TextBox 27"/>
+          <p:cNvPr id="21" name="TextBox 20"/>
           <p:cNvSpPr txBox="1"/>
           <p:nvPr/>
         </p:nvSpPr>
@@ -12287,7 +14258,7 @@
               </a:defRPr>
             </a:pPr>
             <a:r>
-              <a:t>6/9</a:t>
+              <a:t>8/9</a:t>
             </a:r>
           </a:p>
         </p:txBody>
@@ -12300,1219 +14271,7 @@
 </p:sld>
 </file>
 
-<file path=ppt/slides/slide7.xml><?xml version="1.0" encoding="utf-8"?>
-<p:sld xmlns:a="http://schemas.openxmlformats.org/drawingml/2006/main" xmlns:p="http://schemas.openxmlformats.org/presentationml/2006/main" xmlns:r="http://schemas.openxmlformats.org/officeDocument/2006/relationships">
-  <p:cSld>
-    <p:bg>
-      <p:bgPr>
-        <a:solidFill>
-          <a:srgbClr val="F6BD38"/>
-        </a:solidFill>
-        <a:effectLst/>
-      </p:bgPr>
-    </p:bg>
-    <p:spTree>
-      <p:nvGrpSpPr>
-        <p:cNvPr id="1" name=""/>
-        <p:cNvGrpSpPr/>
-        <p:nvPr/>
-      </p:nvGrpSpPr>
-      <p:grpSpPr/>
-      <p:sp>
-        <p:nvSpPr>
-          <p:cNvPr id="2" name="Oval 1"/>
-          <p:cNvSpPr/>
-          <p:nvPr/>
-        </p:nvSpPr>
-        <p:spPr>
-          <a:xfrm>
-            <a:off x="-201168" y="-182880"/>
-            <a:ext cx="676656" cy="676656"/>
-          </a:xfrm>
-          <a:prstGeom prst="ellipse">
-            <a:avLst/>
-          </a:prstGeom>
-          <a:solidFill>
-            <a:srgbClr val="F6BD38">
-              <a:alpha val="20000"/>
-            </a:srgbClr>
-          </a:solidFill>
-          <a:ln>
-            <a:noFill/>
-          </a:ln>
-        </p:spPr>
-        <p:style>
-          <a:lnRef idx="1">
-            <a:schemeClr val="accent1"/>
-          </a:lnRef>
-          <a:fillRef idx="3">
-            <a:schemeClr val="accent1"/>
-          </a:fillRef>
-          <a:effectRef idx="2">
-            <a:schemeClr val="accent1"/>
-          </a:effectRef>
-          <a:fontRef idx="minor">
-            <a:schemeClr val="lt1"/>
-          </a:fontRef>
-        </p:style>
-        <p:txBody>
-          <a:bodyPr rtlCol="0" anchor="ctr"/>
-          <a:lstStyle/>
-          <a:p>
-            <a:pPr algn="ctr"/>
-          </a:p>
-        </p:txBody>
-      </p:sp>
-      <p:sp>
-        <p:nvSpPr>
-          <p:cNvPr id="3" name="Arc 2"/>
-          <p:cNvSpPr/>
-          <p:nvPr/>
-        </p:nvSpPr>
-        <p:spPr>
-          <a:xfrm>
-            <a:off x="11338560" y="-164592"/>
-            <a:ext cx="868680" cy="868680"/>
-          </a:xfrm>
-          <a:prstGeom prst="arc">
-            <a:avLst/>
-          </a:prstGeom>
-          <a:solidFill>
-            <a:srgbClr val="37A9E8">
-              <a:alpha val="20000"/>
-            </a:srgbClr>
-          </a:solidFill>
-          <a:ln>
-            <a:noFill/>
-          </a:ln>
-        </p:spPr>
-        <p:style>
-          <a:lnRef idx="1">
-            <a:schemeClr val="accent1"/>
-          </a:lnRef>
-          <a:fillRef idx="3">
-            <a:schemeClr val="accent1"/>
-          </a:fillRef>
-          <a:effectRef idx="2">
-            <a:schemeClr val="accent1"/>
-          </a:effectRef>
-          <a:fontRef idx="minor">
-            <a:schemeClr val="lt1"/>
-          </a:fontRef>
-        </p:style>
-        <p:txBody>
-          <a:bodyPr rtlCol="0" anchor="ctr"/>
-          <a:lstStyle/>
-          <a:p>
-            <a:pPr algn="ctr"/>
-          </a:p>
-        </p:txBody>
-      </p:sp>
-      <p:sp>
-        <p:nvSpPr>
-          <p:cNvPr id="4" name="8-Point Star 3"/>
-          <p:cNvSpPr/>
-          <p:nvPr/>
-        </p:nvSpPr>
-        <p:spPr>
-          <a:xfrm>
-            <a:off x="11411712" y="6053328"/>
-            <a:ext cx="640080" cy="640080"/>
-          </a:xfrm>
-          <a:prstGeom prst="star8">
-            <a:avLst/>
-          </a:prstGeom>
-          <a:solidFill>
-            <a:srgbClr val="F06449">
-              <a:alpha val="20000"/>
-            </a:srgbClr>
-          </a:solidFill>
-          <a:ln>
-            <a:noFill/>
-          </a:ln>
-        </p:spPr>
-        <p:style>
-          <a:lnRef idx="1">
-            <a:schemeClr val="accent1"/>
-          </a:lnRef>
-          <a:fillRef idx="3">
-            <a:schemeClr val="accent1"/>
-          </a:fillRef>
-          <a:effectRef idx="2">
-            <a:schemeClr val="accent1"/>
-          </a:effectRef>
-          <a:fontRef idx="minor">
-            <a:schemeClr val="lt1"/>
-          </a:fontRef>
-        </p:style>
-        <p:txBody>
-          <a:bodyPr rtlCol="0" anchor="ctr"/>
-          <a:lstStyle/>
-          <a:p>
-            <a:pPr algn="ctr"/>
-          </a:p>
-        </p:txBody>
-      </p:sp>
-      <p:sp>
-        <p:nvSpPr>
-          <p:cNvPr id="5" name="Moon 4"/>
-          <p:cNvSpPr/>
-          <p:nvPr/>
-        </p:nvSpPr>
-        <p:spPr>
-          <a:xfrm>
-            <a:off x="-219456" y="5989320"/>
-            <a:ext cx="658368" cy="658368"/>
-          </a:xfrm>
-          <a:prstGeom prst="moon">
-            <a:avLst/>
-          </a:prstGeom>
-          <a:solidFill>
-            <a:srgbClr val="005A67">
-              <a:alpha val="20000"/>
-            </a:srgbClr>
-          </a:solidFill>
-          <a:ln>
-            <a:noFill/>
-          </a:ln>
-        </p:spPr>
-        <p:style>
-          <a:lnRef idx="1">
-            <a:schemeClr val="accent1"/>
-          </a:lnRef>
-          <a:fillRef idx="3">
-            <a:schemeClr val="accent1"/>
-          </a:fillRef>
-          <a:effectRef idx="2">
-            <a:schemeClr val="accent1"/>
-          </a:effectRef>
-          <a:fontRef idx="minor">
-            <a:schemeClr val="lt1"/>
-          </a:fontRef>
-        </p:style>
-        <p:txBody>
-          <a:bodyPr rtlCol="0" anchor="ctr"/>
-          <a:lstStyle/>
-          <a:p>
-            <a:pPr algn="ctr"/>
-          </a:p>
-        </p:txBody>
-      </p:sp>
-      <p:sp>
-        <p:nvSpPr>
-          <p:cNvPr id="6" name="Oval 5"/>
-          <p:cNvSpPr/>
-          <p:nvPr/>
-        </p:nvSpPr>
-        <p:spPr>
-          <a:xfrm>
-            <a:off x="9921240" y="841248"/>
-            <a:ext cx="1143000" cy="1143000"/>
-          </a:xfrm>
-          <a:prstGeom prst="ellipse">
-            <a:avLst/>
-          </a:prstGeom>
-          <a:solidFill>
-            <a:srgbClr val="F6BD38">
-              <a:alpha val="20000"/>
-            </a:srgbClr>
-          </a:solidFill>
-          <a:ln>
-            <a:noFill/>
-          </a:ln>
-        </p:spPr>
-        <p:style>
-          <a:lnRef idx="1">
-            <a:schemeClr val="accent1"/>
-          </a:lnRef>
-          <a:fillRef idx="3">
-            <a:schemeClr val="accent1"/>
-          </a:fillRef>
-          <a:effectRef idx="2">
-            <a:schemeClr val="accent1"/>
-          </a:effectRef>
-          <a:fontRef idx="minor">
-            <a:schemeClr val="lt1"/>
-          </a:fontRef>
-        </p:style>
-        <p:txBody>
-          <a:bodyPr rtlCol="0" anchor="ctr"/>
-          <a:lstStyle/>
-          <a:p>
-            <a:pPr algn="ctr"/>
-          </a:p>
-        </p:txBody>
-      </p:sp>
-      <p:sp>
-        <p:nvSpPr>
-          <p:cNvPr id="7" name="Rectangle 6"/>
-          <p:cNvSpPr/>
-          <p:nvPr/>
-        </p:nvSpPr>
-        <p:spPr>
-          <a:xfrm>
-            <a:off x="10451592" y="1033271"/>
-            <a:ext cx="82296" cy="438912"/>
-          </a:xfrm>
-          <a:prstGeom prst="rect">
-            <a:avLst/>
-          </a:prstGeom>
-          <a:solidFill>
-            <a:srgbClr val="17343A">
-              <a:alpha val="20000"/>
-            </a:srgbClr>
-          </a:solidFill>
-          <a:ln>
-            <a:noFill/>
-          </a:ln>
-        </p:spPr>
-        <p:style>
-          <a:lnRef idx="1">
-            <a:schemeClr val="accent1"/>
-          </a:lnRef>
-          <a:fillRef idx="3">
-            <a:schemeClr val="accent1"/>
-          </a:fillRef>
-          <a:effectRef idx="2">
-            <a:schemeClr val="accent1"/>
-          </a:effectRef>
-          <a:fontRef idx="minor">
-            <a:schemeClr val="lt1"/>
-          </a:fontRef>
-        </p:style>
-        <p:txBody>
-          <a:bodyPr rtlCol="0" anchor="ctr"/>
-          <a:lstStyle/>
-          <a:p>
-            <a:pPr algn="ctr"/>
-          </a:p>
-        </p:txBody>
-      </p:sp>
-      <p:sp>
-        <p:nvSpPr>
-          <p:cNvPr id="8" name="Rectangle 7"/>
-          <p:cNvSpPr/>
-          <p:nvPr/>
-        </p:nvSpPr>
-        <p:spPr>
-          <a:xfrm rot="1200000">
-            <a:off x="10469880" y="1371600"/>
-            <a:ext cx="329184" cy="82296"/>
-          </a:xfrm>
-          <a:prstGeom prst="rect">
-            <a:avLst/>
-          </a:prstGeom>
-          <a:solidFill>
-            <a:srgbClr val="17343A">
-              <a:alpha val="20000"/>
-            </a:srgbClr>
-          </a:solidFill>
-          <a:ln>
-            <a:noFill/>
-          </a:ln>
-        </p:spPr>
-        <p:style>
-          <a:lnRef idx="1">
-            <a:schemeClr val="accent1"/>
-          </a:lnRef>
-          <a:fillRef idx="3">
-            <a:schemeClr val="accent1"/>
-          </a:fillRef>
-          <a:effectRef idx="2">
-            <a:schemeClr val="accent1"/>
-          </a:effectRef>
-          <a:fontRef idx="minor">
-            <a:schemeClr val="lt1"/>
-          </a:fontRef>
-        </p:style>
-        <p:txBody>
-          <a:bodyPr rtlCol="0" anchor="ctr"/>
-          <a:lstStyle/>
-          <a:p>
-            <a:pPr algn="ctr"/>
-          </a:p>
-        </p:txBody>
-      </p:sp>
-      <p:sp>
-        <p:nvSpPr>
-          <p:cNvPr id="9" name="Teardrop 8"/>
-          <p:cNvSpPr/>
-          <p:nvPr/>
-        </p:nvSpPr>
-        <p:spPr>
-          <a:xfrm rot="1200000">
-            <a:off x="1874519" y="5349240"/>
-            <a:ext cx="384048" cy="530352"/>
-          </a:xfrm>
-          <a:prstGeom prst="teardrop">
-            <a:avLst/>
-          </a:prstGeom>
-          <a:solidFill>
-            <a:srgbClr val="37A9E8">
-              <a:alpha val="20000"/>
-            </a:srgbClr>
-          </a:solidFill>
-          <a:ln>
-            <a:noFill/>
-          </a:ln>
-        </p:spPr>
-        <p:style>
-          <a:lnRef idx="1">
-            <a:schemeClr val="accent1"/>
-          </a:lnRef>
-          <a:fillRef idx="3">
-            <a:schemeClr val="accent1"/>
-          </a:fillRef>
-          <a:effectRef idx="2">
-            <a:schemeClr val="accent1"/>
-          </a:effectRef>
-          <a:fontRef idx="minor">
-            <a:schemeClr val="lt1"/>
-          </a:fontRef>
-        </p:style>
-        <p:txBody>
-          <a:bodyPr rtlCol="0" anchor="ctr"/>
-          <a:lstStyle/>
-          <a:p>
-            <a:pPr algn="ctr"/>
-          </a:p>
-        </p:txBody>
-      </p:sp>
-      <p:sp>
-        <p:nvSpPr>
-          <p:cNvPr id="10" name="Teardrop 9"/>
-          <p:cNvSpPr/>
-          <p:nvPr/>
-        </p:nvSpPr>
-        <p:spPr>
-          <a:xfrm rot="1200000">
-            <a:off x="2331720" y="5696712"/>
-            <a:ext cx="301752" cy="420624"/>
-          </a:xfrm>
-          <a:prstGeom prst="teardrop">
-            <a:avLst/>
-          </a:prstGeom>
-          <a:solidFill>
-            <a:srgbClr val="37A9E8">
-              <a:alpha val="20000"/>
-            </a:srgbClr>
-          </a:solidFill>
-          <a:ln>
-            <a:noFill/>
-          </a:ln>
-        </p:spPr>
-        <p:style>
-          <a:lnRef idx="1">
-            <a:schemeClr val="accent1"/>
-          </a:lnRef>
-          <a:fillRef idx="3">
-            <a:schemeClr val="accent1"/>
-          </a:fillRef>
-          <a:effectRef idx="2">
-            <a:schemeClr val="accent1"/>
-          </a:effectRef>
-          <a:fontRef idx="minor">
-            <a:schemeClr val="lt1"/>
-          </a:fontRef>
-        </p:style>
-        <p:txBody>
-          <a:bodyPr rtlCol="0" anchor="ctr"/>
-          <a:lstStyle/>
-          <a:p>
-            <a:pPr algn="ctr"/>
-          </a:p>
-        </p:txBody>
-      </p:sp>
-      <p:sp>
-        <p:nvSpPr>
-          <p:cNvPr id="11" name="Rounded Rectangle 10"/>
-          <p:cNvSpPr/>
-          <p:nvPr/>
-        </p:nvSpPr>
-        <p:spPr>
-          <a:xfrm>
-            <a:off x="9646920" y="5230368"/>
-            <a:ext cx="1664208" cy="859536"/>
-          </a:xfrm>
-          <a:prstGeom prst="roundRect">
-            <a:avLst/>
-          </a:prstGeom>
-          <a:solidFill>
-            <a:srgbClr val="005A67">
-              <a:alpha val="20000"/>
-            </a:srgbClr>
-          </a:solidFill>
-          <a:ln>
-            <a:noFill/>
-          </a:ln>
-        </p:spPr>
-        <p:style>
-          <a:lnRef idx="1">
-            <a:schemeClr val="accent1"/>
-          </a:lnRef>
-          <a:fillRef idx="3">
-            <a:schemeClr val="accent1"/>
-          </a:fillRef>
-          <a:effectRef idx="2">
-            <a:schemeClr val="accent1"/>
-          </a:effectRef>
-          <a:fontRef idx="minor">
-            <a:schemeClr val="lt1"/>
-          </a:fontRef>
-        </p:style>
-        <p:txBody>
-          <a:bodyPr rtlCol="0" anchor="ctr"/>
-          <a:lstStyle/>
-          <a:p>
-            <a:pPr algn="ctr"/>
-          </a:p>
-        </p:txBody>
-      </p:sp>
-      <p:sp>
-        <p:nvSpPr>
-          <p:cNvPr id="12" name="Rectangle 11"/>
-          <p:cNvSpPr/>
-          <p:nvPr/>
-        </p:nvSpPr>
-        <p:spPr>
-          <a:xfrm>
-            <a:off x="9912096" y="5394960"/>
-            <a:ext cx="1115568" cy="301752"/>
-          </a:xfrm>
-          <a:prstGeom prst="rect">
-            <a:avLst/>
-          </a:prstGeom>
-          <a:solidFill>
-            <a:srgbClr val="37A9E8">
-              <a:alpha val="20000"/>
-            </a:srgbClr>
-          </a:solidFill>
-          <a:ln>
-            <a:noFill/>
-          </a:ln>
-        </p:spPr>
-        <p:style>
-          <a:lnRef idx="1">
-            <a:schemeClr val="accent1"/>
-          </a:lnRef>
-          <a:fillRef idx="3">
-            <a:schemeClr val="accent1"/>
-          </a:fillRef>
-          <a:effectRef idx="2">
-            <a:schemeClr val="accent1"/>
-          </a:effectRef>
-          <a:fontRef idx="minor">
-            <a:schemeClr val="lt1"/>
-          </a:fontRef>
-        </p:style>
-        <p:txBody>
-          <a:bodyPr rtlCol="0" anchor="ctr"/>
-          <a:lstStyle/>
-          <a:p>
-            <a:pPr algn="ctr"/>
-          </a:p>
-        </p:txBody>
-      </p:sp>
-      <p:sp>
-        <p:nvSpPr>
-          <p:cNvPr id="13" name="Oval 12"/>
-          <p:cNvSpPr/>
-          <p:nvPr/>
-        </p:nvSpPr>
-        <p:spPr>
-          <a:xfrm>
-            <a:off x="9902952" y="5916168"/>
-            <a:ext cx="283464" cy="283464"/>
-          </a:xfrm>
-          <a:prstGeom prst="ellipse">
-            <a:avLst/>
-          </a:prstGeom>
-          <a:solidFill>
-            <a:srgbClr val="17343A">
-              <a:alpha val="20000"/>
-            </a:srgbClr>
-          </a:solidFill>
-          <a:ln>
-            <a:noFill/>
-          </a:ln>
-        </p:spPr>
-        <p:style>
-          <a:lnRef idx="1">
-            <a:schemeClr val="accent1"/>
-          </a:lnRef>
-          <a:fillRef idx="3">
-            <a:schemeClr val="accent1"/>
-          </a:fillRef>
-          <a:effectRef idx="2">
-            <a:schemeClr val="accent1"/>
-          </a:effectRef>
-          <a:fontRef idx="minor">
-            <a:schemeClr val="lt1"/>
-          </a:fontRef>
-        </p:style>
-        <p:txBody>
-          <a:bodyPr rtlCol="0" anchor="ctr"/>
-          <a:lstStyle/>
-          <a:p>
-            <a:pPr algn="ctr"/>
-          </a:p>
-        </p:txBody>
-      </p:sp>
-      <p:sp>
-        <p:nvSpPr>
-          <p:cNvPr id="14" name="Oval 13"/>
-          <p:cNvSpPr/>
-          <p:nvPr/>
-        </p:nvSpPr>
-        <p:spPr>
-          <a:xfrm>
-            <a:off x="10771632" y="5916168"/>
-            <a:ext cx="283464" cy="283464"/>
-          </a:xfrm>
-          <a:prstGeom prst="ellipse">
-            <a:avLst/>
-          </a:prstGeom>
-          <a:solidFill>
-            <a:srgbClr val="17343A">
-              <a:alpha val="20000"/>
-            </a:srgbClr>
-          </a:solidFill>
-          <a:ln>
-            <a:noFill/>
-          </a:ln>
-        </p:spPr>
-        <p:style>
-          <a:lnRef idx="1">
-            <a:schemeClr val="accent1"/>
-          </a:lnRef>
-          <a:fillRef idx="3">
-            <a:schemeClr val="accent1"/>
-          </a:fillRef>
-          <a:effectRef idx="2">
-            <a:schemeClr val="accent1"/>
-          </a:effectRef>
-          <a:fontRef idx="minor">
-            <a:schemeClr val="lt1"/>
-          </a:fontRef>
-        </p:style>
-        <p:txBody>
-          <a:bodyPr rtlCol="0" anchor="ctr"/>
-          <a:lstStyle/>
-          <a:p>
-            <a:pPr algn="ctr"/>
-          </a:p>
-        </p:txBody>
-      </p:sp>
-      <p:sp>
-        <p:nvSpPr>
-          <p:cNvPr id="15" name="TextBox 14"/>
-          <p:cNvSpPr txBox="1"/>
-          <p:nvPr/>
-        </p:nvSpPr>
-        <p:spPr>
-          <a:xfrm>
-            <a:off x="411480" y="320040"/>
-            <a:ext cx="502920" cy="320040"/>
-          </a:xfrm>
-          <a:prstGeom prst="rect">
-            <a:avLst/>
-          </a:prstGeom>
-          <a:noFill/>
-        </p:spPr>
-        <p:txBody>
-          <a:bodyPr wrap="square" lIns="36576" rIns="36576" tIns="36576" bIns="36576" anchor="t">
-            <a:spAutoFit/>
-          </a:bodyPr>
-          <a:lstStyle/>
-          <a:p>
-            <a:pPr algn="l">
-              <a:defRPr sz="1300" b="1">
-                <a:solidFill>
-                  <a:srgbClr val="005A67"/>
-                </a:solidFill>
-                <a:latin typeface="Noto Sans"/>
-              </a:defRPr>
-            </a:pPr>
-            <a:r>
-              <a:t>06</a:t>
-            </a:r>
-          </a:p>
-        </p:txBody>
-      </p:sp>
-      <p:sp>
-        <p:nvSpPr>
-          <p:cNvPr id="16" name="TextBox 15"/>
-          <p:cNvSpPr txBox="1"/>
-          <p:nvPr/>
-        </p:nvSpPr>
-        <p:spPr>
-          <a:xfrm>
-            <a:off x="804672" y="237744"/>
-            <a:ext cx="10607040" cy="640080"/>
-          </a:xfrm>
-          <a:prstGeom prst="rect">
-            <a:avLst/>
-          </a:prstGeom>
-          <a:noFill/>
-        </p:spPr>
-        <p:txBody>
-          <a:bodyPr wrap="square" lIns="36576" rIns="36576" tIns="36576" bIns="36576" anchor="t">
-            <a:spAutoFit/>
-          </a:bodyPr>
-          <a:lstStyle/>
-          <a:p>
-            <a:pPr algn="l">
-              <a:defRPr sz="2700" b="1">
-                <a:solidFill>
-                  <a:srgbClr val="005A67"/>
-                </a:solidFill>
-                <a:latin typeface="Noto Sans"/>
-              </a:defRPr>
-            </a:pPr>
-            <a:r>
-              <a:t>Evidências e Conclusão</a:t>
-            </a:r>
-          </a:p>
-        </p:txBody>
-      </p:sp>
-      <p:pic>
-        <p:nvPicPr>
-          <p:cNvPr id="17" name="Picture 16" descr="02_heatmap_rota_turno.png"/>
-          <p:cNvPicPr>
-            <a:picLocks noChangeAspect="1"/>
-          </p:cNvPicPr>
-          <p:nvPr/>
-        </p:nvPicPr>
-        <p:blipFill>
-          <a:blip r:embed="rId2"/>
-          <a:stretch>
-            <a:fillRect/>
-          </a:stretch>
-        </p:blipFill>
-        <p:spPr>
-          <a:xfrm>
-            <a:off x="502920" y="1510954"/>
-            <a:ext cx="6016752" cy="4201851"/>
-          </a:xfrm>
-          <a:prstGeom prst="rect">
-            <a:avLst/>
-          </a:prstGeom>
-        </p:spPr>
-      </p:pic>
-      <p:sp>
-        <p:nvSpPr>
-          <p:cNvPr id="18" name="Rounded Rectangle 17"/>
-          <p:cNvSpPr/>
-          <p:nvPr/>
-        </p:nvSpPr>
-        <p:spPr>
-          <a:xfrm>
-            <a:off x="6647688" y="1124712"/>
-            <a:ext cx="4983480" cy="1078992"/>
-          </a:xfrm>
-          <a:prstGeom prst="roundRect">
-            <a:avLst/>
-          </a:prstGeom>
-          <a:solidFill>
-            <a:srgbClr val="37A9E8"/>
-          </a:solidFill>
-          <a:ln>
-            <a:noFill/>
-          </a:ln>
-        </p:spPr>
-        <p:style>
-          <a:lnRef idx="1">
-            <a:schemeClr val="accent1"/>
-          </a:lnRef>
-          <a:fillRef idx="3">
-            <a:schemeClr val="accent1"/>
-          </a:fillRef>
-          <a:effectRef idx="2">
-            <a:schemeClr val="accent1"/>
-          </a:effectRef>
-          <a:fontRef idx="minor">
-            <a:schemeClr val="lt1"/>
-          </a:fontRef>
-        </p:style>
-        <p:txBody>
-          <a:bodyPr rtlCol="0" anchor="ctr"/>
-          <a:lstStyle/>
-          <a:p>
-            <a:pPr algn="ctr"/>
-          </a:p>
-        </p:txBody>
-      </p:sp>
-      <p:sp>
-        <p:nvSpPr>
-          <p:cNvPr id="19" name="TextBox 18"/>
-          <p:cNvSpPr txBox="1"/>
-          <p:nvPr/>
-        </p:nvSpPr>
-        <p:spPr>
-          <a:xfrm>
-            <a:off x="6903720" y="1271016"/>
-            <a:ext cx="1508760" cy="338328"/>
-          </a:xfrm>
-          <a:prstGeom prst="rect">
-            <a:avLst/>
-          </a:prstGeom>
-          <a:noFill/>
-        </p:spPr>
-        <p:txBody>
-          <a:bodyPr wrap="square" lIns="36576" rIns="36576" tIns="36576" bIns="36576" anchor="t">
-            <a:spAutoFit/>
-          </a:bodyPr>
-          <a:lstStyle/>
-          <a:p>
-            <a:pPr algn="l">
-              <a:defRPr sz="1600" b="1">
-                <a:solidFill>
-                  <a:srgbClr val="005A67"/>
-                </a:solidFill>
-                <a:latin typeface="Noto Sans"/>
-              </a:defRPr>
-            </a:pPr>
-            <a:r>
-              <a:t>Chuva Agrava</a:t>
-            </a:r>
-          </a:p>
-        </p:txBody>
-      </p:sp>
-      <p:sp>
-        <p:nvSpPr>
-          <p:cNvPr id="20" name="TextBox 19"/>
-          <p:cNvSpPr txBox="1"/>
-          <p:nvPr/>
-        </p:nvSpPr>
-        <p:spPr>
-          <a:xfrm>
-            <a:off x="8348472" y="1261872"/>
-            <a:ext cx="2971800" cy="640080"/>
-          </a:xfrm>
-          <a:prstGeom prst="rect">
-            <a:avLst/>
-          </a:prstGeom>
-          <a:noFill/>
-        </p:spPr>
-        <p:txBody>
-          <a:bodyPr wrap="square" lIns="36576" rIns="36576" tIns="36576" bIns="36576" anchor="t">
-            <a:spAutoFit/>
-          </a:bodyPr>
-          <a:lstStyle/>
-          <a:p>
-            <a:pPr algn="l">
-              <a:defRPr sz="1250" b="0">
-                <a:solidFill>
-                  <a:srgbClr val="17343A"/>
-                </a:solidFill>
-                <a:latin typeface="Noto Sans"/>
-              </a:defRPr>
-            </a:pPr>
-            <a:r>
-              <a:t>Correlação moderada, mas o efeito aparece em toda a operação.</a:t>
-            </a:r>
-          </a:p>
-        </p:txBody>
-      </p:sp>
-      <p:sp>
-        <p:nvSpPr>
-          <p:cNvPr id="21" name="Rounded Rectangle 20"/>
-          <p:cNvSpPr/>
-          <p:nvPr/>
-        </p:nvSpPr>
-        <p:spPr>
-          <a:xfrm>
-            <a:off x="6647688" y="2478024"/>
-            <a:ext cx="4983480" cy="1078992"/>
-          </a:xfrm>
-          <a:prstGeom prst="roundRect">
-            <a:avLst/>
-          </a:prstGeom>
-          <a:solidFill>
-            <a:srgbClr val="F06449"/>
-          </a:solidFill>
-          <a:ln>
-            <a:noFill/>
-          </a:ln>
-        </p:spPr>
-        <p:style>
-          <a:lnRef idx="1">
-            <a:schemeClr val="accent1"/>
-          </a:lnRef>
-          <a:fillRef idx="3">
-            <a:schemeClr val="accent1"/>
-          </a:fillRef>
-          <a:effectRef idx="2">
-            <a:schemeClr val="accent1"/>
-          </a:effectRef>
-          <a:fontRef idx="minor">
-            <a:schemeClr val="lt1"/>
-          </a:fontRef>
-        </p:style>
-        <p:txBody>
-          <a:bodyPr rtlCol="0" anchor="ctr"/>
-          <a:lstStyle/>
-          <a:p>
-            <a:pPr algn="ctr"/>
-          </a:p>
-        </p:txBody>
-      </p:sp>
-      <p:sp>
-        <p:nvSpPr>
-          <p:cNvPr id="22" name="TextBox 21"/>
-          <p:cNvSpPr txBox="1"/>
-          <p:nvPr/>
-        </p:nvSpPr>
-        <p:spPr>
-          <a:xfrm>
-            <a:off x="6903720" y="2624328"/>
-            <a:ext cx="1508760" cy="338328"/>
-          </a:xfrm>
-          <a:prstGeom prst="rect">
-            <a:avLst/>
-          </a:prstGeom>
-          <a:noFill/>
-        </p:spPr>
-        <p:txBody>
-          <a:bodyPr wrap="square" lIns="36576" rIns="36576" tIns="36576" bIns="36576" anchor="t">
-            <a:spAutoFit/>
-          </a:bodyPr>
-          <a:lstStyle/>
-          <a:p>
-            <a:pPr algn="l">
-              <a:defRPr sz="1600" b="1">
-                <a:solidFill>
-                  <a:srgbClr val="005A67"/>
-                </a:solidFill>
-                <a:latin typeface="Noto Sans"/>
-              </a:defRPr>
-            </a:pPr>
-            <a:r>
-              <a:t>Obra Localiza</a:t>
-            </a:r>
-          </a:p>
-        </p:txBody>
-      </p:sp>
-      <p:sp>
-        <p:nvSpPr>
-          <p:cNvPr id="23" name="TextBox 22"/>
-          <p:cNvSpPr txBox="1"/>
-          <p:nvPr/>
-        </p:nvSpPr>
-        <p:spPr>
-          <a:xfrm>
-            <a:off x="8348472" y="2615184"/>
-            <a:ext cx="2971800" cy="640080"/>
-          </a:xfrm>
-          <a:prstGeom prst="rect">
-            <a:avLst/>
-          </a:prstGeom>
-          <a:noFill/>
-        </p:spPr>
-        <p:txBody>
-          <a:bodyPr wrap="square" lIns="36576" rIns="36576" tIns="36576" bIns="36576" anchor="t">
-            <a:spAutoFit/>
-          </a:bodyPr>
-          <a:lstStyle/>
-          <a:p>
-            <a:pPr algn="l">
-              <a:defRPr sz="1250" b="0">
-                <a:solidFill>
-                  <a:srgbClr val="17343A"/>
-                </a:solidFill>
-                <a:latin typeface="Noto Sans"/>
-              </a:defRPr>
-            </a:pPr>
-            <a:r>
-              <a:t>“Obra na via” surge em 07/04 somente em R03 e R05.</a:t>
-            </a:r>
-          </a:p>
-        </p:txBody>
-      </p:sp>
-      <p:sp>
-        <p:nvSpPr>
-          <p:cNvPr id="24" name="Rounded Rectangle 23"/>
-          <p:cNvSpPr/>
-          <p:nvPr/>
-        </p:nvSpPr>
-        <p:spPr>
-          <a:xfrm>
-            <a:off x="6647688" y="3831335"/>
-            <a:ext cx="4983480" cy="1078992"/>
-          </a:xfrm>
-          <a:prstGeom prst="roundRect">
-            <a:avLst/>
-          </a:prstGeom>
-          <a:solidFill>
-            <a:srgbClr val="65C3A5"/>
-          </a:solidFill>
-          <a:ln>
-            <a:noFill/>
-          </a:ln>
-        </p:spPr>
-        <p:style>
-          <a:lnRef idx="1">
-            <a:schemeClr val="accent1"/>
-          </a:lnRef>
-          <a:fillRef idx="3">
-            <a:schemeClr val="accent1"/>
-          </a:fillRef>
-          <a:effectRef idx="2">
-            <a:schemeClr val="accent1"/>
-          </a:effectRef>
-          <a:fontRef idx="minor">
-            <a:schemeClr val="lt1"/>
-          </a:fontRef>
-        </p:style>
-        <p:txBody>
-          <a:bodyPr rtlCol="0" anchor="ctr"/>
-          <a:lstStyle/>
-          <a:p>
-            <a:pPr algn="ctr"/>
-          </a:p>
-        </p:txBody>
-      </p:sp>
-      <p:sp>
-        <p:nvSpPr>
-          <p:cNvPr id="25" name="TextBox 24"/>
-          <p:cNvSpPr txBox="1"/>
-          <p:nvPr/>
-        </p:nvSpPr>
-        <p:spPr>
-          <a:xfrm>
-            <a:off x="6903720" y="3977639"/>
-            <a:ext cx="1508760" cy="338328"/>
-          </a:xfrm>
-          <a:prstGeom prst="rect">
-            <a:avLst/>
-          </a:prstGeom>
-          <a:noFill/>
-        </p:spPr>
-        <p:txBody>
-          <a:bodyPr wrap="square" lIns="36576" rIns="36576" tIns="36576" bIns="36576" anchor="t">
-            <a:spAutoFit/>
-          </a:bodyPr>
-          <a:lstStyle/>
-          <a:p>
-            <a:pPr algn="l">
-              <a:defRPr sz="1600" b="1">
-                <a:solidFill>
-                  <a:srgbClr val="005A67"/>
-                </a:solidFill>
-                <a:latin typeface="Noto Sans"/>
-              </a:defRPr>
-            </a:pPr>
-            <a:r>
-              <a:t>Noite Preserva</a:t>
-            </a:r>
-          </a:p>
-        </p:txBody>
-      </p:sp>
-      <p:sp>
-        <p:nvSpPr>
-          <p:cNvPr id="26" name="TextBox 25"/>
-          <p:cNvSpPr txBox="1"/>
-          <p:nvPr/>
-        </p:nvSpPr>
-        <p:spPr>
-          <a:xfrm>
-            <a:off x="8348472" y="3968496"/>
-            <a:ext cx="2971800" cy="640080"/>
-          </a:xfrm>
-          <a:prstGeom prst="rect">
-            <a:avLst/>
-          </a:prstGeom>
-          <a:noFill/>
-        </p:spPr>
-        <p:txBody>
-          <a:bodyPr wrap="square" lIns="36576" rIns="36576" tIns="36576" bIns="36576" anchor="t">
-            <a:spAutoFit/>
-          </a:bodyPr>
-          <a:lstStyle/>
-          <a:p>
-            <a:pPr algn="l">
-              <a:defRPr sz="1250" b="0">
-                <a:solidFill>
-                  <a:srgbClr val="17343A"/>
-                </a:solidFill>
-                <a:latin typeface="Noto Sans"/>
-              </a:defRPr>
-            </a:pPr>
-            <a:r>
-              <a:t>As duas rotas mantêm 96% de pontualidade no turno noturno.</a:t>
-            </a:r>
-          </a:p>
-        </p:txBody>
-      </p:sp>
-      <p:sp>
-        <p:nvSpPr>
-          <p:cNvPr id="27" name="Rounded Rectangle 26"/>
-          <p:cNvSpPr/>
-          <p:nvPr/>
-        </p:nvSpPr>
-        <p:spPr>
-          <a:xfrm>
-            <a:off x="6647688" y="5230368"/>
-            <a:ext cx="4983480" cy="804672"/>
-          </a:xfrm>
-          <a:prstGeom prst="roundRect">
-            <a:avLst/>
-          </a:prstGeom>
-          <a:solidFill>
-            <a:srgbClr val="005A67"/>
-          </a:solidFill>
-          <a:ln>
-            <a:noFill/>
-          </a:ln>
-        </p:spPr>
-        <p:style>
-          <a:lnRef idx="1">
-            <a:schemeClr val="accent1"/>
-          </a:lnRef>
-          <a:fillRef idx="3">
-            <a:schemeClr val="accent1"/>
-          </a:fillRef>
-          <a:effectRef idx="2">
-            <a:schemeClr val="accent1"/>
-          </a:effectRef>
-          <a:fontRef idx="minor">
-            <a:schemeClr val="lt1"/>
-          </a:fontRef>
-        </p:style>
-        <p:txBody>
-          <a:bodyPr rtlCol="0" anchor="ctr"/>
-          <a:lstStyle/>
-          <a:p>
-            <a:pPr algn="ctr"/>
-          </a:p>
-        </p:txBody>
-      </p:sp>
-      <p:sp>
-        <p:nvSpPr>
-          <p:cNvPr id="28" name="TextBox 27"/>
-          <p:cNvSpPr txBox="1"/>
-          <p:nvPr/>
-        </p:nvSpPr>
-        <p:spPr>
-          <a:xfrm>
-            <a:off x="6894576" y="5440680"/>
-            <a:ext cx="4498848" cy="384048"/>
-          </a:xfrm>
-          <a:prstGeom prst="rect">
-            <a:avLst/>
-          </a:prstGeom>
-          <a:noFill/>
-        </p:spPr>
-        <p:txBody>
-          <a:bodyPr wrap="square" lIns="36576" rIns="36576" tIns="36576" bIns="36576" anchor="t">
-            <a:spAutoFit/>
-          </a:bodyPr>
-          <a:lstStyle/>
-          <a:p>
-            <a:pPr algn="ctr">
-              <a:defRPr sz="1600" b="1">
-                <a:solidFill>
-                  <a:srgbClr val="FFF8E8"/>
-                </a:solidFill>
-                <a:latin typeface="Noto Sans"/>
-              </a:defRPr>
-            </a:pPr>
-            <a:r>
-              <a:t>Hipótese mais plausível: restrição diurna no corredor compartilhado.</a:t>
-            </a:r>
-          </a:p>
-        </p:txBody>
-      </p:sp>
-      <p:sp>
-        <p:nvSpPr>
-          <p:cNvPr id="29" name="Rounded Rectangle 28"/>
-          <p:cNvSpPr/>
-          <p:nvPr/>
-        </p:nvSpPr>
-        <p:spPr>
-          <a:xfrm>
-            <a:off x="11137392" y="6428232"/>
-            <a:ext cx="713232" cy="256032"/>
-          </a:xfrm>
-          <a:prstGeom prst="roundRect">
-            <a:avLst/>
-          </a:prstGeom>
-          <a:solidFill>
-            <a:srgbClr val="FFF8E8"/>
-          </a:solidFill>
-          <a:ln w="15240">
-            <a:solidFill>
-              <a:srgbClr val="005A67"/>
-            </a:solidFill>
-          </a:ln>
-        </p:spPr>
-        <p:style>
-          <a:lnRef idx="1">
-            <a:schemeClr val="accent1"/>
-          </a:lnRef>
-          <a:fillRef idx="3">
-            <a:schemeClr val="accent1"/>
-          </a:fillRef>
-          <a:effectRef idx="2">
-            <a:schemeClr val="accent1"/>
-          </a:effectRef>
-          <a:fontRef idx="minor">
-            <a:schemeClr val="lt1"/>
-          </a:fontRef>
-        </p:style>
-        <p:txBody>
-          <a:bodyPr rtlCol="0" anchor="ctr"/>
-          <a:lstStyle/>
-          <a:p>
-            <a:pPr algn="ctr"/>
-          </a:p>
-        </p:txBody>
-      </p:sp>
-      <p:sp>
-        <p:nvSpPr>
-          <p:cNvPr id="30" name="TextBox 29"/>
-          <p:cNvSpPr txBox="1"/>
-          <p:nvPr/>
-        </p:nvSpPr>
-        <p:spPr>
-          <a:xfrm>
-            <a:off x="11173968" y="6451092"/>
-            <a:ext cx="640080" cy="182880"/>
-          </a:xfrm>
-          <a:prstGeom prst="rect">
-            <a:avLst/>
-          </a:prstGeom>
-          <a:noFill/>
-        </p:spPr>
-        <p:txBody>
-          <a:bodyPr wrap="square" lIns="0" rIns="0" tIns="0" bIns="0" anchor="ctr">
-            <a:spAutoFit/>
-          </a:bodyPr>
-          <a:lstStyle/>
-          <a:p>
-            <a:pPr algn="ctr">
-              <a:defRPr sz="900" b="1">
-                <a:solidFill>
-                  <a:srgbClr val="005A67"/>
-                </a:solidFill>
-                <a:latin typeface="Noto Sans"/>
-              </a:defRPr>
-            </a:pPr>
-            <a:r>
-              <a:t>7/9</a:t>
-            </a:r>
-          </a:p>
-        </p:txBody>
-      </p:sp>
-    </p:spTree>
-  </p:cSld>
-  <p:clrMapOvr>
-    <a:masterClrMapping/>
-  </p:clrMapOvr>
-</p:sld>
-</file>
-
-<file path=ppt/slides/slide8.xml><?xml version="1.0" encoding="utf-8"?>
+<file path=ppt/slides/slide9.xml><?xml version="1.0" encoding="utf-8"?>
 <p:sld xmlns:a="http://schemas.openxmlformats.org/drawingml/2006/main" xmlns:p="http://schemas.openxmlformats.org/presentationml/2006/main" xmlns:r="http://schemas.openxmlformats.org/officeDocument/2006/relationships">
   <p:cSld>
     <p:bg>
@@ -14146,7 +14905,7 @@
               </a:defRPr>
             </a:pPr>
             <a:r>
-              <a:t>07</a:t>
+              <a:t>08</a:t>
             </a:r>
           </a:p>
         </p:txBody>
@@ -14182,21 +14941,66 @@
               </a:defRPr>
             </a:pPr>
             <a:r>
-              <a:t>Entregáveis Disponíveis</a:t>
-            </a:r>
-          </a:p>
-        </p:txBody>
-      </p:sp>
-      <p:sp>
-        <p:nvSpPr>
-          <p:cNvPr id="17" name="TextBox 16"/>
+              <a:t>Ato 3 · Limites e próximos passos</a:t>
+            </a:r>
+          </a:p>
+        </p:txBody>
+      </p:sp>
+      <p:sp>
+        <p:nvSpPr>
+          <p:cNvPr id="17" name="Rounded Rectangle 16"/>
+          <p:cNvSpPr/>
+          <p:nvPr/>
+        </p:nvSpPr>
+        <p:spPr>
+          <a:xfrm>
+            <a:off x="758952" y="1143000"/>
+            <a:ext cx="5148072" cy="3246120"/>
+          </a:xfrm>
+          <a:prstGeom prst="roundRect">
+            <a:avLst/>
+          </a:prstGeom>
+          <a:solidFill>
+            <a:srgbClr val="FFF8E8"/>
+          </a:solidFill>
+          <a:ln w="15240">
+            <a:solidFill>
+              <a:srgbClr val="005A67"/>
+            </a:solidFill>
+          </a:ln>
+        </p:spPr>
+        <p:style>
+          <a:lnRef idx="1">
+            <a:schemeClr val="accent1"/>
+          </a:lnRef>
+          <a:fillRef idx="3">
+            <a:schemeClr val="accent1"/>
+          </a:fillRef>
+          <a:effectRef idx="2">
+            <a:schemeClr val="accent1"/>
+          </a:effectRef>
+          <a:fontRef idx="minor">
+            <a:schemeClr val="lt1"/>
+          </a:fontRef>
+        </p:style>
+        <p:txBody>
+          <a:bodyPr rtlCol="0" anchor="ctr"/>
+          <a:lstStyle/>
+          <a:p>
+            <a:pPr algn="ctr"/>
+          </a:p>
+        </p:txBody>
+      </p:sp>
+      <p:sp>
+        <p:nvSpPr>
+          <p:cNvPr id="18" name="TextBox 17"/>
           <p:cNvSpPr txBox="1"/>
           <p:nvPr/>
         </p:nvSpPr>
         <p:spPr>
           <a:xfrm>
-            <a:off x="932688" y="896112"/>
-            <a:ext cx="10241280" cy="502920"/>
+            <a:off x="1033271" y="1371600"/>
+            <a:ext cx="4572000" cy="384048"/>
           </a:xfrm>
           <a:prstGeom prst="rect">
             <a:avLst/>
@@ -14209,8 +15013,47 @@
           </a:bodyPr>
           <a:lstStyle/>
           <a:p>
-            <a:pPr algn="ctr">
-              <a:defRPr sz="1700" b="1">
+            <a:pPr algn="l">
+              <a:defRPr sz="1900" b="1">
+                <a:solidFill>
+                  <a:srgbClr val="005A67"/>
+                </a:solidFill>
+                <a:latin typeface="Noto Sans"/>
+              </a:defRPr>
+            </a:pPr>
+            <a:r>
+              <a:t>O Que Ainda Não Podemos Afirmar</a:t>
+            </a:r>
+          </a:p>
+        </p:txBody>
+      </p:sp>
+      <p:sp>
+        <p:nvSpPr>
+          <p:cNvPr id="19" name="TextBox 18"/>
+          <p:cNvSpPr txBox="1"/>
+          <p:nvPr/>
+        </p:nvSpPr>
+        <p:spPr>
+          <a:xfrm>
+            <a:off x="1005840" y="1956816"/>
+            <a:ext cx="4663440" cy="2377440"/>
+          </a:xfrm>
+          <a:prstGeom prst="rect">
+            <a:avLst/>
+          </a:prstGeom>
+          <a:noFill/>
+        </p:spPr>
+        <p:txBody>
+          <a:bodyPr wrap="square" lIns="73152" rIns="73152">
+            <a:spAutoFit/>
+          </a:bodyPr>
+          <a:lstStyle/>
+          <a:p>
+            <a:pPr>
+              <a:spcAft>
+                <a:spcPts val="1200"/>
+              </a:spcAft>
+              <a:defRPr sz="1500">
                 <a:solidFill>
                   <a:srgbClr val="17343A"/>
                 </a:solidFill>
@@ -14218,123 +15061,15 @@
               </a:defRPr>
             </a:pPr>
             <a:r>
-              <a:t>A análise pode ser reproduzida no Colab e consultada em um relatório técnico descritivo.</a:t>
-            </a:r>
-          </a:p>
-        </p:txBody>
-      </p:sp>
-      <p:sp>
-        <p:nvSpPr>
-          <p:cNvPr id="18" name="Rounded Rectangle 17"/>
-          <p:cNvSpPr/>
-          <p:nvPr/>
-        </p:nvSpPr>
-        <p:spPr>
-          <a:xfrm>
-            <a:off x="758952" y="1627632"/>
-            <a:ext cx="5148072" cy="4224528"/>
-          </a:xfrm>
-          <a:prstGeom prst="roundRect">
-            <a:avLst/>
-          </a:prstGeom>
-          <a:solidFill>
-            <a:srgbClr val="FFF8E8"/>
-          </a:solidFill>
-          <a:ln w="15240">
-            <a:solidFill>
-              <a:srgbClr val="005A67"/>
-            </a:solidFill>
-          </a:ln>
-        </p:spPr>
-        <p:style>
-          <a:lnRef idx="1">
-            <a:schemeClr val="accent1"/>
-          </a:lnRef>
-          <a:fillRef idx="3">
-            <a:schemeClr val="accent1"/>
-          </a:fillRef>
-          <a:effectRef idx="2">
-            <a:schemeClr val="accent1"/>
-          </a:effectRef>
-          <a:fontRef idx="minor">
-            <a:schemeClr val="lt1"/>
-          </a:fontRef>
-        </p:style>
-        <p:txBody>
-          <a:bodyPr rtlCol="0" anchor="ctr"/>
-          <a:lstStyle/>
-          <a:p>
-            <a:pPr algn="ctr"/>
-          </a:p>
-        </p:txBody>
-      </p:sp>
-      <p:sp>
-        <p:nvSpPr>
-          <p:cNvPr id="19" name="Rounded Rectangle 18"/>
-          <p:cNvSpPr/>
-          <p:nvPr/>
-        </p:nvSpPr>
-        <p:spPr>
-          <a:xfrm>
-            <a:off x="1014983" y="1901952"/>
-            <a:ext cx="749808" cy="749808"/>
-          </a:xfrm>
-          <a:prstGeom prst="roundRect">
-            <a:avLst/>
-          </a:prstGeom>
-          <a:solidFill>
-            <a:srgbClr val="65C3A5"/>
-          </a:solidFill>
-          <a:ln>
-            <a:noFill/>
-          </a:ln>
-        </p:spPr>
-        <p:style>
-          <a:lnRef idx="1">
-            <a:schemeClr val="accent1"/>
-          </a:lnRef>
-          <a:fillRef idx="3">
-            <a:schemeClr val="accent1"/>
-          </a:fillRef>
-          <a:effectRef idx="2">
-            <a:schemeClr val="accent1"/>
-          </a:effectRef>
-          <a:fontRef idx="minor">
-            <a:schemeClr val="lt1"/>
-          </a:fontRef>
-        </p:style>
-        <p:txBody>
-          <a:bodyPr rtlCol="0" anchor="ctr"/>
-          <a:lstStyle/>
-          <a:p>
-            <a:pPr algn="ctr"/>
-          </a:p>
-        </p:txBody>
-      </p:sp>
-      <p:sp>
-        <p:nvSpPr>
-          <p:cNvPr id="20" name="TextBox 19"/>
-          <p:cNvSpPr txBox="1"/>
-          <p:nvPr/>
-        </p:nvSpPr>
-        <p:spPr>
-          <a:xfrm>
-            <a:off x="1088136" y="2075688"/>
-            <a:ext cx="603504" cy="274320"/>
-          </a:xfrm>
-          <a:prstGeom prst="rect">
-            <a:avLst/>
-          </a:prstGeom>
-          <a:noFill/>
-        </p:spPr>
-        <p:txBody>
-          <a:bodyPr wrap="square" lIns="0" rIns="0" tIns="0" bIns="0" anchor="ctr">
-            <a:spAutoFit/>
-          </a:bodyPr>
-          <a:lstStyle/>
-          <a:p>
-            <a:pPr algn="ctr">
-              <a:defRPr sz="1300" b="1">
+              <a:t>•  Que a obra causou os atrasos: a base mostra coincidência no tempo e no lugar, não causa.</a:t>
+            </a:r>
+          </a:p>
+          <a:p>
+            <a:pPr>
+              <a:spcAft>
+                <a:spcPts val="1200"/>
+              </a:spcAft>
+              <a:defRPr sz="1500">
                 <a:solidFill>
                   <a:srgbClr val="17343A"/>
                 </a:solidFill>
@@ -14342,8 +15077,69 @@
               </a:defRPr>
             </a:pPr>
             <a:r>
-              <a:t>&lt;/&gt;</a:t>
-            </a:r>
+              <a:t>•  Qual trecho da via é o gargalo: não há GPS nem tempo por trecho.</a:t>
+            </a:r>
+          </a:p>
+          <a:p>
+            <a:pPr>
+              <a:spcAft>
+                <a:spcPts val="1200"/>
+              </a:spcAft>
+              <a:defRPr sz="1500">
+                <a:solidFill>
+                  <a:srgbClr val="17343A"/>
+                </a:solidFill>
+                <a:latin typeface="Noto Sans"/>
+              </a:defRPr>
+            </a:pPr>
+            <a:r>
+              <a:t>•  Quanto o registro do motorista deixa de anotar: um terço dos atrasos não tem ocorrência.</a:t>
+            </a:r>
+          </a:p>
+        </p:txBody>
+      </p:sp>
+      <p:sp>
+        <p:nvSpPr>
+          <p:cNvPr id="20" name="Rounded Rectangle 19"/>
+          <p:cNvSpPr/>
+          <p:nvPr/>
+        </p:nvSpPr>
+        <p:spPr>
+          <a:xfrm>
+            <a:off x="6272784" y="1143000"/>
+            <a:ext cx="5148072" cy="3246120"/>
+          </a:xfrm>
+          <a:prstGeom prst="roundRect">
+            <a:avLst/>
+          </a:prstGeom>
+          <a:solidFill>
+            <a:srgbClr val="FFF8E8"/>
+          </a:solidFill>
+          <a:ln w="15240">
+            <a:solidFill>
+              <a:srgbClr val="005A67"/>
+            </a:solidFill>
+          </a:ln>
+        </p:spPr>
+        <p:style>
+          <a:lnRef idx="1">
+            <a:schemeClr val="accent1"/>
+          </a:lnRef>
+          <a:fillRef idx="3">
+            <a:schemeClr val="accent1"/>
+          </a:fillRef>
+          <a:effectRef idx="2">
+            <a:schemeClr val="accent1"/>
+          </a:effectRef>
+          <a:fontRef idx="minor">
+            <a:schemeClr val="lt1"/>
+          </a:fontRef>
+        </p:style>
+        <p:txBody>
+          <a:bodyPr rtlCol="0" anchor="ctr"/>
+          <a:lstStyle/>
+          <a:p>
+            <a:pPr algn="ctr"/>
           </a:p>
         </p:txBody>
       </p:sp>
@@ -14355,8 +15151,8 @@
         </p:nvSpPr>
         <p:spPr>
           <a:xfrm>
-            <a:off x="1929384" y="1993392"/>
-            <a:ext cx="3584448" cy="576072"/>
+            <a:off x="6547104" y="1371600"/>
+            <a:ext cx="4572000" cy="384048"/>
           </a:xfrm>
           <a:prstGeom prst="rect">
             <a:avLst/>
@@ -14370,7 +15166,7 @@
           <a:lstStyle/>
           <a:p>
             <a:pPr algn="l">
-              <a:defRPr sz="2000" b="1">
+              <a:defRPr sz="1900" b="1">
                 <a:solidFill>
                   <a:srgbClr val="005A67"/>
                 </a:solidFill>
@@ -14378,7 +15174,7 @@
               </a:defRPr>
             </a:pPr>
             <a:r>
-              <a:t>Notebook no Google Colab</a:t>
+              <a:t>Ações Recomendadas</a:t>
             </a:r>
           </a:p>
         </p:txBody>
@@ -14391,8 +15187,8 @@
         </p:nvSpPr>
         <p:spPr>
           <a:xfrm>
-            <a:off x="1143000" y="2962656"/>
-            <a:ext cx="4370832" cy="987552"/>
+            <a:off x="6519672" y="1956816"/>
+            <a:ext cx="4663440" cy="2377440"/>
           </a:xfrm>
           <a:prstGeom prst="rect">
             <a:avLst/>
@@ -14400,13 +15196,16 @@
           <a:noFill/>
         </p:spPr>
         <p:txBody>
-          <a:bodyPr wrap="square" lIns="36576" rIns="36576" tIns="36576" bIns="36576" anchor="t">
+          <a:bodyPr wrap="square" lIns="73152" rIns="73152">
             <a:spAutoFit/>
           </a:bodyPr>
           <a:lstStyle/>
           <a:p>
-            <a:pPr algn="ctr">
-              <a:defRPr sz="1500" b="0">
+            <a:pPr>
+              <a:spcAft>
+                <a:spcPts val="1200"/>
+              </a:spcAft>
+              <a:defRPr sz="1500">
                 <a:solidFill>
                   <a:srgbClr val="17343A"/>
                 </a:solidFill>
@@ -14414,7 +15213,39 @@
               </a:defRPr>
             </a:pPr>
             <a:r>
-              <a:t>Código executável, diagnóstico, limpeza, gráficos e conclusão reproduzível.</a:t>
+              <a:t>1.  Cruzar o período com o cronograma e a localização das obras públicas.</a:t>
+            </a:r>
+          </a:p>
+          <a:p>
+            <a:pPr>
+              <a:spcAft>
+                <a:spcPts val="1200"/>
+              </a:spcAft>
+              <a:defRPr sz="1500">
+                <a:solidFill>
+                  <a:srgbClr val="17343A"/>
+                </a:solidFill>
+                <a:latin typeface="Noto Sans"/>
+              </a:defRPr>
+            </a:pPr>
+            <a:r>
+              <a:t>2.  Coletar GPS e tempo por trecho em R03 e R05 por duas semanas.</a:t>
+            </a:r>
+          </a:p>
+          <a:p>
+            <a:pPr>
+              <a:spcAft>
+                <a:spcPts val="1200"/>
+              </a:spcAft>
+              <a:defRPr sz="1500">
+                <a:solidFill>
+                  <a:srgbClr val="17343A"/>
+                </a:solidFill>
+                <a:latin typeface="Noto Sans"/>
+              </a:defRPr>
+            </a:pPr>
+            <a:r>
+              <a:t>3.  Testar desvio de rota ou saída 15 minutos antes nos turnos diurnos.</a:t>
             </a:r>
           </a:p>
         </p:txBody>
@@ -14429,7 +15260,7 @@
         </p:nvSpPr>
         <p:spPr>
           <a:xfrm>
-            <a:off x="1508760" y="4315968"/>
+            <a:off x="1508760" y="4736592"/>
             <a:ext cx="3657600" cy="658368"/>
           </a:xfrm>
           <a:prstGeom prst="roundRect">
@@ -14474,7 +15305,7 @@
         </p:nvSpPr>
         <p:spPr>
           <a:xfrm>
-            <a:off x="1673352" y="4489704"/>
+            <a:off x="1673352" y="4910328"/>
             <a:ext cx="3328416" cy="256032"/>
           </a:xfrm>
           <a:prstGeom prst="rect">
@@ -14504,101 +15335,22 @@
       </p:sp>
       <p:sp>
         <p:nvSpPr>
-          <p:cNvPr id="25" name="TextBox 24"/>
-          <p:cNvSpPr txBox="1"/>
-          <p:nvPr/>
-        </p:nvSpPr>
-        <p:spPr>
-          <a:xfrm>
-            <a:off x="1472184" y="5230368"/>
-            <a:ext cx="3749039" cy="265176"/>
-          </a:xfrm>
-          <a:prstGeom prst="rect">
-            <a:avLst/>
-          </a:prstGeom>
-          <a:noFill/>
-        </p:spPr>
-        <p:txBody>
-          <a:bodyPr wrap="square" lIns="36576" rIns="36576" tIns="36576" bIns="36576" anchor="t">
-            <a:spAutoFit/>
-          </a:bodyPr>
-          <a:lstStyle/>
-          <a:p>
-            <a:pPr algn="ctr">
-              <a:defRPr sz="1050" b="1">
-                <a:solidFill>
-                  <a:srgbClr val="005A67"/>
-                </a:solidFill>
-                <a:latin typeface="Noto Sans"/>
-              </a:defRPr>
-            </a:pPr>
-            <a:r>
-              <a:t>Disponível no Repositório TransitTrace</a:t>
-            </a:r>
-          </a:p>
-        </p:txBody>
-      </p:sp>
-      <p:sp>
-        <p:nvSpPr>
-          <p:cNvPr id="26" name="Rounded Rectangle 25"/>
-          <p:cNvSpPr/>
-          <p:nvPr/>
-        </p:nvSpPr>
-        <p:spPr>
-          <a:xfrm>
-            <a:off x="6272784" y="1627632"/>
-            <a:ext cx="5148072" cy="4224528"/>
+          <p:cNvPr id="25" name="Rounded Rectangle 24">
+            <a:hlinkClick r:id="rId3"/>
+          </p:cNvPr>
+          <p:cNvSpPr/>
+          <p:nvPr/>
+        </p:nvSpPr>
+        <p:spPr>
+          <a:xfrm>
+            <a:off x="7022592" y="4736592"/>
+            <a:ext cx="3657600" cy="658368"/>
           </a:xfrm>
           <a:prstGeom prst="roundRect">
             <a:avLst/>
           </a:prstGeom>
           <a:solidFill>
-            <a:srgbClr val="FFF8E8"/>
-          </a:solidFill>
-          <a:ln w="15240">
-            <a:solidFill>
-              <a:srgbClr val="005A67"/>
-            </a:solidFill>
-          </a:ln>
-        </p:spPr>
-        <p:style>
-          <a:lnRef idx="1">
-            <a:schemeClr val="accent1"/>
-          </a:lnRef>
-          <a:fillRef idx="3">
-            <a:schemeClr val="accent1"/>
-          </a:fillRef>
-          <a:effectRef idx="2">
-            <a:schemeClr val="accent1"/>
-          </a:effectRef>
-          <a:fontRef idx="minor">
-            <a:schemeClr val="lt1"/>
-          </a:fontRef>
-        </p:style>
-        <p:txBody>
-          <a:bodyPr rtlCol="0" anchor="ctr"/>
-          <a:lstStyle/>
-          <a:p>
-            <a:pPr algn="ctr"/>
-          </a:p>
-        </p:txBody>
-      </p:sp>
-      <p:sp>
-        <p:nvSpPr>
-          <p:cNvPr id="27" name="Rounded Rectangle 26"/>
-          <p:cNvSpPr/>
-          <p:nvPr/>
-        </p:nvSpPr>
-        <p:spPr>
-          <a:xfrm>
-            <a:off x="6528816" y="1901952"/>
-            <a:ext cx="749808" cy="749808"/>
-          </a:xfrm>
-          <a:prstGeom prst="roundRect">
-            <a:avLst/>
-          </a:prstGeom>
-          <a:solidFill>
-            <a:srgbClr val="F6BD38"/>
+            <a:srgbClr val="005A67"/>
           </a:solidFill>
           <a:ln>
             <a:noFill/>
@@ -14628,160 +15380,7 @@
       </p:sp>
       <p:sp>
         <p:nvSpPr>
-          <p:cNvPr id="28" name="TextBox 27"/>
-          <p:cNvSpPr txBox="1"/>
-          <p:nvPr/>
-        </p:nvSpPr>
-        <p:spPr>
-          <a:xfrm>
-            <a:off x="6601968" y="2075688"/>
-            <a:ext cx="603504" cy="274320"/>
-          </a:xfrm>
-          <a:prstGeom prst="rect">
-            <a:avLst/>
-          </a:prstGeom>
-          <a:noFill/>
-        </p:spPr>
-        <p:txBody>
-          <a:bodyPr wrap="square" lIns="0" rIns="0" tIns="0" bIns="0" anchor="ctr">
-            <a:spAutoFit/>
-          </a:bodyPr>
-          <a:lstStyle/>
-          <a:p>
-            <a:pPr algn="ctr">
-              <a:defRPr sz="1300" b="1">
-                <a:solidFill>
-                  <a:srgbClr val="17343A"/>
-                </a:solidFill>
-                <a:latin typeface="Noto Sans"/>
-              </a:defRPr>
-            </a:pPr>
-            <a:r>
-              <a:t>PDF</a:t>
-            </a:r>
-          </a:p>
-        </p:txBody>
-      </p:sp>
-      <p:sp>
-        <p:nvSpPr>
-          <p:cNvPr id="29" name="TextBox 28"/>
-          <p:cNvSpPr txBox="1"/>
-          <p:nvPr/>
-        </p:nvSpPr>
-        <p:spPr>
-          <a:xfrm>
-            <a:off x="7443216" y="1993392"/>
-            <a:ext cx="3584448" cy="576072"/>
-          </a:xfrm>
-          <a:prstGeom prst="rect">
-            <a:avLst/>
-          </a:prstGeom>
-          <a:noFill/>
-        </p:spPr>
-        <p:txBody>
-          <a:bodyPr wrap="square" lIns="36576" rIns="36576" tIns="36576" bIns="36576" anchor="t">
-            <a:spAutoFit/>
-          </a:bodyPr>
-          <a:lstStyle/>
-          <a:p>
-            <a:pPr algn="l">
-              <a:defRPr sz="2000" b="1">
-                <a:solidFill>
-                  <a:srgbClr val="005A67"/>
-                </a:solidFill>
-                <a:latin typeface="Noto Sans"/>
-              </a:defRPr>
-            </a:pPr>
-            <a:r>
-              <a:t>Relatório Técnico Descritivo</a:t>
-            </a:r>
-          </a:p>
-        </p:txBody>
-      </p:sp>
-      <p:sp>
-        <p:nvSpPr>
-          <p:cNvPr id="30" name="TextBox 29"/>
-          <p:cNvSpPr txBox="1"/>
-          <p:nvPr/>
-        </p:nvSpPr>
-        <p:spPr>
-          <a:xfrm>
-            <a:off x="6656832" y="2962656"/>
-            <a:ext cx="4370832" cy="987552"/>
-          </a:xfrm>
-          <a:prstGeom prst="rect">
-            <a:avLst/>
-          </a:prstGeom>
-          <a:noFill/>
-        </p:spPr>
-        <p:txBody>
-          <a:bodyPr wrap="square" lIns="36576" rIns="36576" tIns="36576" bIns="36576" anchor="t">
-            <a:spAutoFit/>
-          </a:bodyPr>
-          <a:lstStyle/>
-          <a:p>
-            <a:pPr algn="ctr">
-              <a:defRPr sz="1500" b="0">
-                <a:solidFill>
-                  <a:srgbClr val="17343A"/>
-                </a:solidFill>
-                <a:latin typeface="Noto Sans"/>
-              </a:defRPr>
-            </a:pPr>
-            <a:r>
-              <a:t>Método, evidências, limitações, tabelas, recomendações e conclusão detalhada.</a:t>
-            </a:r>
-          </a:p>
-        </p:txBody>
-      </p:sp>
-      <p:sp>
-        <p:nvSpPr>
-          <p:cNvPr id="31" name="Rounded Rectangle 30">
-            <a:hlinkClick r:id="rId3"/>
-          </p:cNvPr>
-          <p:cNvSpPr/>
-          <p:nvPr/>
-        </p:nvSpPr>
-        <p:spPr>
-          <a:xfrm>
-            <a:off x="7022592" y="4315968"/>
-            <a:ext cx="3657600" cy="658368"/>
-          </a:xfrm>
-          <a:prstGeom prst="roundRect">
-            <a:avLst/>
-          </a:prstGeom>
-          <a:solidFill>
-            <a:srgbClr val="005A67"/>
-          </a:solidFill>
-          <a:ln>
-            <a:noFill/>
-          </a:ln>
-        </p:spPr>
-        <p:style>
-          <a:lnRef idx="1">
-            <a:schemeClr val="accent1"/>
-          </a:lnRef>
-          <a:fillRef idx="3">
-            <a:schemeClr val="accent1"/>
-          </a:fillRef>
-          <a:effectRef idx="2">
-            <a:schemeClr val="accent1"/>
-          </a:effectRef>
-          <a:fontRef idx="minor">
-            <a:schemeClr val="lt1"/>
-          </a:fontRef>
-        </p:style>
-        <p:txBody>
-          <a:bodyPr rtlCol="0" anchor="ctr"/>
-          <a:lstStyle/>
-          <a:p>
-            <a:pPr algn="ctr"/>
-          </a:p>
-        </p:txBody>
-      </p:sp>
-      <p:sp>
-        <p:nvSpPr>
-          <p:cNvPr id="32" name="TextBox 31">
+          <p:cNvPr id="26" name="TextBox 25">
             <a:hlinkClick r:id="rId3"/>
           </p:cNvPr>
           <p:cNvSpPr txBox="1"/>
@@ -14789,7 +15388,7 @@
         </p:nvSpPr>
         <p:spPr>
           <a:xfrm>
-            <a:off x="7187184" y="4489704"/>
+            <a:off x="7187184" y="4910328"/>
             <a:ext cx="3328416" cy="256032"/>
           </a:xfrm>
           <a:prstGeom prst="rect">
@@ -14819,49 +15418,13 @@
       </p:sp>
       <p:sp>
         <p:nvSpPr>
-          <p:cNvPr id="33" name="TextBox 32"/>
+          <p:cNvPr id="27" name="TextBox 26"/>
           <p:cNvSpPr txBox="1"/>
           <p:nvPr/>
         </p:nvSpPr>
         <p:spPr>
           <a:xfrm>
-            <a:off x="6986016" y="5230368"/>
-            <a:ext cx="3749039" cy="265176"/>
-          </a:xfrm>
-          <a:prstGeom prst="rect">
-            <a:avLst/>
-          </a:prstGeom>
-          <a:noFill/>
-        </p:spPr>
-        <p:txBody>
-          <a:bodyPr wrap="square" lIns="36576" rIns="36576" tIns="36576" bIns="36576" anchor="t">
-            <a:spAutoFit/>
-          </a:bodyPr>
-          <a:lstStyle/>
-          <a:p>
-            <a:pPr algn="ctr">
-              <a:defRPr sz="1050" b="1">
-                <a:solidFill>
-                  <a:srgbClr val="005A67"/>
-                </a:solidFill>
-                <a:latin typeface="Noto Sans"/>
-              </a:defRPr>
-            </a:pPr>
-            <a:r>
-              <a:t>Disponível no Repositório TransitTrace</a:t>
-            </a:r>
-          </a:p>
-        </p:txBody>
-      </p:sp>
-      <p:sp>
-        <p:nvSpPr>
-          <p:cNvPr id="34" name="TextBox 33"/>
-          <p:cNvSpPr txBox="1"/>
-          <p:nvPr/>
-        </p:nvSpPr>
-        <p:spPr>
-          <a:xfrm>
-            <a:off x="2139696" y="6053328"/>
+            <a:off x="2139696" y="5669280"/>
             <a:ext cx="7900416" cy="292608"/>
           </a:xfrm>
           <a:prstGeom prst="rect">
@@ -14884,1789 +15447,20 @@
               </a:defRPr>
             </a:pPr>
             <a:r>
-              <a:t>O Link do Relatório Também Está no Início do Notebook</a:t>
-            </a:r>
-          </a:p>
-        </p:txBody>
-      </p:sp>
-      <p:sp>
-        <p:nvSpPr>
-          <p:cNvPr id="35" name="Rounded Rectangle 34"/>
-          <p:cNvSpPr/>
-          <p:nvPr/>
-        </p:nvSpPr>
-        <p:spPr>
-          <a:xfrm>
-            <a:off x="11137392" y="6428232"/>
-            <a:ext cx="713232" cy="256032"/>
-          </a:xfrm>
-          <a:prstGeom prst="roundRect">
-            <a:avLst/>
-          </a:prstGeom>
-          <a:solidFill>
-            <a:srgbClr val="FFF8E8"/>
-          </a:solidFill>
-          <a:ln w="15240">
-            <a:solidFill>
-              <a:srgbClr val="005A67"/>
-            </a:solidFill>
-          </a:ln>
-        </p:spPr>
-        <p:style>
-          <a:lnRef idx="1">
-            <a:schemeClr val="accent1"/>
-          </a:lnRef>
-          <a:fillRef idx="3">
-            <a:schemeClr val="accent1"/>
-          </a:fillRef>
-          <a:effectRef idx="2">
-            <a:schemeClr val="accent1"/>
-          </a:effectRef>
-          <a:fontRef idx="minor">
-            <a:schemeClr val="lt1"/>
-          </a:fontRef>
-        </p:style>
-        <p:txBody>
-          <a:bodyPr rtlCol="0" anchor="ctr"/>
-          <a:lstStyle/>
-          <a:p>
-            <a:pPr algn="ctr"/>
-          </a:p>
-        </p:txBody>
-      </p:sp>
-      <p:sp>
-        <p:nvSpPr>
-          <p:cNvPr id="36" name="TextBox 35"/>
+              <a:t>Análise completa e reproduzível no repositório TransitTrace</a:t>
+            </a:r>
+          </a:p>
+        </p:txBody>
+      </p:sp>
+      <p:sp>
+        <p:nvSpPr>
+          <p:cNvPr id="28" name="TextBox 27"/>
           <p:cNvSpPr txBox="1"/>
           <p:nvPr/>
         </p:nvSpPr>
         <p:spPr>
           <a:xfrm>
-            <a:off x="11173968" y="6451092"/>
-            <a:ext cx="640080" cy="182880"/>
-          </a:xfrm>
-          <a:prstGeom prst="rect">
-            <a:avLst/>
-          </a:prstGeom>
-          <a:noFill/>
-        </p:spPr>
-        <p:txBody>
-          <a:bodyPr wrap="square" lIns="0" rIns="0" tIns="0" bIns="0" anchor="ctr">
-            <a:spAutoFit/>
-          </a:bodyPr>
-          <a:lstStyle/>
-          <a:p>
-            <a:pPr algn="ctr">
-              <a:defRPr sz="900" b="1">
-                <a:solidFill>
-                  <a:srgbClr val="005A67"/>
-                </a:solidFill>
-                <a:latin typeface="Noto Sans"/>
-              </a:defRPr>
-            </a:pPr>
-            <a:r>
-              <a:t>8/9</a:t>
-            </a:r>
-          </a:p>
-        </p:txBody>
-      </p:sp>
-    </p:spTree>
-  </p:cSld>
-  <p:clrMapOvr>
-    <a:masterClrMapping/>
-  </p:clrMapOvr>
-</p:sld>
-</file>
-
-<file path=ppt/slides/slide9.xml><?xml version="1.0" encoding="utf-8"?>
-<p:sld xmlns:a="http://schemas.openxmlformats.org/drawingml/2006/main" xmlns:p="http://schemas.openxmlformats.org/presentationml/2006/main" xmlns:r="http://schemas.openxmlformats.org/officeDocument/2006/relationships">
-  <p:cSld>
-    <p:bg>
-      <p:bgPr>
-        <a:solidFill>
-          <a:srgbClr val="FFF8E8"/>
-        </a:solidFill>
-        <a:effectLst/>
-      </p:bgPr>
-    </p:bg>
-    <p:spTree>
-      <p:nvGrpSpPr>
-        <p:cNvPr id="1" name=""/>
-        <p:cNvGrpSpPr/>
-        <p:nvPr/>
-      </p:nvGrpSpPr>
-      <p:grpSpPr/>
-      <p:sp>
-        <p:nvSpPr>
-          <p:cNvPr id="2" name="Oval 1"/>
-          <p:cNvSpPr/>
-          <p:nvPr/>
-        </p:nvSpPr>
-        <p:spPr>
-          <a:xfrm>
-            <a:off x="-201168" y="-182880"/>
-            <a:ext cx="676656" cy="676656"/>
-          </a:xfrm>
-          <a:prstGeom prst="ellipse">
-            <a:avLst/>
-          </a:prstGeom>
-          <a:solidFill>
-            <a:srgbClr val="F6BD38">
-              <a:alpha val="20000"/>
-            </a:srgbClr>
-          </a:solidFill>
-          <a:ln>
-            <a:noFill/>
-          </a:ln>
-        </p:spPr>
-        <p:style>
-          <a:lnRef idx="1">
-            <a:schemeClr val="accent1"/>
-          </a:lnRef>
-          <a:fillRef idx="3">
-            <a:schemeClr val="accent1"/>
-          </a:fillRef>
-          <a:effectRef idx="2">
-            <a:schemeClr val="accent1"/>
-          </a:effectRef>
-          <a:fontRef idx="minor">
-            <a:schemeClr val="lt1"/>
-          </a:fontRef>
-        </p:style>
-        <p:txBody>
-          <a:bodyPr rtlCol="0" anchor="ctr"/>
-          <a:lstStyle/>
-          <a:p>
-            <a:pPr algn="ctr"/>
-          </a:p>
-        </p:txBody>
-      </p:sp>
-      <p:sp>
-        <p:nvSpPr>
-          <p:cNvPr id="3" name="Arc 2"/>
-          <p:cNvSpPr/>
-          <p:nvPr/>
-        </p:nvSpPr>
-        <p:spPr>
-          <a:xfrm>
-            <a:off x="11338560" y="-164592"/>
-            <a:ext cx="868680" cy="868680"/>
-          </a:xfrm>
-          <a:prstGeom prst="arc">
-            <a:avLst/>
-          </a:prstGeom>
-          <a:solidFill>
-            <a:srgbClr val="37A9E8">
-              <a:alpha val="20000"/>
-            </a:srgbClr>
-          </a:solidFill>
-          <a:ln>
-            <a:noFill/>
-          </a:ln>
-        </p:spPr>
-        <p:style>
-          <a:lnRef idx="1">
-            <a:schemeClr val="accent1"/>
-          </a:lnRef>
-          <a:fillRef idx="3">
-            <a:schemeClr val="accent1"/>
-          </a:fillRef>
-          <a:effectRef idx="2">
-            <a:schemeClr val="accent1"/>
-          </a:effectRef>
-          <a:fontRef idx="minor">
-            <a:schemeClr val="lt1"/>
-          </a:fontRef>
-        </p:style>
-        <p:txBody>
-          <a:bodyPr rtlCol="0" anchor="ctr"/>
-          <a:lstStyle/>
-          <a:p>
-            <a:pPr algn="ctr"/>
-          </a:p>
-        </p:txBody>
-      </p:sp>
-      <p:sp>
-        <p:nvSpPr>
-          <p:cNvPr id="4" name="8-Point Star 3"/>
-          <p:cNvSpPr/>
-          <p:nvPr/>
-        </p:nvSpPr>
-        <p:spPr>
-          <a:xfrm>
-            <a:off x="11411712" y="6053328"/>
-            <a:ext cx="640080" cy="640080"/>
-          </a:xfrm>
-          <a:prstGeom prst="star8">
-            <a:avLst/>
-          </a:prstGeom>
-          <a:solidFill>
-            <a:srgbClr val="F06449">
-              <a:alpha val="20000"/>
-            </a:srgbClr>
-          </a:solidFill>
-          <a:ln>
-            <a:noFill/>
-          </a:ln>
-        </p:spPr>
-        <p:style>
-          <a:lnRef idx="1">
-            <a:schemeClr val="accent1"/>
-          </a:lnRef>
-          <a:fillRef idx="3">
-            <a:schemeClr val="accent1"/>
-          </a:fillRef>
-          <a:effectRef idx="2">
-            <a:schemeClr val="accent1"/>
-          </a:effectRef>
-          <a:fontRef idx="minor">
-            <a:schemeClr val="lt1"/>
-          </a:fontRef>
-        </p:style>
-        <p:txBody>
-          <a:bodyPr rtlCol="0" anchor="ctr"/>
-          <a:lstStyle/>
-          <a:p>
-            <a:pPr algn="ctr"/>
-          </a:p>
-        </p:txBody>
-      </p:sp>
-      <p:sp>
-        <p:nvSpPr>
-          <p:cNvPr id="5" name="Moon 4"/>
-          <p:cNvSpPr/>
-          <p:nvPr/>
-        </p:nvSpPr>
-        <p:spPr>
-          <a:xfrm>
-            <a:off x="-219456" y="5989320"/>
-            <a:ext cx="658368" cy="658368"/>
-          </a:xfrm>
-          <a:prstGeom prst="moon">
-            <a:avLst/>
-          </a:prstGeom>
-          <a:solidFill>
-            <a:srgbClr val="FFF8E8">
-              <a:alpha val="20000"/>
-            </a:srgbClr>
-          </a:solidFill>
-          <a:ln>
-            <a:noFill/>
-          </a:ln>
-        </p:spPr>
-        <p:style>
-          <a:lnRef idx="1">
-            <a:schemeClr val="accent1"/>
-          </a:lnRef>
-          <a:fillRef idx="3">
-            <a:schemeClr val="accent1"/>
-          </a:fillRef>
-          <a:effectRef idx="2">
-            <a:schemeClr val="accent1"/>
-          </a:effectRef>
-          <a:fontRef idx="minor">
-            <a:schemeClr val="lt1"/>
-          </a:fontRef>
-        </p:style>
-        <p:txBody>
-          <a:bodyPr rtlCol="0" anchor="ctr"/>
-          <a:lstStyle/>
-          <a:p>
-            <a:pPr algn="ctr"/>
-          </a:p>
-        </p:txBody>
-      </p:sp>
-      <p:sp>
-        <p:nvSpPr>
-          <p:cNvPr id="6" name="Oval 5"/>
-          <p:cNvSpPr/>
-          <p:nvPr/>
-        </p:nvSpPr>
-        <p:spPr>
-          <a:xfrm>
-            <a:off x="9921240" y="841248"/>
-            <a:ext cx="1143000" cy="1143000"/>
-          </a:xfrm>
-          <a:prstGeom prst="ellipse">
-            <a:avLst/>
-          </a:prstGeom>
-          <a:solidFill>
-            <a:srgbClr val="F6BD38">
-              <a:alpha val="20000"/>
-            </a:srgbClr>
-          </a:solidFill>
-          <a:ln>
-            <a:noFill/>
-          </a:ln>
-        </p:spPr>
-        <p:style>
-          <a:lnRef idx="1">
-            <a:schemeClr val="accent1"/>
-          </a:lnRef>
-          <a:fillRef idx="3">
-            <a:schemeClr val="accent1"/>
-          </a:fillRef>
-          <a:effectRef idx="2">
-            <a:schemeClr val="accent1"/>
-          </a:effectRef>
-          <a:fontRef idx="minor">
-            <a:schemeClr val="lt1"/>
-          </a:fontRef>
-        </p:style>
-        <p:txBody>
-          <a:bodyPr rtlCol="0" anchor="ctr"/>
-          <a:lstStyle/>
-          <a:p>
-            <a:pPr algn="ctr"/>
-          </a:p>
-        </p:txBody>
-      </p:sp>
-      <p:sp>
-        <p:nvSpPr>
-          <p:cNvPr id="7" name="Rectangle 6"/>
-          <p:cNvSpPr/>
-          <p:nvPr/>
-        </p:nvSpPr>
-        <p:spPr>
-          <a:xfrm>
-            <a:off x="10451592" y="1033271"/>
-            <a:ext cx="82296" cy="438912"/>
-          </a:xfrm>
-          <a:prstGeom prst="rect">
-            <a:avLst/>
-          </a:prstGeom>
-          <a:solidFill>
-            <a:srgbClr val="17343A">
-              <a:alpha val="20000"/>
-            </a:srgbClr>
-          </a:solidFill>
-          <a:ln>
-            <a:noFill/>
-          </a:ln>
-        </p:spPr>
-        <p:style>
-          <a:lnRef idx="1">
-            <a:schemeClr val="accent1"/>
-          </a:lnRef>
-          <a:fillRef idx="3">
-            <a:schemeClr val="accent1"/>
-          </a:fillRef>
-          <a:effectRef idx="2">
-            <a:schemeClr val="accent1"/>
-          </a:effectRef>
-          <a:fontRef idx="minor">
-            <a:schemeClr val="lt1"/>
-          </a:fontRef>
-        </p:style>
-        <p:txBody>
-          <a:bodyPr rtlCol="0" anchor="ctr"/>
-          <a:lstStyle/>
-          <a:p>
-            <a:pPr algn="ctr"/>
-          </a:p>
-        </p:txBody>
-      </p:sp>
-      <p:sp>
-        <p:nvSpPr>
-          <p:cNvPr id="8" name="Rectangle 7"/>
-          <p:cNvSpPr/>
-          <p:nvPr/>
-        </p:nvSpPr>
-        <p:spPr>
-          <a:xfrm rot="1200000">
-            <a:off x="10469880" y="1371600"/>
-            <a:ext cx="329184" cy="82296"/>
-          </a:xfrm>
-          <a:prstGeom prst="rect">
-            <a:avLst/>
-          </a:prstGeom>
-          <a:solidFill>
-            <a:srgbClr val="17343A">
-              <a:alpha val="20000"/>
-            </a:srgbClr>
-          </a:solidFill>
-          <a:ln>
-            <a:noFill/>
-          </a:ln>
-        </p:spPr>
-        <p:style>
-          <a:lnRef idx="1">
-            <a:schemeClr val="accent1"/>
-          </a:lnRef>
-          <a:fillRef idx="3">
-            <a:schemeClr val="accent1"/>
-          </a:fillRef>
-          <a:effectRef idx="2">
-            <a:schemeClr val="accent1"/>
-          </a:effectRef>
-          <a:fontRef idx="minor">
-            <a:schemeClr val="lt1"/>
-          </a:fontRef>
-        </p:style>
-        <p:txBody>
-          <a:bodyPr rtlCol="0" anchor="ctr"/>
-          <a:lstStyle/>
-          <a:p>
-            <a:pPr algn="ctr"/>
-          </a:p>
-        </p:txBody>
-      </p:sp>
-      <p:sp>
-        <p:nvSpPr>
-          <p:cNvPr id="9" name="Teardrop 8"/>
-          <p:cNvSpPr/>
-          <p:nvPr/>
-        </p:nvSpPr>
-        <p:spPr>
-          <a:xfrm rot="1200000">
-            <a:off x="1874519" y="5349240"/>
-            <a:ext cx="384048" cy="530352"/>
-          </a:xfrm>
-          <a:prstGeom prst="teardrop">
-            <a:avLst/>
-          </a:prstGeom>
-          <a:solidFill>
-            <a:srgbClr val="37A9E8">
-              <a:alpha val="20000"/>
-            </a:srgbClr>
-          </a:solidFill>
-          <a:ln>
-            <a:noFill/>
-          </a:ln>
-        </p:spPr>
-        <p:style>
-          <a:lnRef idx="1">
-            <a:schemeClr val="accent1"/>
-          </a:lnRef>
-          <a:fillRef idx="3">
-            <a:schemeClr val="accent1"/>
-          </a:fillRef>
-          <a:effectRef idx="2">
-            <a:schemeClr val="accent1"/>
-          </a:effectRef>
-          <a:fontRef idx="minor">
-            <a:schemeClr val="lt1"/>
-          </a:fontRef>
-        </p:style>
-        <p:txBody>
-          <a:bodyPr rtlCol="0" anchor="ctr"/>
-          <a:lstStyle/>
-          <a:p>
-            <a:pPr algn="ctr"/>
-          </a:p>
-        </p:txBody>
-      </p:sp>
-      <p:sp>
-        <p:nvSpPr>
-          <p:cNvPr id="10" name="Teardrop 9"/>
-          <p:cNvSpPr/>
-          <p:nvPr/>
-        </p:nvSpPr>
-        <p:spPr>
-          <a:xfrm rot="1200000">
-            <a:off x="2331720" y="5696712"/>
-            <a:ext cx="301752" cy="420624"/>
-          </a:xfrm>
-          <a:prstGeom prst="teardrop">
-            <a:avLst/>
-          </a:prstGeom>
-          <a:solidFill>
-            <a:srgbClr val="37A9E8">
-              <a:alpha val="20000"/>
-            </a:srgbClr>
-          </a:solidFill>
-          <a:ln>
-            <a:noFill/>
-          </a:ln>
-        </p:spPr>
-        <p:style>
-          <a:lnRef idx="1">
-            <a:schemeClr val="accent1"/>
-          </a:lnRef>
-          <a:fillRef idx="3">
-            <a:schemeClr val="accent1"/>
-          </a:fillRef>
-          <a:effectRef idx="2">
-            <a:schemeClr val="accent1"/>
-          </a:effectRef>
-          <a:fontRef idx="minor">
-            <a:schemeClr val="lt1"/>
-          </a:fontRef>
-        </p:style>
-        <p:txBody>
-          <a:bodyPr rtlCol="0" anchor="ctr"/>
-          <a:lstStyle/>
-          <a:p>
-            <a:pPr algn="ctr"/>
-          </a:p>
-        </p:txBody>
-      </p:sp>
-      <p:sp>
-        <p:nvSpPr>
-          <p:cNvPr id="11" name="Rounded Rectangle 10"/>
-          <p:cNvSpPr/>
-          <p:nvPr/>
-        </p:nvSpPr>
-        <p:spPr>
-          <a:xfrm>
-            <a:off x="9646920" y="5230368"/>
-            <a:ext cx="1664208" cy="859536"/>
-          </a:xfrm>
-          <a:prstGeom prst="roundRect">
-            <a:avLst/>
-          </a:prstGeom>
-          <a:solidFill>
-            <a:srgbClr val="005A67">
-              <a:alpha val="20000"/>
-            </a:srgbClr>
-          </a:solidFill>
-          <a:ln>
-            <a:noFill/>
-          </a:ln>
-        </p:spPr>
-        <p:style>
-          <a:lnRef idx="1">
-            <a:schemeClr val="accent1"/>
-          </a:lnRef>
-          <a:fillRef idx="3">
-            <a:schemeClr val="accent1"/>
-          </a:fillRef>
-          <a:effectRef idx="2">
-            <a:schemeClr val="accent1"/>
-          </a:effectRef>
-          <a:fontRef idx="minor">
-            <a:schemeClr val="lt1"/>
-          </a:fontRef>
-        </p:style>
-        <p:txBody>
-          <a:bodyPr rtlCol="0" anchor="ctr"/>
-          <a:lstStyle/>
-          <a:p>
-            <a:pPr algn="ctr"/>
-          </a:p>
-        </p:txBody>
-      </p:sp>
-      <p:sp>
-        <p:nvSpPr>
-          <p:cNvPr id="12" name="Rectangle 11"/>
-          <p:cNvSpPr/>
-          <p:nvPr/>
-        </p:nvSpPr>
-        <p:spPr>
-          <a:xfrm>
-            <a:off x="9912096" y="5394960"/>
-            <a:ext cx="1115568" cy="301752"/>
-          </a:xfrm>
-          <a:prstGeom prst="rect">
-            <a:avLst/>
-          </a:prstGeom>
-          <a:solidFill>
-            <a:srgbClr val="37A9E8">
-              <a:alpha val="20000"/>
-            </a:srgbClr>
-          </a:solidFill>
-          <a:ln>
-            <a:noFill/>
-          </a:ln>
-        </p:spPr>
-        <p:style>
-          <a:lnRef idx="1">
-            <a:schemeClr val="accent1"/>
-          </a:lnRef>
-          <a:fillRef idx="3">
-            <a:schemeClr val="accent1"/>
-          </a:fillRef>
-          <a:effectRef idx="2">
-            <a:schemeClr val="accent1"/>
-          </a:effectRef>
-          <a:fontRef idx="minor">
-            <a:schemeClr val="lt1"/>
-          </a:fontRef>
-        </p:style>
-        <p:txBody>
-          <a:bodyPr rtlCol="0" anchor="ctr"/>
-          <a:lstStyle/>
-          <a:p>
-            <a:pPr algn="ctr"/>
-          </a:p>
-        </p:txBody>
-      </p:sp>
-      <p:sp>
-        <p:nvSpPr>
-          <p:cNvPr id="13" name="Oval 12"/>
-          <p:cNvSpPr/>
-          <p:nvPr/>
-        </p:nvSpPr>
-        <p:spPr>
-          <a:xfrm>
-            <a:off x="9902952" y="5916168"/>
-            <a:ext cx="283464" cy="283464"/>
-          </a:xfrm>
-          <a:prstGeom prst="ellipse">
-            <a:avLst/>
-          </a:prstGeom>
-          <a:solidFill>
-            <a:srgbClr val="17343A">
-              <a:alpha val="20000"/>
-            </a:srgbClr>
-          </a:solidFill>
-          <a:ln>
-            <a:noFill/>
-          </a:ln>
-        </p:spPr>
-        <p:style>
-          <a:lnRef idx="1">
-            <a:schemeClr val="accent1"/>
-          </a:lnRef>
-          <a:fillRef idx="3">
-            <a:schemeClr val="accent1"/>
-          </a:fillRef>
-          <a:effectRef idx="2">
-            <a:schemeClr val="accent1"/>
-          </a:effectRef>
-          <a:fontRef idx="minor">
-            <a:schemeClr val="lt1"/>
-          </a:fontRef>
-        </p:style>
-        <p:txBody>
-          <a:bodyPr rtlCol="0" anchor="ctr"/>
-          <a:lstStyle/>
-          <a:p>
-            <a:pPr algn="ctr"/>
-          </a:p>
-        </p:txBody>
-      </p:sp>
-      <p:sp>
-        <p:nvSpPr>
-          <p:cNvPr id="14" name="Oval 13"/>
-          <p:cNvSpPr/>
-          <p:nvPr/>
-        </p:nvSpPr>
-        <p:spPr>
-          <a:xfrm>
-            <a:off x="10771632" y="5916168"/>
-            <a:ext cx="283464" cy="283464"/>
-          </a:xfrm>
-          <a:prstGeom prst="ellipse">
-            <a:avLst/>
-          </a:prstGeom>
-          <a:solidFill>
-            <a:srgbClr val="17343A">
-              <a:alpha val="20000"/>
-            </a:srgbClr>
-          </a:solidFill>
-          <a:ln>
-            <a:noFill/>
-          </a:ln>
-        </p:spPr>
-        <p:style>
-          <a:lnRef idx="1">
-            <a:schemeClr val="accent1"/>
-          </a:lnRef>
-          <a:fillRef idx="3">
-            <a:schemeClr val="accent1"/>
-          </a:fillRef>
-          <a:effectRef idx="2">
-            <a:schemeClr val="accent1"/>
-          </a:effectRef>
-          <a:fontRef idx="minor">
-            <a:schemeClr val="lt1"/>
-          </a:fontRef>
-        </p:style>
-        <p:txBody>
-          <a:bodyPr rtlCol="0" anchor="ctr"/>
-          <a:lstStyle/>
-          <a:p>
-            <a:pPr algn="ctr"/>
-          </a:p>
-        </p:txBody>
-      </p:sp>
-      <p:sp>
-        <p:nvSpPr>
-          <p:cNvPr id="15" name="TextBox 14"/>
-          <p:cNvSpPr txBox="1"/>
-          <p:nvPr/>
-        </p:nvSpPr>
-        <p:spPr>
-          <a:xfrm>
-            <a:off x="411480" y="320040"/>
-            <a:ext cx="502920" cy="320040"/>
-          </a:xfrm>
-          <a:prstGeom prst="rect">
-            <a:avLst/>
-          </a:prstGeom>
-          <a:noFill/>
-        </p:spPr>
-        <p:txBody>
-          <a:bodyPr wrap="square" lIns="36576" rIns="36576" tIns="36576" bIns="36576" anchor="t">
-            <a:spAutoFit/>
-          </a:bodyPr>
-          <a:lstStyle/>
-          <a:p>
-            <a:pPr algn="l">
-              <a:defRPr sz="1300" b="1">
-                <a:solidFill>
-                  <a:srgbClr val="17343A"/>
-                </a:solidFill>
-                <a:latin typeface="Noto Sans"/>
-              </a:defRPr>
-            </a:pPr>
-            <a:r>
-              <a:t>08</a:t>
-            </a:r>
-          </a:p>
-        </p:txBody>
-      </p:sp>
-      <p:sp>
-        <p:nvSpPr>
-          <p:cNvPr id="16" name="TextBox 15"/>
-          <p:cNvSpPr txBox="1"/>
-          <p:nvPr/>
-        </p:nvSpPr>
-        <p:spPr>
-          <a:xfrm>
-            <a:off x="804672" y="237744"/>
-            <a:ext cx="10607040" cy="640080"/>
-          </a:xfrm>
-          <a:prstGeom prst="rect">
-            <a:avLst/>
-          </a:prstGeom>
-          <a:noFill/>
-        </p:spPr>
-        <p:txBody>
-          <a:bodyPr wrap="square" lIns="36576" rIns="36576" tIns="36576" bIns="36576" anchor="t">
-            <a:spAutoFit/>
-          </a:bodyPr>
-          <a:lstStyle/>
-          <a:p>
-            <a:pPr algn="l">
-              <a:defRPr sz="2700" b="1">
-                <a:solidFill>
-                  <a:srgbClr val="17343A"/>
-                </a:solidFill>
-                <a:latin typeface="Noto Sans"/>
-              </a:defRPr>
-            </a:pPr>
-            <a:r>
-              <a:t>Demonstração do Notebook</a:t>
-            </a:r>
-          </a:p>
-        </p:txBody>
-      </p:sp>
-      <p:sp>
-        <p:nvSpPr>
-          <p:cNvPr id="17" name="Rounded Rectangle 16"/>
-          <p:cNvSpPr/>
-          <p:nvPr/>
-        </p:nvSpPr>
-        <p:spPr>
-          <a:xfrm>
-            <a:off x="640080" y="1033271"/>
-            <a:ext cx="6876288" cy="5376672"/>
-          </a:xfrm>
-          <a:prstGeom prst="roundRect">
-            <a:avLst/>
-          </a:prstGeom>
-          <a:solidFill>
-            <a:srgbClr val="F2F5F5"/>
-          </a:solidFill>
-          <a:ln w="15240">
-            <a:solidFill>
-              <a:srgbClr val="005A67"/>
-            </a:solidFill>
-          </a:ln>
-        </p:spPr>
-        <p:style>
-          <a:lnRef idx="1">
-            <a:schemeClr val="accent1"/>
-          </a:lnRef>
-          <a:fillRef idx="3">
-            <a:schemeClr val="accent1"/>
-          </a:fillRef>
-          <a:effectRef idx="2">
-            <a:schemeClr val="accent1"/>
-          </a:effectRef>
-          <a:fontRef idx="minor">
-            <a:schemeClr val="lt1"/>
-          </a:fontRef>
-        </p:style>
-        <p:txBody>
-          <a:bodyPr rtlCol="0" anchor="ctr"/>
-          <a:lstStyle/>
-          <a:p>
-            <a:pPr algn="ctr"/>
-          </a:p>
-        </p:txBody>
-      </p:sp>
-      <p:sp>
-        <p:nvSpPr>
-          <p:cNvPr id="18" name="Rounded Rectangle 17"/>
-          <p:cNvSpPr/>
-          <p:nvPr/>
-        </p:nvSpPr>
-        <p:spPr>
-          <a:xfrm>
-            <a:off x="859536" y="1298448"/>
-            <a:ext cx="6437376" cy="457200"/>
-          </a:xfrm>
-          <a:prstGeom prst="roundRect">
-            <a:avLst/>
-          </a:prstGeom>
-          <a:solidFill>
-            <a:srgbClr val="005A67"/>
-          </a:solidFill>
-          <a:ln>
-            <a:noFill/>
-          </a:ln>
-        </p:spPr>
-        <p:style>
-          <a:lnRef idx="1">
-            <a:schemeClr val="accent1"/>
-          </a:lnRef>
-          <a:fillRef idx="3">
-            <a:schemeClr val="accent1"/>
-          </a:fillRef>
-          <a:effectRef idx="2">
-            <a:schemeClr val="accent1"/>
-          </a:effectRef>
-          <a:fontRef idx="minor">
-            <a:schemeClr val="lt1"/>
-          </a:fontRef>
-        </p:style>
-        <p:txBody>
-          <a:bodyPr rtlCol="0" anchor="ctr"/>
-          <a:lstStyle/>
-          <a:p>
-            <a:pPr algn="ctr"/>
-          </a:p>
-        </p:txBody>
-      </p:sp>
-      <p:sp>
-        <p:nvSpPr>
-          <p:cNvPr id="19" name="TextBox 18"/>
-          <p:cNvSpPr txBox="1"/>
-          <p:nvPr/>
-        </p:nvSpPr>
-        <p:spPr>
-          <a:xfrm>
-            <a:off x="1088136" y="1417320"/>
-            <a:ext cx="3840480" cy="201168"/>
-          </a:xfrm>
-          <a:prstGeom prst="rect">
-            <a:avLst/>
-          </a:prstGeom>
-          <a:noFill/>
-        </p:spPr>
-        <p:txBody>
-          <a:bodyPr wrap="square" lIns="36576" rIns="36576" tIns="36576" bIns="36576" anchor="t">
-            <a:spAutoFit/>
-          </a:bodyPr>
-          <a:lstStyle/>
-          <a:p>
-            <a:pPr algn="l">
-              <a:defRPr sz="1200" b="1">
-                <a:solidFill>
-                  <a:srgbClr val="FFF8E8"/>
-                </a:solidFill>
-                <a:latin typeface="Noto Sans"/>
-              </a:defRPr>
-            </a:pPr>
-            <a:r>
-              <a:t>Rota em Dia · Google Colab</a:t>
-            </a:r>
-          </a:p>
-        </p:txBody>
-      </p:sp>
-      <p:sp>
-        <p:nvSpPr>
-          <p:cNvPr id="20" name="Rounded Rectangle 19"/>
-          <p:cNvSpPr/>
-          <p:nvPr/>
-        </p:nvSpPr>
-        <p:spPr>
-          <a:xfrm>
-            <a:off x="1005840" y="2011680"/>
-            <a:ext cx="6108192" cy="713232"/>
-          </a:xfrm>
-          <a:prstGeom prst="roundRect">
-            <a:avLst/>
-          </a:prstGeom>
-          <a:solidFill>
-            <a:srgbClr val="FFF8E8"/>
-          </a:solidFill>
-          <a:ln w="15240">
-            <a:solidFill>
-              <a:srgbClr val="D0DADA"/>
-            </a:solidFill>
-          </a:ln>
-        </p:spPr>
-        <p:style>
-          <a:lnRef idx="1">
-            <a:schemeClr val="accent1"/>
-          </a:lnRef>
-          <a:fillRef idx="3">
-            <a:schemeClr val="accent1"/>
-          </a:fillRef>
-          <a:effectRef idx="2">
-            <a:schemeClr val="accent1"/>
-          </a:effectRef>
-          <a:fontRef idx="minor">
-            <a:schemeClr val="lt1"/>
-          </a:fontRef>
-        </p:style>
-        <p:txBody>
-          <a:bodyPr rtlCol="0" anchor="ctr"/>
-          <a:lstStyle/>
-          <a:p>
-            <a:pPr algn="ctr"/>
-          </a:p>
-        </p:txBody>
-      </p:sp>
-      <p:sp>
-        <p:nvSpPr>
-          <p:cNvPr id="21" name="TextBox 20"/>
-          <p:cNvSpPr txBox="1"/>
-          <p:nvPr/>
-        </p:nvSpPr>
-        <p:spPr>
-          <a:xfrm>
-            <a:off x="1197864" y="2148840"/>
-            <a:ext cx="438912" cy="347472"/>
-          </a:xfrm>
-          <a:prstGeom prst="rect">
-            <a:avLst/>
-          </a:prstGeom>
-          <a:noFill/>
-        </p:spPr>
-        <p:txBody>
-          <a:bodyPr wrap="square" lIns="36576" rIns="36576" tIns="36576" bIns="36576" anchor="t">
-            <a:spAutoFit/>
-          </a:bodyPr>
-          <a:lstStyle/>
-          <a:p>
-            <a:pPr algn="ctr">
-              <a:defRPr sz="1900" b="1">
-                <a:solidFill>
-                  <a:srgbClr val="F06449"/>
-                </a:solidFill>
-                <a:latin typeface="Noto Sans"/>
-              </a:defRPr>
-            </a:pPr>
-            <a:r>
-              <a:t>1</a:t>
-            </a:r>
-          </a:p>
-        </p:txBody>
-      </p:sp>
-      <p:sp>
-        <p:nvSpPr>
-          <p:cNvPr id="22" name="TextBox 21"/>
-          <p:cNvSpPr txBox="1"/>
-          <p:nvPr/>
-        </p:nvSpPr>
-        <p:spPr>
-          <a:xfrm>
-            <a:off x="1810512" y="2148840"/>
-            <a:ext cx="1572768" cy="301752"/>
-          </a:xfrm>
-          <a:prstGeom prst="rect">
-            <a:avLst/>
-          </a:prstGeom>
-          <a:noFill/>
-        </p:spPr>
-        <p:txBody>
-          <a:bodyPr wrap="square" lIns="36576" rIns="36576" tIns="36576" bIns="36576" anchor="t">
-            <a:spAutoFit/>
-          </a:bodyPr>
-          <a:lstStyle/>
-          <a:p>
-            <a:pPr algn="l">
-              <a:defRPr sz="1500" b="1">
-                <a:solidFill>
-                  <a:srgbClr val="005A67"/>
-                </a:solidFill>
-                <a:latin typeface="Noto Sans"/>
-              </a:defRPr>
-            </a:pPr>
-            <a:r>
-              <a:t>Carregar</a:t>
-            </a:r>
-          </a:p>
-        </p:txBody>
-      </p:sp>
-      <p:sp>
-        <p:nvSpPr>
-          <p:cNvPr id="23" name="TextBox 22"/>
-          <p:cNvSpPr txBox="1"/>
-          <p:nvPr/>
-        </p:nvSpPr>
-        <p:spPr>
-          <a:xfrm>
-            <a:off x="3337560" y="2157984"/>
-            <a:ext cx="3310128" cy="301752"/>
-          </a:xfrm>
-          <a:prstGeom prst="rect">
-            <a:avLst/>
-          </a:prstGeom>
-          <a:noFill/>
-        </p:spPr>
-        <p:txBody>
-          <a:bodyPr wrap="square" lIns="36576" rIns="36576" tIns="36576" bIns="36576" anchor="t">
-            <a:spAutoFit/>
-          </a:bodyPr>
-          <a:lstStyle/>
-          <a:p>
-            <a:pPr algn="l">
-              <a:defRPr sz="1300" b="0">
-                <a:solidFill>
-                  <a:srgbClr val="17343A"/>
-                </a:solidFill>
-                <a:latin typeface="Noto Sans"/>
-              </a:defRPr>
-            </a:pPr>
-            <a:r>
-              <a:t>CSV + diagnóstico</a:t>
-            </a:r>
-          </a:p>
-        </p:txBody>
-      </p:sp>
-      <p:sp>
-        <p:nvSpPr>
-          <p:cNvPr id="24" name="Rounded Rectangle 23"/>
-          <p:cNvSpPr/>
-          <p:nvPr/>
-        </p:nvSpPr>
-        <p:spPr>
-          <a:xfrm>
-            <a:off x="1005840" y="2953512"/>
-            <a:ext cx="6108192" cy="713232"/>
-          </a:xfrm>
-          <a:prstGeom prst="roundRect">
-            <a:avLst/>
-          </a:prstGeom>
-          <a:solidFill>
-            <a:srgbClr val="FFF8E8"/>
-          </a:solidFill>
-          <a:ln w="15240">
-            <a:solidFill>
-              <a:srgbClr val="D0DADA"/>
-            </a:solidFill>
-          </a:ln>
-        </p:spPr>
-        <p:style>
-          <a:lnRef idx="1">
-            <a:schemeClr val="accent1"/>
-          </a:lnRef>
-          <a:fillRef idx="3">
-            <a:schemeClr val="accent1"/>
-          </a:fillRef>
-          <a:effectRef idx="2">
-            <a:schemeClr val="accent1"/>
-          </a:effectRef>
-          <a:fontRef idx="minor">
-            <a:schemeClr val="lt1"/>
-          </a:fontRef>
-        </p:style>
-        <p:txBody>
-          <a:bodyPr rtlCol="0" anchor="ctr"/>
-          <a:lstStyle/>
-          <a:p>
-            <a:pPr algn="ctr"/>
-          </a:p>
-        </p:txBody>
-      </p:sp>
-      <p:sp>
-        <p:nvSpPr>
-          <p:cNvPr id="25" name="TextBox 24"/>
-          <p:cNvSpPr txBox="1"/>
-          <p:nvPr/>
-        </p:nvSpPr>
-        <p:spPr>
-          <a:xfrm>
-            <a:off x="1197864" y="3090672"/>
-            <a:ext cx="438912" cy="347472"/>
-          </a:xfrm>
-          <a:prstGeom prst="rect">
-            <a:avLst/>
-          </a:prstGeom>
-          <a:noFill/>
-        </p:spPr>
-        <p:txBody>
-          <a:bodyPr wrap="square" lIns="36576" rIns="36576" tIns="36576" bIns="36576" anchor="t">
-            <a:spAutoFit/>
-          </a:bodyPr>
-          <a:lstStyle/>
-          <a:p>
-            <a:pPr algn="ctr">
-              <a:defRPr sz="1900" b="1">
-                <a:solidFill>
-                  <a:srgbClr val="F06449"/>
-                </a:solidFill>
-                <a:latin typeface="Noto Sans"/>
-              </a:defRPr>
-            </a:pPr>
-            <a:r>
-              <a:t>2</a:t>
-            </a:r>
-          </a:p>
-        </p:txBody>
-      </p:sp>
-      <p:sp>
-        <p:nvSpPr>
-          <p:cNvPr id="26" name="TextBox 25"/>
-          <p:cNvSpPr txBox="1"/>
-          <p:nvPr/>
-        </p:nvSpPr>
-        <p:spPr>
-          <a:xfrm>
-            <a:off x="1810512" y="3090672"/>
-            <a:ext cx="1572768" cy="301752"/>
-          </a:xfrm>
-          <a:prstGeom prst="rect">
-            <a:avLst/>
-          </a:prstGeom>
-          <a:noFill/>
-        </p:spPr>
-        <p:txBody>
-          <a:bodyPr wrap="square" lIns="36576" rIns="36576" tIns="36576" bIns="36576" anchor="t">
-            <a:spAutoFit/>
-          </a:bodyPr>
-          <a:lstStyle/>
-          <a:p>
-            <a:pPr algn="l">
-              <a:defRPr sz="1500" b="1">
-                <a:solidFill>
-                  <a:srgbClr val="005A67"/>
-                </a:solidFill>
-                <a:latin typeface="Noto Sans"/>
-              </a:defRPr>
-            </a:pPr>
-            <a:r>
-              <a:t>Investigar</a:t>
-            </a:r>
-          </a:p>
-        </p:txBody>
-      </p:sp>
-      <p:sp>
-        <p:nvSpPr>
-          <p:cNvPr id="27" name="TextBox 26"/>
-          <p:cNvSpPr txBox="1"/>
-          <p:nvPr/>
-        </p:nvSpPr>
-        <p:spPr>
-          <a:xfrm>
-            <a:off x="3337560" y="3099816"/>
-            <a:ext cx="3310128" cy="301752"/>
-          </a:xfrm>
-          <a:prstGeom prst="rect">
-            <a:avLst/>
-          </a:prstGeom>
-          <a:noFill/>
-        </p:spPr>
-        <p:txBody>
-          <a:bodyPr wrap="square" lIns="36576" rIns="36576" tIns="36576" bIns="36576" anchor="t">
-            <a:spAutoFit/>
-          </a:bodyPr>
-          <a:lstStyle/>
-          <a:p>
-            <a:pPr algn="l">
-              <a:defRPr sz="1300" b="0">
-                <a:solidFill>
-                  <a:srgbClr val="17343A"/>
-                </a:solidFill>
-                <a:latin typeface="Noto Sans"/>
-              </a:defRPr>
-            </a:pPr>
-            <a:r>
-              <a:t>Estatística + hipóteses</a:t>
-            </a:r>
-          </a:p>
-        </p:txBody>
-      </p:sp>
-      <p:sp>
-        <p:nvSpPr>
-          <p:cNvPr id="28" name="Rounded Rectangle 27"/>
-          <p:cNvSpPr/>
-          <p:nvPr/>
-        </p:nvSpPr>
-        <p:spPr>
-          <a:xfrm>
-            <a:off x="1005840" y="3895344"/>
-            <a:ext cx="6108192" cy="713232"/>
-          </a:xfrm>
-          <a:prstGeom prst="roundRect">
-            <a:avLst/>
-          </a:prstGeom>
-          <a:solidFill>
-            <a:srgbClr val="FFF8E8"/>
-          </a:solidFill>
-          <a:ln w="15240">
-            <a:solidFill>
-              <a:srgbClr val="D0DADA"/>
-            </a:solidFill>
-          </a:ln>
-        </p:spPr>
-        <p:style>
-          <a:lnRef idx="1">
-            <a:schemeClr val="accent1"/>
-          </a:lnRef>
-          <a:fillRef idx="3">
-            <a:schemeClr val="accent1"/>
-          </a:fillRef>
-          <a:effectRef idx="2">
-            <a:schemeClr val="accent1"/>
-          </a:effectRef>
-          <a:fontRef idx="minor">
-            <a:schemeClr val="lt1"/>
-          </a:fontRef>
-        </p:style>
-        <p:txBody>
-          <a:bodyPr rtlCol="0" anchor="ctr"/>
-          <a:lstStyle/>
-          <a:p>
-            <a:pPr algn="ctr"/>
-          </a:p>
-        </p:txBody>
-      </p:sp>
-      <p:sp>
-        <p:nvSpPr>
-          <p:cNvPr id="29" name="TextBox 28"/>
-          <p:cNvSpPr txBox="1"/>
-          <p:nvPr/>
-        </p:nvSpPr>
-        <p:spPr>
-          <a:xfrm>
-            <a:off x="1197864" y="4032504"/>
-            <a:ext cx="438912" cy="347472"/>
-          </a:xfrm>
-          <a:prstGeom prst="rect">
-            <a:avLst/>
-          </a:prstGeom>
-          <a:noFill/>
-        </p:spPr>
-        <p:txBody>
-          <a:bodyPr wrap="square" lIns="36576" rIns="36576" tIns="36576" bIns="36576" anchor="t">
-            <a:spAutoFit/>
-          </a:bodyPr>
-          <a:lstStyle/>
-          <a:p>
-            <a:pPr algn="ctr">
-              <a:defRPr sz="1900" b="1">
-                <a:solidFill>
-                  <a:srgbClr val="F06449"/>
-                </a:solidFill>
-                <a:latin typeface="Noto Sans"/>
-              </a:defRPr>
-            </a:pPr>
-            <a:r>
-              <a:t>3</a:t>
-            </a:r>
-          </a:p>
-        </p:txBody>
-      </p:sp>
-      <p:sp>
-        <p:nvSpPr>
-          <p:cNvPr id="30" name="TextBox 29"/>
-          <p:cNvSpPr txBox="1"/>
-          <p:nvPr/>
-        </p:nvSpPr>
-        <p:spPr>
-          <a:xfrm>
-            <a:off x="1810512" y="4032504"/>
-            <a:ext cx="1572768" cy="301752"/>
-          </a:xfrm>
-          <a:prstGeom prst="rect">
-            <a:avLst/>
-          </a:prstGeom>
-          <a:noFill/>
-        </p:spPr>
-        <p:txBody>
-          <a:bodyPr wrap="square" lIns="36576" rIns="36576" tIns="36576" bIns="36576" anchor="t">
-            <a:spAutoFit/>
-          </a:bodyPr>
-          <a:lstStyle/>
-          <a:p>
-            <a:pPr algn="l">
-              <a:defRPr sz="1500" b="1">
-                <a:solidFill>
-                  <a:srgbClr val="005A67"/>
-                </a:solidFill>
-                <a:latin typeface="Noto Sans"/>
-              </a:defRPr>
-            </a:pPr>
-            <a:r>
-              <a:t>Limpar</a:t>
-            </a:r>
-          </a:p>
-        </p:txBody>
-      </p:sp>
-      <p:sp>
-        <p:nvSpPr>
-          <p:cNvPr id="31" name="TextBox 30"/>
-          <p:cNvSpPr txBox="1"/>
-          <p:nvPr/>
-        </p:nvSpPr>
-        <p:spPr>
-          <a:xfrm>
-            <a:off x="3337560" y="4041648"/>
-            <a:ext cx="3310128" cy="301752"/>
-          </a:xfrm>
-          <a:prstGeom prst="rect">
-            <a:avLst/>
-          </a:prstGeom>
-          <a:noFill/>
-        </p:spPr>
-        <p:txBody>
-          <a:bodyPr wrap="square" lIns="36576" rIns="36576" tIns="36576" bIns="36576" anchor="t">
-            <a:spAutoFit/>
-          </a:bodyPr>
-          <a:lstStyle/>
-          <a:p>
-            <a:pPr algn="l">
-              <a:defRPr sz="1300" b="0">
-                <a:solidFill>
-                  <a:srgbClr val="17343A"/>
-                </a:solidFill>
-                <a:latin typeface="Noto Sans"/>
-              </a:defRPr>
-            </a:pPr>
-            <a:r>
-              <a:t>Pipeline + validação</a:t>
-            </a:r>
-          </a:p>
-        </p:txBody>
-      </p:sp>
-      <p:sp>
-        <p:nvSpPr>
-          <p:cNvPr id="32" name="Rounded Rectangle 31"/>
-          <p:cNvSpPr/>
-          <p:nvPr/>
-        </p:nvSpPr>
-        <p:spPr>
-          <a:xfrm>
-            <a:off x="1005840" y="4837176"/>
-            <a:ext cx="6108192" cy="713232"/>
-          </a:xfrm>
-          <a:prstGeom prst="roundRect">
-            <a:avLst/>
-          </a:prstGeom>
-          <a:solidFill>
-            <a:srgbClr val="FFF8E8"/>
-          </a:solidFill>
-          <a:ln w="15240">
-            <a:solidFill>
-              <a:srgbClr val="D0DADA"/>
-            </a:solidFill>
-          </a:ln>
-        </p:spPr>
-        <p:style>
-          <a:lnRef idx="1">
-            <a:schemeClr val="accent1"/>
-          </a:lnRef>
-          <a:fillRef idx="3">
-            <a:schemeClr val="accent1"/>
-          </a:fillRef>
-          <a:effectRef idx="2">
-            <a:schemeClr val="accent1"/>
-          </a:effectRef>
-          <a:fontRef idx="minor">
-            <a:schemeClr val="lt1"/>
-          </a:fontRef>
-        </p:style>
-        <p:txBody>
-          <a:bodyPr rtlCol="0" anchor="ctr"/>
-          <a:lstStyle/>
-          <a:p>
-            <a:pPr algn="ctr"/>
-          </a:p>
-        </p:txBody>
-      </p:sp>
-      <p:sp>
-        <p:nvSpPr>
-          <p:cNvPr id="33" name="TextBox 32"/>
-          <p:cNvSpPr txBox="1"/>
-          <p:nvPr/>
-        </p:nvSpPr>
-        <p:spPr>
-          <a:xfrm>
-            <a:off x="1197864" y="4974336"/>
-            <a:ext cx="438912" cy="347472"/>
-          </a:xfrm>
-          <a:prstGeom prst="rect">
-            <a:avLst/>
-          </a:prstGeom>
-          <a:noFill/>
-        </p:spPr>
-        <p:txBody>
-          <a:bodyPr wrap="square" lIns="36576" rIns="36576" tIns="36576" bIns="36576" anchor="t">
-            <a:spAutoFit/>
-          </a:bodyPr>
-          <a:lstStyle/>
-          <a:p>
-            <a:pPr algn="ctr">
-              <a:defRPr sz="1900" b="1">
-                <a:solidFill>
-                  <a:srgbClr val="F06449"/>
-                </a:solidFill>
-                <a:latin typeface="Noto Sans"/>
-              </a:defRPr>
-            </a:pPr>
-            <a:r>
-              <a:t>4</a:t>
-            </a:r>
-          </a:p>
-        </p:txBody>
-      </p:sp>
-      <p:sp>
-        <p:nvSpPr>
-          <p:cNvPr id="34" name="TextBox 33"/>
-          <p:cNvSpPr txBox="1"/>
-          <p:nvPr/>
-        </p:nvSpPr>
-        <p:spPr>
-          <a:xfrm>
-            <a:off x="1810512" y="4974336"/>
-            <a:ext cx="1572768" cy="301752"/>
-          </a:xfrm>
-          <a:prstGeom prst="rect">
-            <a:avLst/>
-          </a:prstGeom>
-          <a:noFill/>
-        </p:spPr>
-        <p:txBody>
-          <a:bodyPr wrap="square" lIns="36576" rIns="36576" tIns="36576" bIns="36576" anchor="t">
-            <a:spAutoFit/>
-          </a:bodyPr>
-          <a:lstStyle/>
-          <a:p>
-            <a:pPr algn="l">
-              <a:defRPr sz="1500" b="1">
-                <a:solidFill>
-                  <a:srgbClr val="005A67"/>
-                </a:solidFill>
-                <a:latin typeface="Noto Sans"/>
-              </a:defRPr>
-            </a:pPr>
-            <a:r>
-              <a:t>Explicar</a:t>
-            </a:r>
-          </a:p>
-        </p:txBody>
-      </p:sp>
-      <p:sp>
-        <p:nvSpPr>
-          <p:cNvPr id="35" name="TextBox 34"/>
-          <p:cNvSpPr txBox="1"/>
-          <p:nvPr/>
-        </p:nvSpPr>
-        <p:spPr>
-          <a:xfrm>
-            <a:off x="3337560" y="4983480"/>
-            <a:ext cx="3310128" cy="301752"/>
-          </a:xfrm>
-          <a:prstGeom prst="rect">
-            <a:avLst/>
-          </a:prstGeom>
-          <a:noFill/>
-        </p:spPr>
-        <p:txBody>
-          <a:bodyPr wrap="square" lIns="36576" rIns="36576" tIns="36576" bIns="36576" anchor="t">
-            <a:spAutoFit/>
-          </a:bodyPr>
-          <a:lstStyle/>
-          <a:p>
-            <a:pPr algn="l">
-              <a:defRPr sz="1300" b="0">
-                <a:solidFill>
-                  <a:srgbClr val="17343A"/>
-                </a:solidFill>
-                <a:latin typeface="Noto Sans"/>
-              </a:defRPr>
-            </a:pPr>
-            <a:r>
-              <a:t>5 gráficos + conclusão</a:t>
-            </a:r>
-          </a:p>
-        </p:txBody>
-      </p:sp>
-      <p:sp>
-        <p:nvSpPr>
-          <p:cNvPr id="36" name="Rounded Rectangle 35"/>
-          <p:cNvSpPr/>
-          <p:nvPr/>
-        </p:nvSpPr>
-        <p:spPr>
-          <a:xfrm>
-            <a:off x="7818120" y="1097280"/>
-            <a:ext cx="3767328" cy="1901952"/>
-          </a:xfrm>
-          <a:prstGeom prst="roundRect">
-            <a:avLst/>
-          </a:prstGeom>
-          <a:solidFill>
-            <a:srgbClr val="65C3A5"/>
-          </a:solidFill>
-          <a:ln>
-            <a:noFill/>
-          </a:ln>
-        </p:spPr>
-        <p:style>
-          <a:lnRef idx="1">
-            <a:schemeClr val="accent1"/>
-          </a:lnRef>
-          <a:fillRef idx="3">
-            <a:schemeClr val="accent1"/>
-          </a:fillRef>
-          <a:effectRef idx="2">
-            <a:schemeClr val="accent1"/>
-          </a:effectRef>
-          <a:fontRef idx="minor">
-            <a:schemeClr val="lt1"/>
-          </a:fontRef>
-        </p:style>
-        <p:txBody>
-          <a:bodyPr rtlCol="0" anchor="ctr"/>
-          <a:lstStyle/>
-          <a:p>
-            <a:pPr algn="ctr"/>
-          </a:p>
-        </p:txBody>
-      </p:sp>
-      <p:sp>
-        <p:nvSpPr>
-          <p:cNvPr id="37" name="TextBox 36"/>
-          <p:cNvSpPr txBox="1"/>
-          <p:nvPr/>
-        </p:nvSpPr>
-        <p:spPr>
-          <a:xfrm>
-            <a:off x="8147304" y="1426464"/>
-            <a:ext cx="3127248" cy="411480"/>
-          </a:xfrm>
-          <a:prstGeom prst="rect">
-            <a:avLst/>
-          </a:prstGeom>
-          <a:noFill/>
-        </p:spPr>
-        <p:txBody>
-          <a:bodyPr wrap="square" lIns="36576" rIns="36576" tIns="36576" bIns="36576" anchor="t">
-            <a:spAutoFit/>
-          </a:bodyPr>
-          <a:lstStyle/>
-          <a:p>
-            <a:pPr algn="ctr">
-              <a:defRPr sz="2400" b="1">
-                <a:solidFill>
-                  <a:srgbClr val="005A67"/>
-                </a:solidFill>
-                <a:latin typeface="Noto Sans"/>
-              </a:defRPr>
-            </a:pPr>
-            <a:r>
-              <a:t>Executar Tudo</a:t>
-            </a:r>
-          </a:p>
-        </p:txBody>
-      </p:sp>
-      <p:sp>
-        <p:nvSpPr>
-          <p:cNvPr id="38" name="TextBox 37"/>
-          <p:cNvSpPr txBox="1"/>
-          <p:nvPr/>
-        </p:nvSpPr>
-        <p:spPr>
-          <a:xfrm>
-            <a:off x="8147304" y="2057400"/>
-            <a:ext cx="3127248" cy="566928"/>
-          </a:xfrm>
-          <a:prstGeom prst="rect">
-            <a:avLst/>
-          </a:prstGeom>
-          <a:noFill/>
-        </p:spPr>
-        <p:txBody>
-          <a:bodyPr wrap="square" lIns="36576" rIns="36576" tIns="36576" bIns="36576" anchor="t">
-            <a:spAutoFit/>
-          </a:bodyPr>
-          <a:lstStyle/>
-          <a:p>
-            <a:pPr algn="ctr">
-              <a:defRPr sz="1400" b="0">
-                <a:solidFill>
-                  <a:srgbClr val="17343A"/>
-                </a:solidFill>
-                <a:latin typeface="Noto Sans"/>
-              </a:defRPr>
-            </a:pPr>
-            <a:r>
-              <a:t>16 células de código</a:t>
-            </a:r>
-            <a:br/>
-            <a:r>
-              <a:t>20 células de texto</a:t>
-            </a:r>
-          </a:p>
-        </p:txBody>
-      </p:sp>
-      <p:sp>
-        <p:nvSpPr>
-          <p:cNvPr id="39" name="Rounded Rectangle 38"/>
-          <p:cNvSpPr/>
-          <p:nvPr/>
-        </p:nvSpPr>
-        <p:spPr>
-          <a:xfrm>
-            <a:off x="7818120" y="3319272"/>
-            <a:ext cx="3767328" cy="2240280"/>
-          </a:xfrm>
-          <a:prstGeom prst="roundRect">
-            <a:avLst/>
-          </a:prstGeom>
-          <a:solidFill>
-            <a:srgbClr val="F06449"/>
-          </a:solidFill>
-          <a:ln>
-            <a:noFill/>
-          </a:ln>
-        </p:spPr>
-        <p:style>
-          <a:lnRef idx="1">
-            <a:schemeClr val="accent1"/>
-          </a:lnRef>
-          <a:fillRef idx="3">
-            <a:schemeClr val="accent1"/>
-          </a:fillRef>
-          <a:effectRef idx="2">
-            <a:schemeClr val="accent1"/>
-          </a:effectRef>
-          <a:fontRef idx="minor">
-            <a:schemeClr val="lt1"/>
-          </a:fontRef>
-        </p:style>
-        <p:txBody>
-          <a:bodyPr rtlCol="0" anchor="ctr"/>
-          <a:lstStyle/>
-          <a:p>
-            <a:pPr algn="ctr"/>
-          </a:p>
-        </p:txBody>
-      </p:sp>
-      <p:sp>
-        <p:nvSpPr>
-          <p:cNvPr id="40" name="TextBox 39"/>
-          <p:cNvSpPr txBox="1"/>
-          <p:nvPr/>
-        </p:nvSpPr>
-        <p:spPr>
-          <a:xfrm>
-            <a:off x="8129016" y="3584448"/>
-            <a:ext cx="3154680" cy="365760"/>
-          </a:xfrm>
-          <a:prstGeom prst="rect">
-            <a:avLst/>
-          </a:prstGeom>
-          <a:noFill/>
-        </p:spPr>
-        <p:txBody>
-          <a:bodyPr wrap="square" lIns="36576" rIns="36576" tIns="36576" bIns="36576" anchor="t">
-            <a:spAutoFit/>
-          </a:bodyPr>
-          <a:lstStyle/>
-          <a:p>
-            <a:pPr algn="ctr">
-              <a:defRPr sz="2000" b="1">
-                <a:solidFill>
-                  <a:srgbClr val="17343A"/>
-                </a:solidFill>
-                <a:latin typeface="Noto Sans"/>
-              </a:defRPr>
-            </a:pPr>
-            <a:r>
-              <a:t>Próximos Passos</a:t>
-            </a:r>
-          </a:p>
-        </p:txBody>
-      </p:sp>
-      <p:sp>
-        <p:nvSpPr>
-          <p:cNvPr id="41" name="TextBox 40"/>
-          <p:cNvSpPr txBox="1"/>
-          <p:nvPr/>
-        </p:nvSpPr>
-        <p:spPr>
-          <a:xfrm>
-            <a:off x="8165592" y="4142232"/>
-            <a:ext cx="3017520" cy="1170432"/>
-          </a:xfrm>
-          <a:prstGeom prst="rect">
-            <a:avLst/>
-          </a:prstGeom>
-          <a:noFill/>
-        </p:spPr>
-        <p:txBody>
-          <a:bodyPr wrap="square" lIns="73152" rIns="73152">
-            <a:spAutoFit/>
-          </a:bodyPr>
-          <a:lstStyle/>
-          <a:p>
-            <a:pPr>
-              <a:spcAft>
-                <a:spcPts val="600"/>
-              </a:spcAft>
-              <a:defRPr sz="1300">
-                <a:solidFill>
-                  <a:srgbClr val="17343A"/>
-                </a:solidFill>
-                <a:latin typeface="Noto Sans"/>
-              </a:defRPr>
-            </a:pPr>
-            <a:r>
-              <a:t>•  Cruzar cronograma de obras</a:t>
-            </a:r>
-          </a:p>
-          <a:p>
-            <a:pPr>
-              <a:spcAft>
-                <a:spcPts val="600"/>
-              </a:spcAft>
-              <a:defRPr sz="1300">
-                <a:solidFill>
-                  <a:srgbClr val="17343A"/>
-                </a:solidFill>
-                <a:latin typeface="Noto Sans"/>
-              </a:defRPr>
-            </a:pPr>
-            <a:r>
-              <a:t>•  Coletar GPS por trecho</a:t>
-            </a:r>
-          </a:p>
-          <a:p>
-            <a:pPr>
-              <a:spcAft>
-                <a:spcPts val="600"/>
-              </a:spcAft>
-              <a:defRPr sz="1300">
-                <a:solidFill>
-                  <a:srgbClr val="17343A"/>
-                </a:solidFill>
-                <a:latin typeface="Noto Sans"/>
-              </a:defRPr>
-            </a:pPr>
-            <a:r>
-              <a:t>•  Testar desvio ou antecipação</a:t>
-            </a:r>
-          </a:p>
-        </p:txBody>
-      </p:sp>
-      <p:sp>
-        <p:nvSpPr>
-          <p:cNvPr id="42" name="TextBox 41"/>
-          <p:cNvSpPr txBox="1"/>
-          <p:nvPr/>
-        </p:nvSpPr>
-        <p:spPr>
-          <a:xfrm>
-            <a:off x="8366760" y="5971032"/>
+            <a:off x="4727448" y="6053328"/>
             <a:ext cx="2743200" cy="347472"/>
           </a:xfrm>
           <a:prstGeom prst="rect">
@@ -16696,7 +15490,7 @@
       </p:sp>
       <p:sp>
         <p:nvSpPr>
-          <p:cNvPr id="43" name="Rounded Rectangle 42"/>
+          <p:cNvPr id="29" name="Rounded Rectangle 28"/>
           <p:cNvSpPr/>
           <p:nvPr/>
         </p:nvSpPr>
@@ -16741,7 +15535,7 @@
       </p:sp>
       <p:sp>
         <p:nvSpPr>
-          <p:cNvPr id="44" name="TextBox 43"/>
+          <p:cNvPr id="30" name="TextBox 29"/>
           <p:cNvSpPr txBox="1"/>
           <p:nvPr/>
         </p:nvSpPr>

--- a/docs/apresentacao/apresentacao_rota_em_dia.pptx
+++ b/docs/apresentacao/apresentacao_rota_em_dia.pptx
@@ -5044,7 +5044,7 @@
               </a:defRPr>
             </a:pPr>
             <a:r>
-              <a:t>O Problema</a:t>
+              <a:t>Problema e Pergunta Central</a:t>
             </a:r>
           </a:p>
         </p:txBody>
@@ -5058,7 +5058,7 @@
         <p:spPr>
           <a:xfrm>
             <a:off x="658368" y="1115568"/>
-            <a:ext cx="6720840" cy="2971800"/>
+            <a:ext cx="6720840" cy="3200400"/>
           </a:xfrm>
           <a:prstGeom prst="roundRect">
             <a:avLst>
@@ -5102,8 +5102,8 @@
         </p:nvSpPr>
         <p:spPr>
           <a:xfrm>
-            <a:off x="987552" y="1572768"/>
-            <a:ext cx="6080760" cy="1024128"/>
+            <a:off x="987552" y="1371600"/>
+            <a:ext cx="6080760" cy="603504"/>
           </a:xfrm>
           <a:prstGeom prst="rect">
             <a:avLst/>
@@ -5117,7 +5117,7 @@
           <a:lstStyle/>
           <a:p>
             <a:pPr algn="l">
-              <a:defRPr sz="2400" b="1">
+              <a:defRPr sz="1600" b="1">
                 <a:solidFill>
                   <a:srgbClr val="005A67"/>
                 </a:solidFill>
@@ -5138,8 +5138,8 @@
         </p:nvSpPr>
         <p:spPr>
           <a:xfrm>
-            <a:off x="987552" y="2907792"/>
-            <a:ext cx="5943600" cy="804672"/>
+            <a:off x="987552" y="2084831"/>
+            <a:ext cx="5943600" cy="274320"/>
           </a:xfrm>
           <a:prstGeom prst="rect">
             <a:avLst/>
@@ -5153,22 +5153,58 @@
           <a:lstStyle/>
           <a:p>
             <a:pPr algn="l">
-              <a:defRPr sz="1600" b="0">
-                <a:solidFill>
-                  <a:srgbClr val="17343A"/>
-                </a:solidFill>
-                <a:latin typeface="Noto Sans"/>
-              </a:defRPr>
-            </a:pPr>
-            <a:r>
-              <a:t>O RH precisa saber se a piora é geral, onde ela se concentra e qual explicação os dados realmente sustentam.</a:t>
-            </a:r>
-          </a:p>
-        </p:txBody>
-      </p:sp>
-      <p:sp>
-        <p:nvSpPr>
-          <p:cNvPr id="11" name="Rounded Rectangle 10"/>
+              <a:defRPr sz="1200" b="1">
+                <a:solidFill>
+                  <a:srgbClr val="F06449"/>
+                </a:solidFill>
+                <a:latin typeface="Noto Sans"/>
+              </a:defRPr>
+            </a:pPr>
+            <a:r>
+              <a:t>PERGUNTA CENTRAL</a:t>
+            </a:r>
+          </a:p>
+        </p:txBody>
+      </p:sp>
+      <p:sp>
+        <p:nvSpPr>
+          <p:cNvPr id="11" name="TextBox 10"/>
+          <p:cNvSpPr txBox="1"/>
+          <p:nvPr/>
+        </p:nvSpPr>
+        <p:spPr>
+          <a:xfrm>
+            <a:off x="987552" y="2423160"/>
+            <a:ext cx="5989320" cy="1444752"/>
+          </a:xfrm>
+          <a:prstGeom prst="rect">
+            <a:avLst/>
+          </a:prstGeom>
+          <a:noFill/>
+        </p:spPr>
+        <p:txBody>
+          <a:bodyPr wrap="square" lIns="36576" rIns="36576" tIns="36576" bIns="36576" anchor="t">
+            <a:spAutoFit/>
+          </a:bodyPr>
+          <a:lstStyle/>
+          <a:p>
+            <a:pPr algn="l">
+              <a:defRPr sz="2000" b="1">
+                <a:solidFill>
+                  <a:srgbClr val="005A67"/>
+                </a:solidFill>
+                <a:latin typeface="Noto Sans"/>
+              </a:defRPr>
+            </a:pPr>
+            <a:r>
+              <a:t>Por que os atrasos do transporte fretado aumentaram, onde se concentram e quais evidências sustentam a explicação mais plausível?</a:t>
+            </a:r>
+          </a:p>
+        </p:txBody>
+      </p:sp>
+      <p:sp>
+        <p:nvSpPr>
+          <p:cNvPr id="12" name="Rounded Rectangle 11"/>
           <p:cNvSpPr/>
           <p:nvPr/>
         </p:nvSpPr>
@@ -5213,7 +5249,7 @@
       </p:sp>
       <p:sp>
         <p:nvSpPr>
-          <p:cNvPr id="12" name="TextBox 11"/>
+          <p:cNvPr id="13" name="TextBox 12"/>
           <p:cNvSpPr txBox="1"/>
           <p:nvPr/>
         </p:nvSpPr>
@@ -5249,7 +5285,7 @@
       </p:sp>
       <p:sp>
         <p:nvSpPr>
-          <p:cNvPr id="13" name="TextBox 12"/>
+          <p:cNvPr id="14" name="TextBox 13"/>
           <p:cNvSpPr txBox="1"/>
           <p:nvPr/>
         </p:nvSpPr>
@@ -5285,7 +5321,7 @@
       </p:sp>
       <p:sp>
         <p:nvSpPr>
-          <p:cNvPr id="14" name="Rounded Rectangle 13"/>
+          <p:cNvPr id="15" name="Rounded Rectangle 14"/>
           <p:cNvSpPr/>
           <p:nvPr/>
         </p:nvSpPr>
@@ -5330,7 +5366,7 @@
       </p:sp>
       <p:sp>
         <p:nvSpPr>
-          <p:cNvPr id="15" name="TextBox 14"/>
+          <p:cNvPr id="16" name="TextBox 15"/>
           <p:cNvSpPr txBox="1"/>
           <p:nvPr/>
         </p:nvSpPr>
@@ -5366,7 +5402,7 @@
       </p:sp>
       <p:sp>
         <p:nvSpPr>
-          <p:cNvPr id="16" name="TextBox 15"/>
+          <p:cNvPr id="17" name="TextBox 16"/>
           <p:cNvSpPr txBox="1"/>
           <p:nvPr/>
         </p:nvSpPr>
@@ -5402,7 +5438,7 @@
       </p:sp>
       <p:sp>
         <p:nvSpPr>
-          <p:cNvPr id="17" name="Rounded Rectangle 16"/>
+          <p:cNvPr id="18" name="Rounded Rectangle 17"/>
           <p:cNvSpPr/>
           <p:nvPr/>
         </p:nvSpPr>
@@ -5447,7 +5483,7 @@
       </p:sp>
       <p:sp>
         <p:nvSpPr>
-          <p:cNvPr id="18" name="TextBox 17"/>
+          <p:cNvPr id="19" name="TextBox 18"/>
           <p:cNvSpPr txBox="1"/>
           <p:nvPr/>
         </p:nvSpPr>
@@ -5483,7 +5519,7 @@
       </p:sp>
       <p:sp>
         <p:nvSpPr>
-          <p:cNvPr id="19" name="TextBox 18"/>
+          <p:cNvPr id="20" name="TextBox 19"/>
           <p:cNvSpPr txBox="1"/>
           <p:nvPr/>
         </p:nvSpPr>
@@ -5519,7 +5555,7 @@
       </p:sp>
       <p:sp>
         <p:nvSpPr>
-          <p:cNvPr id="20" name="Rounded Rectangle 19"/>
+          <p:cNvPr id="21" name="Rounded Rectangle 20"/>
           <p:cNvSpPr/>
           <p:nvPr/>
         </p:nvSpPr>
@@ -5564,7 +5600,7 @@
       </p:sp>
       <p:sp>
         <p:nvSpPr>
-          <p:cNvPr id="21" name="TextBox 20"/>
+          <p:cNvPr id="22" name="TextBox 21"/>
           <p:cNvSpPr txBox="1"/>
           <p:nvPr/>
         </p:nvSpPr>
@@ -5600,7 +5636,7 @@
       </p:sp>
       <p:sp>
         <p:nvSpPr>
-          <p:cNvPr id="22" name="TextBox 21"/>
+          <p:cNvPr id="23" name="TextBox 22"/>
           <p:cNvSpPr txBox="1"/>
           <p:nvPr/>
         </p:nvSpPr>
@@ -5636,7 +5672,7 @@
       </p:sp>
       <p:sp>
         <p:nvSpPr>
-          <p:cNvPr id="23" name="TextBox 22"/>
+          <p:cNvPr id="24" name="TextBox 23"/>
           <p:cNvSpPr txBox="1"/>
           <p:nvPr/>
         </p:nvSpPr>
@@ -5672,7 +5708,7 @@
       </p:sp>
       <p:sp>
         <p:nvSpPr>
-          <p:cNvPr id="24" name="TextBox 23"/>
+          <p:cNvPr id="25" name="TextBox 24"/>
           <p:cNvSpPr txBox="1"/>
           <p:nvPr/>
         </p:nvSpPr>
@@ -5708,7 +5744,7 @@
       </p:sp>
       <p:sp>
         <p:nvSpPr>
-          <p:cNvPr id="25" name="TextBox 24"/>
+          <p:cNvPr id="26" name="TextBox 25"/>
           <p:cNvSpPr txBox="1"/>
           <p:nvPr/>
         </p:nvSpPr>
@@ -6007,7 +6043,7 @@
               </a:defRPr>
             </a:pPr>
             <a:r>
-              <a:t>Perguntas e Hipóteses</a:t>
+              <a:t>Hipóteses Para Responder</a:t>
             </a:r>
           </a:p>
         </p:txBody>
@@ -6088,7 +6124,7 @@
               </a:defRPr>
             </a:pPr>
             <a:r>
-              <a:t>A queda é geral por causa da chuva ou está concentrada em rotas, turnos e períodos específicos?</a:t>
+              <a:t>Testamos três explicações concorrentes para responder por que os atrasos aumentaram.</a:t>
             </a:r>
           </a:p>
         </p:txBody>
@@ -6691,7 +6727,7 @@
               </a:defRPr>
             </a:pPr>
             <a:r>
-              <a:t>Não buscamos uma resposta escondida. Construímos a explicação mais defensável.</a:t>
+              <a:t>Cada hipótese foi confrontada com evidências, comparações e limitações.</a:t>
             </a:r>
           </a:p>
         </p:txBody>
@@ -8939,7 +8975,7 @@
               </a:defRPr>
             </a:pPr>
             <a:r>
-              <a:t>Evidências e Conclusão</a:t>
+              <a:t>Resposta à Pergunta Central</a:t>
             </a:r>
           </a:p>
         </p:txBody>
@@ -9044,7 +9080,7 @@
               </a:defRPr>
             </a:pPr>
             <a:r>
-              <a:t>Chuva Agrava</a:t>
+              <a:t>Onde?</a:t>
             </a:r>
           </a:p>
         </p:txBody>
@@ -9080,7 +9116,7 @@
               </a:defRPr>
             </a:pPr>
             <a:r>
-              <a:t>Correlação moderada, mas o efeito aparece em toda a operação.</a:t>
+              <a:t>R03 e R05, nos turnos da manhã e tarde, desde 06/04.</a:t>
             </a:r>
           </a:p>
         </p:txBody>
@@ -9161,7 +9197,7 @@
               </a:defRPr>
             </a:pPr>
             <a:r>
-              <a:t>Obra Localiza</a:t>
+              <a:t>Por quê?</a:t>
             </a:r>
           </a:p>
         </p:txBody>
@@ -9197,7 +9233,7 @@
               </a:defRPr>
             </a:pPr>
             <a:r>
-              <a:t>“Obra na via” surge em 07/04 somente em R03 e R05.</a:t>
+              <a:t>Restrição diurna no corredor é a explicação mais plausível.</a:t>
             </a:r>
           </a:p>
         </p:txBody>
@@ -9278,7 +9314,7 @@
               </a:defRPr>
             </a:pPr>
             <a:r>
-              <a:t>Noite Preserva</a:t>
+              <a:t>Evidências</a:t>
             </a:r>
           </a:p>
         </p:txBody>
@@ -9314,7 +9350,7 @@
               </a:defRPr>
             </a:pPr>
             <a:r>
-              <a:t>As duas rotas mantêm 96% de pontualidade no turno noturno.</a:t>
+              <a:t>Média móvel, heatmap, distribuição, chuva controlada e registros de obra.</a:t>
             </a:r>
           </a:p>
         </p:txBody>
@@ -9387,7 +9423,7 @@
           <a:lstStyle/>
           <a:p>
             <a:pPr algn="ctr">
-              <a:defRPr sz="1600" b="1">
+              <a:defRPr sz="1500" b="1">
                 <a:solidFill>
                   <a:srgbClr val="FFF8E8"/>
                 </a:solidFill>
@@ -9395,7 +9431,7 @@
               </a:defRPr>
             </a:pPr>
             <a:r>
-              <a:t>Hipótese mais plausível: restrição diurna no corredor compartilhado.</a:t>
+              <a:t>A resposta ainda precisa de confirmação com GPS e cronogramas de obra.</a:t>
             </a:r>
           </a:p>
         </p:txBody>
